--- a/Python/Lesson 06 - Error Handling/Lesson 06 - Error Handling.pptx
+++ b/Python/Lesson 06 - Error Handling/Lesson 06 - Error Handling.pptx
@@ -5,7 +5,7 @@
     <p:sldMasterId id="2147483684" r:id="rId1"/>
   </p:sldMasterIdLst>
   <p:notesMasterIdLst>
-    <p:notesMasterId r:id="rId18"/>
+    <p:notesMasterId r:id="rId19"/>
   </p:notesMasterIdLst>
   <p:sldIdLst>
     <p:sldId id="256" r:id="rId2"/>
@@ -15,32 +15,33 @@
     <p:sldId id="498" r:id="rId6"/>
     <p:sldId id="499" r:id="rId7"/>
     <p:sldId id="272" r:id="rId8"/>
-    <p:sldId id="273" r:id="rId9"/>
-    <p:sldId id="274" r:id="rId10"/>
-    <p:sldId id="275" r:id="rId11"/>
-    <p:sldId id="276" r:id="rId12"/>
-    <p:sldId id="277" r:id="rId13"/>
-    <p:sldId id="494" r:id="rId14"/>
-    <p:sldId id="278" r:id="rId15"/>
-    <p:sldId id="279" r:id="rId16"/>
-    <p:sldId id="280" r:id="rId17"/>
+    <p:sldId id="500" r:id="rId9"/>
+    <p:sldId id="273" r:id="rId10"/>
+    <p:sldId id="274" r:id="rId11"/>
+    <p:sldId id="275" r:id="rId12"/>
+    <p:sldId id="276" r:id="rId13"/>
+    <p:sldId id="277" r:id="rId14"/>
+    <p:sldId id="494" r:id="rId15"/>
+    <p:sldId id="278" r:id="rId16"/>
+    <p:sldId id="279" r:id="rId17"/>
+    <p:sldId id="280" r:id="rId18"/>
   </p:sldIdLst>
   <p:sldSz cx="9144000" cy="5143500" type="screen16x9"/>
   <p:notesSz cx="6858000" cy="9144000"/>
   <p:embeddedFontLst>
     <p:embeddedFont>
       <p:font typeface="Consolas" panose="020B0609020204030204" pitchFamily="49" charset="0"/>
-      <p:regular r:id="rId19"/>
-      <p:bold r:id="rId20"/>
-      <p:italic r:id="rId21"/>
-      <p:boldItalic r:id="rId22"/>
+      <p:regular r:id="rId20"/>
+      <p:bold r:id="rId21"/>
+      <p:italic r:id="rId22"/>
+      <p:boldItalic r:id="rId23"/>
     </p:embeddedFont>
     <p:embeddedFont>
       <p:font typeface="Roboto" panose="02000000000000000000" pitchFamily="2" charset="0"/>
-      <p:regular r:id="rId23"/>
-      <p:bold r:id="rId24"/>
-      <p:italic r:id="rId25"/>
-      <p:boldItalic r:id="rId26"/>
+      <p:regular r:id="rId24"/>
+      <p:bold r:id="rId25"/>
+      <p:italic r:id="rId26"/>
+      <p:boldItalic r:id="rId27"/>
     </p:embeddedFont>
   </p:embeddedFontLst>
   <p:defaultTextStyle>
@@ -997,6 +998,128 @@
   <p:cSld>
     <p:spTree>
       <p:nvGrpSpPr>
+        <p:cNvPr id="1" name="Shape 479"/>
+        <p:cNvGrpSpPr/>
+        <p:nvPr/>
+      </p:nvGrpSpPr>
+      <p:grpSpPr>
+        <a:xfrm>
+          <a:off x="0" y="0"/>
+          <a:ext cx="0" cy="0"/>
+          <a:chOff x="0" y="0"/>
+          <a:chExt cx="0" cy="0"/>
+        </a:xfrm>
+      </p:grpSpPr>
+      <p:sp>
+        <p:nvSpPr>
+          <p:cNvPr id="480" name="Google Shape;480;p19:notes"/>
+          <p:cNvSpPr>
+            <a:spLocks noGrp="1" noRot="1" noChangeAspect="1"/>
+          </p:cNvSpPr>
+          <p:nvPr>
+            <p:ph type="sldImg" idx="2"/>
+          </p:nvPr>
+        </p:nvSpPr>
+        <p:spPr>
+          <a:xfrm>
+            <a:off x="381000" y="685800"/>
+            <a:ext cx="6096000" cy="3429000"/>
+          </a:xfrm>
+          <a:custGeom>
+            <a:avLst/>
+            <a:gdLst/>
+            <a:ahLst/>
+            <a:cxnLst/>
+            <a:rect l="l" t="t" r="r" b="b"/>
+            <a:pathLst>
+              <a:path w="120000" h="120000" extrusionOk="0">
+                <a:moveTo>
+                  <a:pt x="0" y="0"/>
+                </a:moveTo>
+                <a:lnTo>
+                  <a:pt x="120000" y="0"/>
+                </a:lnTo>
+                <a:lnTo>
+                  <a:pt x="120000" y="120000"/>
+                </a:lnTo>
+                <a:lnTo>
+                  <a:pt x="0" y="120000"/>
+                </a:lnTo>
+                <a:close/>
+              </a:path>
+            </a:pathLst>
+          </a:custGeom>
+          <a:noFill/>
+          <a:ln w="9525" cap="flat" cmpd="sng">
+            <a:solidFill>
+              <a:srgbClr val="000000"/>
+            </a:solidFill>
+            <a:prstDash val="solid"/>
+            <a:round/>
+            <a:headEnd type="none" w="sm" len="sm"/>
+            <a:tailEnd type="none" w="sm" len="sm"/>
+          </a:ln>
+        </p:spPr>
+      </p:sp>
+      <p:sp>
+        <p:nvSpPr>
+          <p:cNvPr id="481" name="Google Shape;481;p19:notes"/>
+          <p:cNvSpPr txBox="1">
+            <a:spLocks noGrp="1"/>
+          </p:cNvSpPr>
+          <p:nvPr>
+            <p:ph type="body" idx="1"/>
+          </p:nvPr>
+        </p:nvSpPr>
+        <p:spPr>
+          <a:xfrm>
+            <a:off x="685800" y="4343400"/>
+            <a:ext cx="5486400" cy="4114800"/>
+          </a:xfrm>
+          <a:prstGeom prst="rect">
+            <a:avLst/>
+          </a:prstGeom>
+          <a:noFill/>
+          <a:ln>
+            <a:noFill/>
+          </a:ln>
+        </p:spPr>
+        <p:txBody>
+          <a:bodyPr spcFirstLastPara="1" wrap="square" lIns="91425" tIns="91425" rIns="91425" bIns="91425" anchor="t" anchorCtr="0">
+            <a:noAutofit/>
+          </a:bodyPr>
+          <a:lstStyle/>
+          <a:p>
+            <a:pPr marL="0" lvl="0" indent="0" algn="l" rtl="0">
+              <a:lnSpc>
+                <a:spcPct val="100000"/>
+              </a:lnSpc>
+              <a:spcBef>
+                <a:spcPts val="0"/>
+              </a:spcBef>
+              <a:spcAft>
+                <a:spcPts val="0"/>
+              </a:spcAft>
+              <a:buSzPts val="1100"/>
+              <a:buNone/>
+            </a:pPr>
+            <a:endParaRPr/>
+          </a:p>
+        </p:txBody>
+      </p:sp>
+    </p:spTree>
+  </p:cSld>
+  <p:clrMapOvr>
+    <a:masterClrMapping/>
+  </p:clrMapOvr>
+</p:notes>
+</file>
+
+<file path=ppt/notesSlides/notesSlide11.xml><?xml version="1.0" encoding="utf-8"?>
+<p:notes xmlns:a="http://schemas.openxmlformats.org/drawingml/2006/main" xmlns:r="http://schemas.openxmlformats.org/officeDocument/2006/relationships" xmlns:p="http://schemas.openxmlformats.org/presentationml/2006/main" showMasterSp="0" showMasterPhAnim="0">
+  <p:cSld>
+    <p:spTree>
+      <p:nvGrpSpPr>
         <p:cNvPr id="1" name="Shape 484"/>
         <p:cNvGrpSpPr/>
         <p:nvPr/>
@@ -1114,7 +1237,7 @@
 </p:notes>
 </file>
 
-<file path=ppt/notesSlides/notesSlide11.xml><?xml version="1.0" encoding="utf-8"?>
+<file path=ppt/notesSlides/notesSlide12.xml><?xml version="1.0" encoding="utf-8"?>
 <p:notes xmlns:a="http://schemas.openxmlformats.org/drawingml/2006/main" xmlns:r="http://schemas.openxmlformats.org/officeDocument/2006/relationships" xmlns:p="http://schemas.openxmlformats.org/presentationml/2006/main" showMasterSp="0" showMasterPhAnim="0">
   <p:cSld>
     <p:spTree>
@@ -1236,7 +1359,7 @@
 </p:notes>
 </file>
 
-<file path=ppt/notesSlides/notesSlide12.xml><?xml version="1.0" encoding="utf-8"?>
+<file path=ppt/notesSlides/notesSlide13.xml><?xml version="1.0" encoding="utf-8"?>
 <p:notes xmlns:a="http://schemas.openxmlformats.org/drawingml/2006/main" xmlns:r="http://schemas.openxmlformats.org/officeDocument/2006/relationships" xmlns:p="http://schemas.openxmlformats.org/presentationml/2006/main" showMasterSp="0" showMasterPhAnim="0">
   <p:cSld>
     <p:spTree>
@@ -1358,7 +1481,7 @@
 </p:notes>
 </file>
 
-<file path=ppt/notesSlides/notesSlide13.xml><?xml version="1.0" encoding="utf-8"?>
+<file path=ppt/notesSlides/notesSlide14.xml><?xml version="1.0" encoding="utf-8"?>
 <p:notes xmlns:a="http://schemas.openxmlformats.org/drawingml/2006/main" xmlns:r="http://schemas.openxmlformats.org/officeDocument/2006/relationships" xmlns:p="http://schemas.openxmlformats.org/presentationml/2006/main" showMasterSp="0" showMasterPhAnim="0">
   <p:cSld>
     <p:spTree>
@@ -1503,7 +1626,7 @@
 </p:notes>
 </file>
 
-<file path=ppt/notesSlides/notesSlide14.xml><?xml version="1.0" encoding="utf-8"?>
+<file path=ppt/notesSlides/notesSlide15.xml><?xml version="1.0" encoding="utf-8"?>
 <p:notes xmlns:a="http://schemas.openxmlformats.org/drawingml/2006/main" xmlns:r="http://schemas.openxmlformats.org/officeDocument/2006/relationships" xmlns:p="http://schemas.openxmlformats.org/presentationml/2006/main" showMasterSp="0" showMasterPhAnim="0">
   <p:cSld>
     <p:spTree>
@@ -1625,7 +1748,7 @@
 </p:notes>
 </file>
 
-<file path=ppt/notesSlides/notesSlide15.xml><?xml version="1.0" encoding="utf-8"?>
+<file path=ppt/notesSlides/notesSlide16.xml><?xml version="1.0" encoding="utf-8"?>
 <p:notes xmlns:a="http://schemas.openxmlformats.org/drawingml/2006/main" xmlns:r="http://schemas.openxmlformats.org/officeDocument/2006/relationships" xmlns:p="http://schemas.openxmlformats.org/presentationml/2006/main" showMasterSp="0" showMasterPhAnim="0">
   <p:cSld>
     <p:spTree>
@@ -1747,7 +1870,7 @@
 </p:notes>
 </file>
 
-<file path=ppt/notesSlides/notesSlide16.xml><?xml version="1.0" encoding="utf-8"?>
+<file path=ppt/notesSlides/notesSlide17.xml><?xml version="1.0" encoding="utf-8"?>
 <p:notes xmlns:a="http://schemas.openxmlformats.org/drawingml/2006/main" xmlns:r="http://schemas.openxmlformats.org/officeDocument/2006/relationships" xmlns:p="http://schemas.openxmlformats.org/presentationml/2006/main" showMasterSp="0" showMasterPhAnim="0">
   <p:cSld>
     <p:spTree>
@@ -2689,6 +2812,151 @@
   <p:cSld>
     <p:spTree>
       <p:nvGrpSpPr>
+        <p:cNvPr id="1" name="Shape 467">
+          <a:extLst>
+            <a:ext uri="{FF2B5EF4-FFF2-40B4-BE49-F238E27FC236}">
+              <a16:creationId xmlns:a16="http://schemas.microsoft.com/office/drawing/2014/main" id="{A12850EA-6959-E61A-77A1-1B802E9AFBF4}"/>
+            </a:ext>
+          </a:extLst>
+        </p:cNvPr>
+        <p:cNvGrpSpPr/>
+        <p:nvPr/>
+      </p:nvGrpSpPr>
+      <p:grpSpPr>
+        <a:xfrm>
+          <a:off x="0" y="0"/>
+          <a:ext cx="0" cy="0"/>
+          <a:chOff x="0" y="0"/>
+          <a:chExt cx="0" cy="0"/>
+        </a:xfrm>
+      </p:grpSpPr>
+      <p:sp>
+        <p:nvSpPr>
+          <p:cNvPr id="468" name="Google Shape;468;p17:notes">
+            <a:extLst>
+              <a:ext uri="{FF2B5EF4-FFF2-40B4-BE49-F238E27FC236}">
+                <a16:creationId xmlns:a16="http://schemas.microsoft.com/office/drawing/2014/main" id="{00249F60-15B7-2FF2-B43C-EDA3D515B18C}"/>
+              </a:ext>
+            </a:extLst>
+          </p:cNvPr>
+          <p:cNvSpPr>
+            <a:spLocks noGrp="1" noRot="1" noChangeAspect="1"/>
+          </p:cNvSpPr>
+          <p:nvPr>
+            <p:ph type="sldImg" idx="2"/>
+          </p:nvPr>
+        </p:nvSpPr>
+        <p:spPr>
+          <a:xfrm>
+            <a:off x="381000" y="685800"/>
+            <a:ext cx="6096000" cy="3429000"/>
+          </a:xfrm>
+          <a:custGeom>
+            <a:avLst/>
+            <a:gdLst/>
+            <a:ahLst/>
+            <a:cxnLst/>
+            <a:rect l="l" t="t" r="r" b="b"/>
+            <a:pathLst>
+              <a:path w="120000" h="120000" extrusionOk="0">
+                <a:moveTo>
+                  <a:pt x="0" y="0"/>
+                </a:moveTo>
+                <a:lnTo>
+                  <a:pt x="120000" y="0"/>
+                </a:lnTo>
+                <a:lnTo>
+                  <a:pt x="120000" y="120000"/>
+                </a:lnTo>
+                <a:lnTo>
+                  <a:pt x="0" y="120000"/>
+                </a:lnTo>
+                <a:close/>
+              </a:path>
+            </a:pathLst>
+          </a:custGeom>
+          <a:noFill/>
+          <a:ln w="9525" cap="flat" cmpd="sng">
+            <a:solidFill>
+              <a:srgbClr val="000000"/>
+            </a:solidFill>
+            <a:prstDash val="solid"/>
+            <a:round/>
+            <a:headEnd type="none" w="sm" len="sm"/>
+            <a:tailEnd type="none" w="sm" len="sm"/>
+          </a:ln>
+        </p:spPr>
+      </p:sp>
+      <p:sp>
+        <p:nvSpPr>
+          <p:cNvPr id="469" name="Google Shape;469;p17:notes">
+            <a:extLst>
+              <a:ext uri="{FF2B5EF4-FFF2-40B4-BE49-F238E27FC236}">
+                <a16:creationId xmlns:a16="http://schemas.microsoft.com/office/drawing/2014/main" id="{218ADE94-6AB2-2A6F-2A0E-928FE2E56C9D}"/>
+              </a:ext>
+            </a:extLst>
+          </p:cNvPr>
+          <p:cNvSpPr txBox="1">
+            <a:spLocks noGrp="1"/>
+          </p:cNvSpPr>
+          <p:nvPr>
+            <p:ph type="body" idx="1"/>
+          </p:nvPr>
+        </p:nvSpPr>
+        <p:spPr>
+          <a:xfrm>
+            <a:off x="685800" y="4343400"/>
+            <a:ext cx="5486400" cy="4114800"/>
+          </a:xfrm>
+          <a:prstGeom prst="rect">
+            <a:avLst/>
+          </a:prstGeom>
+          <a:noFill/>
+          <a:ln>
+            <a:noFill/>
+          </a:ln>
+        </p:spPr>
+        <p:txBody>
+          <a:bodyPr spcFirstLastPara="1" wrap="square" lIns="91425" tIns="91425" rIns="91425" bIns="91425" anchor="t" anchorCtr="0">
+            <a:noAutofit/>
+          </a:bodyPr>
+          <a:lstStyle/>
+          <a:p>
+            <a:pPr marL="0" lvl="0" indent="0" algn="l" rtl="0">
+              <a:lnSpc>
+                <a:spcPct val="100000"/>
+              </a:lnSpc>
+              <a:spcBef>
+                <a:spcPts val="0"/>
+              </a:spcBef>
+              <a:spcAft>
+                <a:spcPts val="0"/>
+              </a:spcAft>
+              <a:buSzPts val="1100"/>
+              <a:buNone/>
+            </a:pPr>
+            <a:endParaRPr/>
+          </a:p>
+        </p:txBody>
+      </p:sp>
+    </p:spTree>
+    <p:extLst>
+      <p:ext uri="{BB962C8B-B14F-4D97-AF65-F5344CB8AC3E}">
+        <p14:creationId xmlns:p14="http://schemas.microsoft.com/office/powerpoint/2010/main" val="733368833"/>
+      </p:ext>
+    </p:extLst>
+  </p:cSld>
+  <p:clrMapOvr>
+    <a:masterClrMapping/>
+  </p:clrMapOvr>
+</p:notes>
+</file>
+
+<file path=ppt/notesSlides/notesSlide9.xml><?xml version="1.0" encoding="utf-8"?>
+<p:notes xmlns:a="http://schemas.openxmlformats.org/drawingml/2006/main" xmlns:r="http://schemas.openxmlformats.org/officeDocument/2006/relationships" xmlns:p="http://schemas.openxmlformats.org/presentationml/2006/main" showMasterSp="0" showMasterPhAnim="0">
+  <p:cSld>
+    <p:spTree>
+      <p:nvGrpSpPr>
         <p:cNvPr id="1" name="Shape 473"/>
         <p:cNvGrpSpPr/>
         <p:nvPr/>
@@ -2755,128 +3023,6 @@
       <p:sp>
         <p:nvSpPr>
           <p:cNvPr id="475" name="Google Shape;475;p18:notes"/>
-          <p:cNvSpPr txBox="1">
-            <a:spLocks noGrp="1"/>
-          </p:cNvSpPr>
-          <p:nvPr>
-            <p:ph type="body" idx="1"/>
-          </p:nvPr>
-        </p:nvSpPr>
-        <p:spPr>
-          <a:xfrm>
-            <a:off x="685800" y="4343400"/>
-            <a:ext cx="5486400" cy="4114800"/>
-          </a:xfrm>
-          <a:prstGeom prst="rect">
-            <a:avLst/>
-          </a:prstGeom>
-          <a:noFill/>
-          <a:ln>
-            <a:noFill/>
-          </a:ln>
-        </p:spPr>
-        <p:txBody>
-          <a:bodyPr spcFirstLastPara="1" wrap="square" lIns="91425" tIns="91425" rIns="91425" bIns="91425" anchor="t" anchorCtr="0">
-            <a:noAutofit/>
-          </a:bodyPr>
-          <a:lstStyle/>
-          <a:p>
-            <a:pPr marL="0" lvl="0" indent="0" algn="l" rtl="0">
-              <a:lnSpc>
-                <a:spcPct val="100000"/>
-              </a:lnSpc>
-              <a:spcBef>
-                <a:spcPts val="0"/>
-              </a:spcBef>
-              <a:spcAft>
-                <a:spcPts val="0"/>
-              </a:spcAft>
-              <a:buSzPts val="1100"/>
-              <a:buNone/>
-            </a:pPr>
-            <a:endParaRPr/>
-          </a:p>
-        </p:txBody>
-      </p:sp>
-    </p:spTree>
-  </p:cSld>
-  <p:clrMapOvr>
-    <a:masterClrMapping/>
-  </p:clrMapOvr>
-</p:notes>
-</file>
-
-<file path=ppt/notesSlides/notesSlide9.xml><?xml version="1.0" encoding="utf-8"?>
-<p:notes xmlns:a="http://schemas.openxmlformats.org/drawingml/2006/main" xmlns:r="http://schemas.openxmlformats.org/officeDocument/2006/relationships" xmlns:p="http://schemas.openxmlformats.org/presentationml/2006/main" showMasterSp="0" showMasterPhAnim="0">
-  <p:cSld>
-    <p:spTree>
-      <p:nvGrpSpPr>
-        <p:cNvPr id="1" name="Shape 479"/>
-        <p:cNvGrpSpPr/>
-        <p:nvPr/>
-      </p:nvGrpSpPr>
-      <p:grpSpPr>
-        <a:xfrm>
-          <a:off x="0" y="0"/>
-          <a:ext cx="0" cy="0"/>
-          <a:chOff x="0" y="0"/>
-          <a:chExt cx="0" cy="0"/>
-        </a:xfrm>
-      </p:grpSpPr>
-      <p:sp>
-        <p:nvSpPr>
-          <p:cNvPr id="480" name="Google Shape;480;p19:notes"/>
-          <p:cNvSpPr>
-            <a:spLocks noGrp="1" noRot="1" noChangeAspect="1"/>
-          </p:cNvSpPr>
-          <p:nvPr>
-            <p:ph type="sldImg" idx="2"/>
-          </p:nvPr>
-        </p:nvSpPr>
-        <p:spPr>
-          <a:xfrm>
-            <a:off x="381000" y="685800"/>
-            <a:ext cx="6096000" cy="3429000"/>
-          </a:xfrm>
-          <a:custGeom>
-            <a:avLst/>
-            <a:gdLst/>
-            <a:ahLst/>
-            <a:cxnLst/>
-            <a:rect l="l" t="t" r="r" b="b"/>
-            <a:pathLst>
-              <a:path w="120000" h="120000" extrusionOk="0">
-                <a:moveTo>
-                  <a:pt x="0" y="0"/>
-                </a:moveTo>
-                <a:lnTo>
-                  <a:pt x="120000" y="0"/>
-                </a:lnTo>
-                <a:lnTo>
-                  <a:pt x="120000" y="120000"/>
-                </a:lnTo>
-                <a:lnTo>
-                  <a:pt x="0" y="120000"/>
-                </a:lnTo>
-                <a:close/>
-              </a:path>
-            </a:pathLst>
-          </a:custGeom>
-          <a:noFill/>
-          <a:ln w="9525" cap="flat" cmpd="sng">
-            <a:solidFill>
-              <a:srgbClr val="000000"/>
-            </a:solidFill>
-            <a:prstDash val="solid"/>
-            <a:round/>
-            <a:headEnd type="none" w="sm" len="sm"/>
-            <a:tailEnd type="none" w="sm" len="sm"/>
-          </a:ln>
-        </p:spPr>
-      </p:sp>
-      <p:sp>
-        <p:nvSpPr>
-          <p:cNvPr id="481" name="Google Shape;481;p19:notes"/>
           <p:cNvSpPr txBox="1">
             <a:spLocks noGrp="1"/>
           </p:cNvSpPr>
@@ -44533,3634 +44679,6 @@
 </file>
 
 <file path=ppt/slides/slide10.xml><?xml version="1.0" encoding="utf-8"?>
-<p:sld xmlns:a="http://schemas.openxmlformats.org/drawingml/2006/main" xmlns:r="http://schemas.openxmlformats.org/officeDocument/2006/relationships" xmlns:p="http://schemas.openxmlformats.org/presentationml/2006/main">
-  <p:cSld>
-    <p:spTree>
-      <p:nvGrpSpPr>
-        <p:cNvPr id="1" name="Shape 487"/>
-        <p:cNvGrpSpPr/>
-        <p:nvPr/>
-      </p:nvGrpSpPr>
-      <p:grpSpPr>
-        <a:xfrm>
-          <a:off x="0" y="0"/>
-          <a:ext cx="0" cy="0"/>
-          <a:chOff x="0" y="0"/>
-          <a:chExt cx="0" cy="0"/>
-        </a:xfrm>
-      </p:grpSpPr>
-      <p:sp>
-        <p:nvSpPr>
-          <p:cNvPr id="488" name="Google Shape;488;p58"/>
-          <p:cNvSpPr txBox="1">
-            <a:spLocks noGrp="1"/>
-          </p:cNvSpPr>
-          <p:nvPr>
-            <p:ph type="title"/>
-          </p:nvPr>
-        </p:nvSpPr>
-        <p:spPr>
-          <a:xfrm>
-            <a:off x="411480" y="308611"/>
-            <a:ext cx="6173470" cy="891778"/>
-          </a:xfrm>
-          <a:noFill/>
-          <a:ln>
-            <a:noFill/>
-          </a:ln>
-        </p:spPr>
-        <p:txBody>
-          <a:bodyPr spcFirstLastPara="1" wrap="square" lIns="91425" tIns="91425" rIns="91425" bIns="91425" anchor="t" anchorCtr="0">
-            <a:normAutofit/>
-          </a:bodyPr>
-          <a:lstStyle/>
-          <a:p>
-            <a:pPr lvl="0"/>
-            <a:r>
-              <a:rPr lang="en-US"/>
-              <a:t>ERROR HANDLING</a:t>
-            </a:r>
-          </a:p>
-        </p:txBody>
-      </p:sp>
-      <p:sp>
-        <p:nvSpPr>
-          <p:cNvPr id="489" name="Google Shape;489;p58"/>
-          <p:cNvSpPr txBox="1"/>
-          <p:nvPr/>
-        </p:nvSpPr>
-        <p:spPr>
-          <a:xfrm>
-            <a:off x="606210" y="1570610"/>
-            <a:ext cx="7647000" cy="3241500"/>
-          </a:xfrm>
-          <a:prstGeom prst="rect">
-            <a:avLst/>
-          </a:prstGeom>
-          <a:noFill/>
-          <a:ln>
-            <a:noFill/>
-          </a:ln>
-        </p:spPr>
-        <p:txBody>
-          <a:bodyPr spcFirstLastPara="1" wrap="square" lIns="91425" tIns="91425" rIns="91425" bIns="91425" anchor="t" anchorCtr="0">
-            <a:noAutofit/>
-          </a:bodyPr>
-          <a:lstStyle/>
-          <a:p>
-            <a:pPr marL="457200" marR="0" lvl="0" indent="-342900" algn="l" rtl="0">
-              <a:lnSpc>
-                <a:spcPct val="100000"/>
-              </a:lnSpc>
-              <a:spcBef>
-                <a:spcPts val="0"/>
-              </a:spcBef>
-              <a:spcAft>
-                <a:spcPts val="0"/>
-              </a:spcAft>
-              <a:buClr>
-                <a:srgbClr val="FFFFFF"/>
-              </a:buClr>
-              <a:buSzPts val="1800"/>
-              <a:buFont typeface="Arial"/>
-              <a:buChar char="•"/>
-            </a:pPr>
-            <a:r>
-              <a:rPr lang="en" sz="1800" b="0" i="0" u="none" strike="noStrike" cap="none">
-                <a:solidFill>
-                  <a:schemeClr val="lt1"/>
-                </a:solidFill>
-                <a:latin typeface="Roboto"/>
-                <a:ea typeface="Roboto"/>
-                <a:cs typeface="Roboto"/>
-                <a:sym typeface="Roboto"/>
-              </a:rPr>
-              <a:t>Why Handle Errors?</a:t>
-            </a:r>
-            <a:endParaRPr sz="1800" b="0" i="0" u="none" strike="noStrike" cap="none">
-              <a:solidFill>
-                <a:schemeClr val="lt1"/>
-              </a:solidFill>
-              <a:latin typeface="Roboto"/>
-              <a:ea typeface="Roboto"/>
-              <a:cs typeface="Roboto"/>
-              <a:sym typeface="Roboto"/>
-            </a:endParaRPr>
-          </a:p>
-          <a:p>
-            <a:pPr marL="914400" marR="0" lvl="1" indent="-342900" algn="l" rtl="0">
-              <a:lnSpc>
-                <a:spcPct val="100000"/>
-              </a:lnSpc>
-              <a:spcBef>
-                <a:spcPts val="0"/>
-              </a:spcBef>
-              <a:spcAft>
-                <a:spcPts val="0"/>
-              </a:spcAft>
-              <a:buClr>
-                <a:srgbClr val="FFFFFF"/>
-              </a:buClr>
-              <a:buSzPts val="1800"/>
-              <a:buFont typeface="Arial"/>
-              <a:buChar char="•"/>
-            </a:pPr>
-            <a:r>
-              <a:rPr lang="en" sz="1800" b="0" i="0" u="none" strike="noStrike" cap="none">
-                <a:solidFill>
-                  <a:schemeClr val="lt1"/>
-                </a:solidFill>
-                <a:latin typeface="Roboto"/>
-                <a:ea typeface="Roboto"/>
-                <a:cs typeface="Roboto"/>
-                <a:sym typeface="Roboto"/>
-              </a:rPr>
-              <a:t>Prevent your program from crashing</a:t>
-            </a:r>
-            <a:endParaRPr sz="1800" b="0" i="0" u="none" strike="noStrike" cap="none">
-              <a:solidFill>
-                <a:schemeClr val="lt1"/>
-              </a:solidFill>
-              <a:latin typeface="Roboto"/>
-              <a:ea typeface="Roboto"/>
-              <a:cs typeface="Roboto"/>
-              <a:sym typeface="Roboto"/>
-            </a:endParaRPr>
-          </a:p>
-          <a:p>
-            <a:pPr marL="914400" marR="0" lvl="1" indent="-342900" algn="l" rtl="0">
-              <a:lnSpc>
-                <a:spcPct val="100000"/>
-              </a:lnSpc>
-              <a:spcBef>
-                <a:spcPts val="0"/>
-              </a:spcBef>
-              <a:spcAft>
-                <a:spcPts val="0"/>
-              </a:spcAft>
-              <a:buClr>
-                <a:srgbClr val="FFFFFF"/>
-              </a:buClr>
-              <a:buSzPts val="1800"/>
-              <a:buFont typeface="Arial"/>
-              <a:buChar char="•"/>
-            </a:pPr>
-            <a:r>
-              <a:rPr lang="en" sz="1800" b="0" i="0" u="none" strike="noStrike" cap="none">
-                <a:solidFill>
-                  <a:schemeClr val="lt1"/>
-                </a:solidFill>
-                <a:latin typeface="Roboto"/>
-                <a:ea typeface="Roboto"/>
-                <a:cs typeface="Roboto"/>
-                <a:sym typeface="Roboto"/>
-              </a:rPr>
-              <a:t>Provide helpful messages to users</a:t>
-            </a:r>
-            <a:endParaRPr sz="1800" b="0" i="0" u="none" strike="noStrike" cap="none">
-              <a:solidFill>
-                <a:schemeClr val="lt1"/>
-              </a:solidFill>
-              <a:latin typeface="Roboto"/>
-              <a:ea typeface="Roboto"/>
-              <a:cs typeface="Roboto"/>
-              <a:sym typeface="Roboto"/>
-            </a:endParaRPr>
-          </a:p>
-          <a:p>
-            <a:pPr marL="914400" marR="0" lvl="1" indent="-342900" algn="l" rtl="0">
-              <a:lnSpc>
-                <a:spcPct val="100000"/>
-              </a:lnSpc>
-              <a:spcBef>
-                <a:spcPts val="0"/>
-              </a:spcBef>
-              <a:spcAft>
-                <a:spcPts val="0"/>
-              </a:spcAft>
-              <a:buClr>
-                <a:srgbClr val="FFFFFF"/>
-              </a:buClr>
-              <a:buSzPts val="1800"/>
-              <a:buFont typeface="Arial"/>
-              <a:buChar char="•"/>
-            </a:pPr>
-            <a:r>
-              <a:rPr lang="en" sz="1800" b="0" i="0" u="none" strike="noStrike" cap="none">
-                <a:solidFill>
-                  <a:schemeClr val="lt1"/>
-                </a:solidFill>
-                <a:latin typeface="Roboto"/>
-                <a:ea typeface="Roboto"/>
-                <a:cs typeface="Roboto"/>
-                <a:sym typeface="Roboto"/>
-              </a:rPr>
-              <a:t>Let your code recover from unexpected situations</a:t>
-            </a:r>
-            <a:endParaRPr sz="1800" b="0" i="0" u="none" strike="noStrike" cap="none">
-              <a:solidFill>
-                <a:schemeClr val="lt1"/>
-              </a:solidFill>
-              <a:latin typeface="Roboto"/>
-              <a:ea typeface="Roboto"/>
-              <a:cs typeface="Roboto"/>
-              <a:sym typeface="Roboto"/>
-            </a:endParaRPr>
-          </a:p>
-        </p:txBody>
-      </p:sp>
-    </p:spTree>
-  </p:cSld>
-  <p:clrMapOvr>
-    <a:masterClrMapping/>
-  </p:clrMapOvr>
-</p:sld>
-</file>
-
-<file path=ppt/slides/slide11.xml><?xml version="1.0" encoding="utf-8"?>
-<p:sld xmlns:a="http://schemas.openxmlformats.org/drawingml/2006/main" xmlns:r="http://schemas.openxmlformats.org/officeDocument/2006/relationships" xmlns:p="http://schemas.openxmlformats.org/presentationml/2006/main">
-  <p:cSld>
-    <p:spTree>
-      <p:nvGrpSpPr>
-        <p:cNvPr id="1" name="Shape 493"/>
-        <p:cNvGrpSpPr/>
-        <p:nvPr/>
-      </p:nvGrpSpPr>
-      <p:grpSpPr>
-        <a:xfrm>
-          <a:off x="0" y="0"/>
-          <a:ext cx="0" cy="0"/>
-          <a:chOff x="0" y="0"/>
-          <a:chExt cx="0" cy="0"/>
-        </a:xfrm>
-      </p:grpSpPr>
-      <p:sp>
-        <p:nvSpPr>
-          <p:cNvPr id="494" name="Google Shape;494;p59"/>
-          <p:cNvSpPr txBox="1">
-            <a:spLocks noGrp="1"/>
-          </p:cNvSpPr>
-          <p:nvPr>
-            <p:ph type="title"/>
-          </p:nvPr>
-        </p:nvSpPr>
-        <p:spPr>
-          <a:xfrm>
-            <a:off x="411480" y="308611"/>
-            <a:ext cx="6173470" cy="891778"/>
-          </a:xfrm>
-          <a:noFill/>
-          <a:ln>
-            <a:noFill/>
-          </a:ln>
-        </p:spPr>
-        <p:txBody>
-          <a:bodyPr spcFirstLastPara="1" wrap="square" lIns="91425" tIns="91425" rIns="91425" bIns="91425" anchor="t" anchorCtr="0">
-            <a:normAutofit/>
-          </a:bodyPr>
-          <a:lstStyle/>
-          <a:p>
-            <a:pPr lvl="0"/>
-            <a:r>
-              <a:rPr lang="en-US"/>
-              <a:t>TRY - EXCEPT</a:t>
-            </a:r>
-          </a:p>
-        </p:txBody>
-      </p:sp>
-      <p:sp>
-        <p:nvSpPr>
-          <p:cNvPr id="495" name="Google Shape;495;p59"/>
-          <p:cNvSpPr txBox="1">
-            <a:spLocks noGrp="1"/>
-          </p:cNvSpPr>
-          <p:nvPr>
-            <p:ph type="body" idx="1"/>
-          </p:nvPr>
-        </p:nvSpPr>
-        <p:spPr>
-          <a:xfrm>
-            <a:off x="411480" y="1062990"/>
-            <a:ext cx="7572793" cy="3017520"/>
-          </a:xfrm>
-          <a:noFill/>
-          <a:ln>
-            <a:noFill/>
-          </a:ln>
-        </p:spPr>
-        <p:txBody>
-          <a:bodyPr spcFirstLastPara="1" wrap="square" lIns="91425" tIns="91425" rIns="91425" bIns="91425" anchor="t" anchorCtr="0">
-            <a:normAutofit/>
-          </a:bodyPr>
-          <a:lstStyle/>
-          <a:p>
-            <a:pPr lvl="0"/>
-            <a:r>
-              <a:rPr lang="en-US" dirty="0">
-                <a:solidFill>
-                  <a:schemeClr val="bg1"/>
-                </a:solidFill>
-              </a:rPr>
-              <a:t>Tries a block a code and if an error is raised, can handle that error gracefully</a:t>
-            </a:r>
-          </a:p>
-          <a:p>
-            <a:pPr lvl="0"/>
-            <a:endParaRPr lang="en-US" dirty="0"/>
-          </a:p>
-        </p:txBody>
-      </p:sp>
-      <p:sp>
-        <p:nvSpPr>
-          <p:cNvPr id="3" name="TextBox 2">
-            <a:extLst>
-              <a:ext uri="{FF2B5EF4-FFF2-40B4-BE49-F238E27FC236}">
-                <a16:creationId xmlns:a16="http://schemas.microsoft.com/office/drawing/2014/main" id="{FBB90202-0B70-8588-4936-1142769ECA11}"/>
-              </a:ext>
-            </a:extLst>
-          </p:cNvPr>
-          <p:cNvSpPr txBox="1"/>
-          <p:nvPr/>
-        </p:nvSpPr>
-        <p:spPr>
-          <a:xfrm>
-            <a:off x="553841" y="2099097"/>
-            <a:ext cx="5356303" cy="1631216"/>
-          </a:xfrm>
-          <a:prstGeom prst="rect">
-            <a:avLst/>
-          </a:prstGeom>
-          <a:noFill/>
-        </p:spPr>
-        <p:txBody>
-          <a:bodyPr wrap="square">
-            <a:spAutoFit/>
-          </a:bodyPr>
-          <a:lstStyle/>
-          <a:p>
-            <a:pPr lvl="0"/>
-            <a:r>
-              <a:rPr lang="en-US" sz="2000" dirty="0">
-                <a:solidFill>
-                  <a:schemeClr val="bg1"/>
-                </a:solidFill>
-                <a:sym typeface="Consolas"/>
-              </a:rPr>
-              <a:t>try:</a:t>
-            </a:r>
-          </a:p>
-          <a:p>
-            <a:pPr lvl="0"/>
-            <a:r>
-              <a:rPr lang="en-US" sz="2000" dirty="0">
-                <a:solidFill>
-                  <a:schemeClr val="bg1"/>
-                </a:solidFill>
-                <a:sym typeface="Consolas"/>
-              </a:rPr>
-              <a:t>     # code that might cause an error</a:t>
-            </a:r>
-          </a:p>
-          <a:p>
-            <a:pPr lvl="0"/>
-            <a:r>
-              <a:rPr lang="en-US" sz="2000" dirty="0">
-                <a:solidFill>
-                  <a:schemeClr val="bg1"/>
-                </a:solidFill>
-                <a:sym typeface="Consolas"/>
-              </a:rPr>
-              <a:t>     number = int("</a:t>
-            </a:r>
-            <a:r>
-              <a:rPr lang="en-US" sz="2000" dirty="0" err="1">
-                <a:solidFill>
-                  <a:schemeClr val="bg1"/>
-                </a:solidFill>
-                <a:sym typeface="Consolas"/>
-              </a:rPr>
-              <a:t>abc</a:t>
-            </a:r>
-            <a:r>
-              <a:rPr lang="en-US" sz="2000" dirty="0">
-                <a:solidFill>
-                  <a:schemeClr val="bg1"/>
-                </a:solidFill>
-                <a:sym typeface="Consolas"/>
-              </a:rPr>
-              <a:t>")</a:t>
-            </a:r>
-            <a:endParaRPr lang="en-US" sz="2000" dirty="0">
-              <a:solidFill>
-                <a:schemeClr val="bg1"/>
-              </a:solidFill>
-            </a:endParaRPr>
-          </a:p>
-          <a:p>
-            <a:pPr lvl="0"/>
-            <a:r>
-              <a:rPr lang="en-US" sz="2000" dirty="0">
-                <a:solidFill>
-                  <a:schemeClr val="bg1"/>
-                </a:solidFill>
-                <a:sym typeface="Consolas"/>
-              </a:rPr>
-              <a:t>except </a:t>
-            </a:r>
-            <a:r>
-              <a:rPr lang="en-US" sz="2000" dirty="0" err="1">
-                <a:solidFill>
-                  <a:schemeClr val="bg1"/>
-                </a:solidFill>
-                <a:sym typeface="Consolas"/>
-              </a:rPr>
-              <a:t>ValueError</a:t>
-            </a:r>
-            <a:r>
-              <a:rPr lang="en-US" sz="2000" dirty="0">
-                <a:solidFill>
-                  <a:schemeClr val="bg1"/>
-                </a:solidFill>
-                <a:sym typeface="Consolas"/>
-              </a:rPr>
-              <a:t>:</a:t>
-            </a:r>
-          </a:p>
-          <a:p>
-            <a:pPr lvl="0"/>
-            <a:r>
-              <a:rPr lang="en-US" sz="2000" dirty="0">
-                <a:solidFill>
-                  <a:schemeClr val="bg1"/>
-                </a:solidFill>
-                <a:sym typeface="Consolas"/>
-              </a:rPr>
-              <a:t>     print("Oops! That wasn't a number.")</a:t>
-            </a:r>
-          </a:p>
-        </p:txBody>
-      </p:sp>
-    </p:spTree>
-  </p:cSld>
-  <p:clrMapOvr>
-    <a:masterClrMapping/>
-  </p:clrMapOvr>
-</p:sld>
-</file>
-
-<file path=ppt/slides/slide12.xml><?xml version="1.0" encoding="utf-8"?>
-<p:sld xmlns:a="http://schemas.openxmlformats.org/drawingml/2006/main" xmlns:r="http://schemas.openxmlformats.org/officeDocument/2006/relationships" xmlns:p="http://schemas.openxmlformats.org/presentationml/2006/main">
-  <p:cSld>
-    <p:spTree>
-      <p:nvGrpSpPr>
-        <p:cNvPr id="1" name="Shape 499"/>
-        <p:cNvGrpSpPr/>
-        <p:nvPr/>
-      </p:nvGrpSpPr>
-      <p:grpSpPr>
-        <a:xfrm>
-          <a:off x="0" y="0"/>
-          <a:ext cx="0" cy="0"/>
-          <a:chOff x="0" y="0"/>
-          <a:chExt cx="0" cy="0"/>
-        </a:xfrm>
-      </p:grpSpPr>
-      <p:sp>
-        <p:nvSpPr>
-          <p:cNvPr id="500" name="Google Shape;500;p60"/>
-          <p:cNvSpPr txBox="1">
-            <a:spLocks noGrp="1"/>
-          </p:cNvSpPr>
-          <p:nvPr>
-            <p:ph type="title"/>
-          </p:nvPr>
-        </p:nvSpPr>
-        <p:spPr>
-          <a:xfrm>
-            <a:off x="411480" y="308611"/>
-            <a:ext cx="6173470" cy="891778"/>
-          </a:xfrm>
-          <a:noFill/>
-          <a:ln>
-            <a:noFill/>
-          </a:ln>
-        </p:spPr>
-        <p:txBody>
-          <a:bodyPr spcFirstLastPara="1" wrap="square" lIns="91425" tIns="91425" rIns="91425" bIns="91425" anchor="t" anchorCtr="0">
-            <a:normAutofit/>
-          </a:bodyPr>
-          <a:lstStyle/>
-          <a:p>
-            <a:pPr lvl="0"/>
-            <a:r>
-              <a:rPr lang="en-US"/>
-              <a:t>TRY - EXCEPT CONTINUED</a:t>
-            </a:r>
-          </a:p>
-        </p:txBody>
-      </p:sp>
-      <p:sp>
-        <p:nvSpPr>
-          <p:cNvPr id="501" name="Google Shape;501;p60"/>
-          <p:cNvSpPr txBox="1">
-            <a:spLocks noGrp="1"/>
-          </p:cNvSpPr>
-          <p:nvPr>
-            <p:ph type="body" idx="1"/>
-          </p:nvPr>
-        </p:nvSpPr>
-        <p:spPr>
-          <a:xfrm>
-            <a:off x="352007" y="914400"/>
-            <a:ext cx="5929847" cy="1457093"/>
-          </a:xfrm>
-          <a:noFill/>
-          <a:ln>
-            <a:noFill/>
-          </a:ln>
-        </p:spPr>
-        <p:txBody>
-          <a:bodyPr spcFirstLastPara="1" wrap="square" lIns="91425" tIns="91425" rIns="91425" bIns="91425" anchor="t" anchorCtr="0">
-            <a:normAutofit/>
-          </a:bodyPr>
-          <a:lstStyle/>
-          <a:p>
-            <a:pPr lvl="0"/>
-            <a:r>
-              <a:rPr lang="en-US" sz="2600" dirty="0">
-                <a:solidFill>
-                  <a:schemeClr val="bg1"/>
-                </a:solidFill>
-              </a:rPr>
-              <a:t>Multiple except statements</a:t>
-            </a:r>
-            <a:endParaRPr lang="en-US" sz="2100" dirty="0">
-              <a:solidFill>
-                <a:schemeClr val="bg1"/>
-              </a:solidFill>
-            </a:endParaRPr>
-          </a:p>
-          <a:p>
-            <a:pPr marL="604838" lvl="1" indent="0">
-              <a:buNone/>
-            </a:pPr>
-            <a:endParaRPr lang="en-US" dirty="0">
-              <a:solidFill>
-                <a:schemeClr val="bg1"/>
-              </a:solidFill>
-            </a:endParaRPr>
-          </a:p>
-          <a:p>
-            <a:pPr lvl="0"/>
-            <a:endParaRPr lang="en-US" dirty="0">
-              <a:sym typeface="Consolas"/>
-            </a:endParaRPr>
-          </a:p>
-          <a:p>
-            <a:pPr lvl="0"/>
-            <a:endParaRPr lang="en-US" dirty="0"/>
-          </a:p>
-          <a:p>
-            <a:pPr lvl="0"/>
-            <a:endParaRPr lang="en-US" dirty="0"/>
-          </a:p>
-        </p:txBody>
-      </p:sp>
-      <p:sp>
-        <p:nvSpPr>
-          <p:cNvPr id="3" name="TextBox 2">
-            <a:extLst>
-              <a:ext uri="{FF2B5EF4-FFF2-40B4-BE49-F238E27FC236}">
-                <a16:creationId xmlns:a16="http://schemas.microsoft.com/office/drawing/2014/main" id="{70A03235-D35B-4026-1609-55A4708471CD}"/>
-              </a:ext>
-            </a:extLst>
-          </p:cNvPr>
-          <p:cNvSpPr txBox="1"/>
-          <p:nvPr/>
-        </p:nvSpPr>
-        <p:spPr>
-          <a:xfrm>
-            <a:off x="702524" y="1642946"/>
-            <a:ext cx="5690841" cy="2554545"/>
-          </a:xfrm>
-          <a:prstGeom prst="rect">
-            <a:avLst/>
-          </a:prstGeom>
-          <a:noFill/>
-        </p:spPr>
-        <p:txBody>
-          <a:bodyPr wrap="square">
-            <a:spAutoFit/>
-          </a:bodyPr>
-          <a:lstStyle/>
-          <a:p>
-            <a:pPr lvl="0"/>
-            <a:r>
-              <a:rPr lang="en-US" sz="2000" dirty="0">
-                <a:solidFill>
-                  <a:schemeClr val="bg1"/>
-                </a:solidFill>
-                <a:sym typeface="Consolas"/>
-              </a:rPr>
-              <a:t>try:</a:t>
-            </a:r>
-          </a:p>
-          <a:p>
-            <a:pPr lvl="0"/>
-            <a:r>
-              <a:rPr lang="en-US" sz="2000" dirty="0">
-                <a:solidFill>
-                  <a:schemeClr val="bg1"/>
-                </a:solidFill>
-                <a:sym typeface="Consolas"/>
-              </a:rPr>
-              <a:t>    result = 10 / 2</a:t>
-            </a:r>
-          </a:p>
-          <a:p>
-            <a:pPr lvl="0"/>
-            <a:r>
-              <a:rPr lang="en-US" sz="2000" dirty="0">
-                <a:solidFill>
-                  <a:schemeClr val="bg1"/>
-                </a:solidFill>
-                <a:sym typeface="Consolas"/>
-              </a:rPr>
-              <a:t>except ZeroDivisionError:</a:t>
-            </a:r>
-          </a:p>
-          <a:p>
-            <a:pPr lvl="0"/>
-            <a:r>
-              <a:rPr lang="en-US" sz="2000" dirty="0">
-                <a:solidFill>
-                  <a:schemeClr val="bg1"/>
-                </a:solidFill>
-                <a:sym typeface="Consolas"/>
-              </a:rPr>
-              <a:t>    print("Cannot divide by zero.")</a:t>
-            </a:r>
-          </a:p>
-          <a:p>
-            <a:pPr lvl="0"/>
-            <a:r>
-              <a:rPr lang="en-US" sz="2000" dirty="0">
-                <a:solidFill>
-                  <a:schemeClr val="bg1"/>
-                </a:solidFill>
-                <a:sym typeface="Consolas"/>
-              </a:rPr>
-              <a:t>except </a:t>
-            </a:r>
-            <a:r>
-              <a:rPr lang="en-US" sz="2000" dirty="0" err="1">
-                <a:solidFill>
-                  <a:schemeClr val="bg1"/>
-                </a:solidFill>
-                <a:sym typeface="Consolas"/>
-              </a:rPr>
-              <a:t>ValueError</a:t>
-            </a:r>
-            <a:r>
-              <a:rPr lang="en-US" sz="2000" dirty="0">
-                <a:solidFill>
-                  <a:schemeClr val="bg1"/>
-                </a:solidFill>
-                <a:sym typeface="Consolas"/>
-              </a:rPr>
-              <a:t>:</a:t>
-            </a:r>
-          </a:p>
-          <a:p>
-            <a:pPr lvl="0"/>
-            <a:r>
-              <a:rPr lang="en-US" sz="2000" dirty="0">
-                <a:solidFill>
-                  <a:schemeClr val="bg1"/>
-                </a:solidFill>
-                <a:sym typeface="Consolas"/>
-              </a:rPr>
-              <a:t>    print(“Incorrect conversion”)</a:t>
-            </a:r>
-          </a:p>
-          <a:p>
-            <a:pPr lvl="0"/>
-            <a:r>
-              <a:rPr lang="en-US" sz="2000" dirty="0">
-                <a:solidFill>
-                  <a:schemeClr val="bg1"/>
-                </a:solidFill>
-                <a:sym typeface="Consolas"/>
-              </a:rPr>
-              <a:t>except:</a:t>
-            </a:r>
-          </a:p>
-          <a:p>
-            <a:pPr lvl="0"/>
-            <a:r>
-              <a:rPr lang="en-US" sz="2000" dirty="0">
-                <a:solidFill>
-                  <a:schemeClr val="bg1"/>
-                </a:solidFill>
-                <a:sym typeface="Consolas"/>
-              </a:rPr>
-              <a:t>    print(“You are seeing this message in error!”)</a:t>
-            </a:r>
-          </a:p>
-        </p:txBody>
-      </p:sp>
-    </p:spTree>
-  </p:cSld>
-  <p:clrMapOvr>
-    <a:masterClrMapping/>
-  </p:clrMapOvr>
-  <p:timing>
-    <p:tnLst>
-      <p:par>
-        <p:cTn id="1" dur="indefinite" restart="never" nodeType="tmRoot">
-          <p:childTnLst>
-            <p:seq concurrent="1" nextAc="seek">
-              <p:cTn id="2" dur="indefinite" nodeType="mainSeq">
-                <p:childTnLst>
-                  <p:par>
-                    <p:cTn id="3" fill="hold">
-                      <p:stCondLst>
-                        <p:cond delay="indefinite"/>
-                      </p:stCondLst>
-                      <p:childTnLst>
-                        <p:par>
-                          <p:cTn id="4" fill="hold">
-                            <p:stCondLst>
-                              <p:cond delay="0"/>
-                            </p:stCondLst>
-                            <p:childTnLst>
-                              <p:par>
-                                <p:cTn id="5" presetID="1" presetClass="entr" presetSubtype="0" fill="hold" grpId="0" nodeType="clickEffect">
-                                  <p:stCondLst>
-                                    <p:cond delay="0"/>
-                                  </p:stCondLst>
-                                  <p:childTnLst>
-                                    <p:set>
-                                      <p:cBhvr>
-                                        <p:cTn id="6" dur="1" fill="hold">
-                                          <p:stCondLst>
-                                            <p:cond delay="0"/>
-                                          </p:stCondLst>
-                                        </p:cTn>
-                                        <p:tgtEl>
-                                          <p:spTgt spid="3"/>
-                                        </p:tgtEl>
-                                        <p:attrNameLst>
-                                          <p:attrName>style.visibility</p:attrName>
-                                        </p:attrNameLst>
-                                      </p:cBhvr>
-                                      <p:to>
-                                        <p:strVal val="visible"/>
-                                      </p:to>
-                                    </p:set>
-                                  </p:childTnLst>
-                                </p:cTn>
-                              </p:par>
-                            </p:childTnLst>
-                          </p:cTn>
-                        </p:par>
-                      </p:childTnLst>
-                    </p:cTn>
-                  </p:par>
-                </p:childTnLst>
-              </p:cTn>
-              <p:prevCondLst>
-                <p:cond evt="onPrev" delay="0">
-                  <p:tgtEl>
-                    <p:sldTgt/>
-                  </p:tgtEl>
-                </p:cond>
-              </p:prevCondLst>
-              <p:nextCondLst>
-                <p:cond evt="onNext" delay="0">
-                  <p:tgtEl>
-                    <p:sldTgt/>
-                  </p:tgtEl>
-                </p:cond>
-              </p:nextCondLst>
-            </p:seq>
-          </p:childTnLst>
-        </p:cTn>
-      </p:par>
-    </p:tnLst>
-    <p:bldLst>
-      <p:bldP spid="3" grpId="0"/>
-    </p:bldLst>
-  </p:timing>
-</p:sld>
-</file>
-
-<file path=ppt/slides/slide13.xml><?xml version="1.0" encoding="utf-8"?>
-<p:sld xmlns:a="http://schemas.openxmlformats.org/drawingml/2006/main" xmlns:r="http://schemas.openxmlformats.org/officeDocument/2006/relationships" xmlns:p="http://schemas.openxmlformats.org/presentationml/2006/main">
-  <p:cSld>
-    <p:spTree>
-      <p:nvGrpSpPr>
-        <p:cNvPr id="1" name="Shape 499">
-          <a:extLst>
-            <a:ext uri="{FF2B5EF4-FFF2-40B4-BE49-F238E27FC236}">
-              <a16:creationId xmlns:a16="http://schemas.microsoft.com/office/drawing/2014/main" id="{EEBC8AFD-5F6C-C21C-EC80-EC2EE62AEAA0}"/>
-            </a:ext>
-          </a:extLst>
-        </p:cNvPr>
-        <p:cNvGrpSpPr/>
-        <p:nvPr/>
-      </p:nvGrpSpPr>
-      <p:grpSpPr>
-        <a:xfrm>
-          <a:off x="0" y="0"/>
-          <a:ext cx="0" cy="0"/>
-          <a:chOff x="0" y="0"/>
-          <a:chExt cx="0" cy="0"/>
-        </a:xfrm>
-      </p:grpSpPr>
-      <p:sp>
-        <p:nvSpPr>
-          <p:cNvPr id="500" name="Google Shape;500;p60">
-            <a:extLst>
-              <a:ext uri="{FF2B5EF4-FFF2-40B4-BE49-F238E27FC236}">
-                <a16:creationId xmlns:a16="http://schemas.microsoft.com/office/drawing/2014/main" id="{F1D83413-65FF-EA44-5CA2-D03B294AE4B2}"/>
-              </a:ext>
-            </a:extLst>
-          </p:cNvPr>
-          <p:cNvSpPr txBox="1">
-            <a:spLocks noGrp="1"/>
-          </p:cNvSpPr>
-          <p:nvPr>
-            <p:ph type="title"/>
-          </p:nvPr>
-        </p:nvSpPr>
-        <p:spPr>
-          <a:xfrm>
-            <a:off x="411480" y="308611"/>
-            <a:ext cx="6173470" cy="891778"/>
-          </a:xfrm>
-          <a:noFill/>
-          <a:ln>
-            <a:noFill/>
-          </a:ln>
-        </p:spPr>
-        <p:txBody>
-          <a:bodyPr spcFirstLastPara="1" wrap="square" lIns="91425" tIns="91425" rIns="91425" bIns="91425" anchor="t" anchorCtr="0">
-            <a:normAutofit/>
-          </a:bodyPr>
-          <a:lstStyle/>
-          <a:p>
-            <a:pPr lvl="0"/>
-            <a:r>
-              <a:rPr lang="en-US"/>
-              <a:t>TRY - EXCEPT CONTINUED</a:t>
-            </a:r>
-          </a:p>
-        </p:txBody>
-      </p:sp>
-      <p:sp>
-        <p:nvSpPr>
-          <p:cNvPr id="501" name="Google Shape;501;p60">
-            <a:extLst>
-              <a:ext uri="{FF2B5EF4-FFF2-40B4-BE49-F238E27FC236}">
-                <a16:creationId xmlns:a16="http://schemas.microsoft.com/office/drawing/2014/main" id="{559571E5-1152-2BFE-0A02-FA002AFE9AAB}"/>
-              </a:ext>
-            </a:extLst>
-          </p:cNvPr>
-          <p:cNvSpPr txBox="1">
-            <a:spLocks noGrp="1"/>
-          </p:cNvSpPr>
-          <p:nvPr>
-            <p:ph type="body" idx="1"/>
-          </p:nvPr>
-        </p:nvSpPr>
-        <p:spPr>
-          <a:xfrm>
-            <a:off x="352007" y="914400"/>
-            <a:ext cx="5929847" cy="1457093"/>
-          </a:xfrm>
-          <a:noFill/>
-          <a:ln>
-            <a:noFill/>
-          </a:ln>
-        </p:spPr>
-        <p:txBody>
-          <a:bodyPr spcFirstLastPara="1" wrap="square" lIns="91425" tIns="91425" rIns="91425" bIns="91425" anchor="t" anchorCtr="0">
-            <a:normAutofit/>
-          </a:bodyPr>
-          <a:lstStyle/>
-          <a:p>
-            <a:pPr lvl="0"/>
-            <a:r>
-              <a:rPr lang="en-US" sz="2600" dirty="0">
-                <a:solidFill>
-                  <a:schemeClr val="bg1"/>
-                </a:solidFill>
-              </a:rPr>
-              <a:t>Optional</a:t>
-            </a:r>
-          </a:p>
-          <a:p>
-            <a:pPr lvl="1"/>
-            <a:r>
-              <a:rPr lang="en-US" sz="2100" dirty="0">
-                <a:solidFill>
-                  <a:schemeClr val="bg1"/>
-                </a:solidFill>
-                <a:sym typeface="Consolas"/>
-              </a:rPr>
-              <a:t>else</a:t>
-            </a:r>
-            <a:r>
-              <a:rPr lang="en-US" sz="2100" dirty="0">
-                <a:solidFill>
-                  <a:schemeClr val="bg1"/>
-                </a:solidFill>
-              </a:rPr>
-              <a:t>: Runs if no error occurs</a:t>
-            </a:r>
-          </a:p>
-          <a:p>
-            <a:pPr lvl="1"/>
-            <a:r>
-              <a:rPr lang="en-US" sz="2100" dirty="0">
-                <a:solidFill>
-                  <a:schemeClr val="bg1"/>
-                </a:solidFill>
-                <a:sym typeface="Consolas"/>
-              </a:rPr>
-              <a:t>finally</a:t>
-            </a:r>
-            <a:r>
-              <a:rPr lang="en-US" sz="2100" dirty="0">
-                <a:solidFill>
-                  <a:schemeClr val="bg1"/>
-                </a:solidFill>
-              </a:rPr>
-              <a:t>: always runs</a:t>
-            </a:r>
-          </a:p>
-          <a:p>
-            <a:pPr marL="604838" lvl="1" indent="0">
-              <a:buNone/>
-            </a:pPr>
-            <a:endParaRPr lang="en-US" dirty="0">
-              <a:solidFill>
-                <a:schemeClr val="bg1"/>
-              </a:solidFill>
-            </a:endParaRPr>
-          </a:p>
-          <a:p>
-            <a:pPr lvl="0"/>
-            <a:endParaRPr lang="en-US" dirty="0">
-              <a:sym typeface="Consolas"/>
-            </a:endParaRPr>
-          </a:p>
-          <a:p>
-            <a:pPr lvl="0"/>
-            <a:endParaRPr lang="en-US" dirty="0"/>
-          </a:p>
-          <a:p>
-            <a:pPr lvl="0"/>
-            <a:endParaRPr lang="en-US" dirty="0"/>
-          </a:p>
-        </p:txBody>
-      </p:sp>
-      <p:sp>
-        <p:nvSpPr>
-          <p:cNvPr id="3" name="TextBox 2">
-            <a:extLst>
-              <a:ext uri="{FF2B5EF4-FFF2-40B4-BE49-F238E27FC236}">
-                <a16:creationId xmlns:a16="http://schemas.microsoft.com/office/drawing/2014/main" id="{CD35D585-17CB-A1A3-D712-7F458F86A4FC}"/>
-              </a:ext>
-            </a:extLst>
-          </p:cNvPr>
-          <p:cNvSpPr txBox="1"/>
-          <p:nvPr/>
-        </p:nvSpPr>
-        <p:spPr>
-          <a:xfrm>
-            <a:off x="687657" y="2371493"/>
-            <a:ext cx="4572000" cy="2554545"/>
-          </a:xfrm>
-          <a:prstGeom prst="rect">
-            <a:avLst/>
-          </a:prstGeom>
-          <a:noFill/>
-        </p:spPr>
-        <p:txBody>
-          <a:bodyPr wrap="square">
-            <a:spAutoFit/>
-          </a:bodyPr>
-          <a:lstStyle/>
-          <a:p>
-            <a:pPr lvl="0"/>
-            <a:r>
-              <a:rPr lang="en-US" sz="2000" dirty="0">
-                <a:solidFill>
-                  <a:schemeClr val="bg1"/>
-                </a:solidFill>
-                <a:sym typeface="Consolas"/>
-              </a:rPr>
-              <a:t>try:</a:t>
-            </a:r>
-          </a:p>
-          <a:p>
-            <a:pPr lvl="0"/>
-            <a:r>
-              <a:rPr lang="en-US" sz="2000" dirty="0">
-                <a:solidFill>
-                  <a:schemeClr val="bg1"/>
-                </a:solidFill>
-                <a:sym typeface="Consolas"/>
-              </a:rPr>
-              <a:t>    result = 10 / 2</a:t>
-            </a:r>
-          </a:p>
-          <a:p>
-            <a:pPr lvl="0"/>
-            <a:r>
-              <a:rPr lang="en-US" sz="2000" dirty="0">
-                <a:solidFill>
-                  <a:schemeClr val="bg1"/>
-                </a:solidFill>
-                <a:sym typeface="Consolas"/>
-              </a:rPr>
-              <a:t>except ZeroDivisionError:</a:t>
-            </a:r>
-          </a:p>
-          <a:p>
-            <a:pPr lvl="0"/>
-            <a:r>
-              <a:rPr lang="en-US" sz="2000" dirty="0">
-                <a:solidFill>
-                  <a:schemeClr val="bg1"/>
-                </a:solidFill>
-                <a:sym typeface="Consolas"/>
-              </a:rPr>
-              <a:t>    print("Cannot divide by zero.")</a:t>
-            </a:r>
-          </a:p>
-          <a:p>
-            <a:pPr lvl="0"/>
-            <a:r>
-              <a:rPr lang="en-US" sz="2000" dirty="0">
-                <a:solidFill>
-                  <a:schemeClr val="bg1"/>
-                </a:solidFill>
-                <a:sym typeface="Consolas"/>
-              </a:rPr>
-              <a:t>else:</a:t>
-            </a:r>
-          </a:p>
-          <a:p>
-            <a:pPr lvl="0"/>
-            <a:r>
-              <a:rPr lang="en-US" sz="2000" dirty="0">
-                <a:solidFill>
-                  <a:schemeClr val="bg1"/>
-                </a:solidFill>
-                <a:sym typeface="Consolas"/>
-              </a:rPr>
-              <a:t>    print("Division successful.")</a:t>
-            </a:r>
-          </a:p>
-          <a:p>
-            <a:pPr lvl="0"/>
-            <a:r>
-              <a:rPr lang="en-US" sz="2000" dirty="0">
-                <a:solidFill>
-                  <a:schemeClr val="bg1"/>
-                </a:solidFill>
-                <a:sym typeface="Consolas"/>
-              </a:rPr>
-              <a:t>finally:</a:t>
-            </a:r>
-          </a:p>
-          <a:p>
-            <a:pPr lvl="0"/>
-            <a:r>
-              <a:rPr lang="en-US" sz="2000" dirty="0">
-                <a:solidFill>
-                  <a:schemeClr val="bg1"/>
-                </a:solidFill>
-                <a:sym typeface="Consolas"/>
-              </a:rPr>
-              <a:t>    print("Done.")</a:t>
-            </a:r>
-          </a:p>
-        </p:txBody>
-      </p:sp>
-    </p:spTree>
-    <p:extLst>
-      <p:ext uri="{BB962C8B-B14F-4D97-AF65-F5344CB8AC3E}">
-        <p14:creationId xmlns:p14="http://schemas.microsoft.com/office/powerpoint/2010/main" val="2410237747"/>
-      </p:ext>
-    </p:extLst>
-  </p:cSld>
-  <p:clrMapOvr>
-    <a:masterClrMapping/>
-  </p:clrMapOvr>
-  <p:timing>
-    <p:tnLst>
-      <p:par>
-        <p:cTn id="1" dur="indefinite" restart="never" nodeType="tmRoot">
-          <p:childTnLst>
-            <p:seq concurrent="1" nextAc="seek">
-              <p:cTn id="2" dur="indefinite" nodeType="mainSeq">
-                <p:childTnLst>
-                  <p:par>
-                    <p:cTn id="3" fill="hold">
-                      <p:stCondLst>
-                        <p:cond delay="indefinite"/>
-                      </p:stCondLst>
-                      <p:childTnLst>
-                        <p:par>
-                          <p:cTn id="4" fill="hold">
-                            <p:stCondLst>
-                              <p:cond delay="0"/>
-                            </p:stCondLst>
-                            <p:childTnLst>
-                              <p:par>
-                                <p:cTn id="5" presetID="1" presetClass="entr" presetSubtype="0" fill="hold" grpId="0" nodeType="clickEffect">
-                                  <p:stCondLst>
-                                    <p:cond delay="0"/>
-                                  </p:stCondLst>
-                                  <p:childTnLst>
-                                    <p:set>
-                                      <p:cBhvr>
-                                        <p:cTn id="6" dur="1" fill="hold">
-                                          <p:stCondLst>
-                                            <p:cond delay="0"/>
-                                          </p:stCondLst>
-                                        </p:cTn>
-                                        <p:tgtEl>
-                                          <p:spTgt spid="3"/>
-                                        </p:tgtEl>
-                                        <p:attrNameLst>
-                                          <p:attrName>style.visibility</p:attrName>
-                                        </p:attrNameLst>
-                                      </p:cBhvr>
-                                      <p:to>
-                                        <p:strVal val="visible"/>
-                                      </p:to>
-                                    </p:set>
-                                  </p:childTnLst>
-                                </p:cTn>
-                              </p:par>
-                            </p:childTnLst>
-                          </p:cTn>
-                        </p:par>
-                      </p:childTnLst>
-                    </p:cTn>
-                  </p:par>
-                </p:childTnLst>
-              </p:cTn>
-              <p:prevCondLst>
-                <p:cond evt="onPrev" delay="0">
-                  <p:tgtEl>
-                    <p:sldTgt/>
-                  </p:tgtEl>
-                </p:cond>
-              </p:prevCondLst>
-              <p:nextCondLst>
-                <p:cond evt="onNext" delay="0">
-                  <p:tgtEl>
-                    <p:sldTgt/>
-                  </p:tgtEl>
-                </p:cond>
-              </p:nextCondLst>
-            </p:seq>
-          </p:childTnLst>
-        </p:cTn>
-      </p:par>
-    </p:tnLst>
-    <p:bldLst>
-      <p:bldP spid="3" grpId="0"/>
-    </p:bldLst>
-  </p:timing>
-</p:sld>
-</file>
-
-<file path=ppt/slides/slide14.xml><?xml version="1.0" encoding="utf-8"?>
-<p:sld xmlns:a="http://schemas.openxmlformats.org/drawingml/2006/main" xmlns:r="http://schemas.openxmlformats.org/officeDocument/2006/relationships" xmlns:p="http://schemas.openxmlformats.org/presentationml/2006/main">
-  <p:cSld>
-    <p:spTree>
-      <p:nvGrpSpPr>
-        <p:cNvPr id="1" name="Shape 505"/>
-        <p:cNvGrpSpPr/>
-        <p:nvPr/>
-      </p:nvGrpSpPr>
-      <p:grpSpPr>
-        <a:xfrm>
-          <a:off x="0" y="0"/>
-          <a:ext cx="0" cy="0"/>
-          <a:chOff x="0" y="0"/>
-          <a:chExt cx="0" cy="0"/>
-        </a:xfrm>
-      </p:grpSpPr>
-      <p:sp>
-        <p:nvSpPr>
-          <p:cNvPr id="506" name="Google Shape;506;p61"/>
-          <p:cNvSpPr txBox="1">
-            <a:spLocks noGrp="1"/>
-          </p:cNvSpPr>
-          <p:nvPr>
-            <p:ph type="title"/>
-          </p:nvPr>
-        </p:nvSpPr>
-        <p:spPr>
-          <a:xfrm>
-            <a:off x="411480" y="308611"/>
-            <a:ext cx="6173470" cy="891778"/>
-          </a:xfrm>
-          <a:noFill/>
-          <a:ln>
-            <a:noFill/>
-          </a:ln>
-        </p:spPr>
-        <p:txBody>
-          <a:bodyPr spcFirstLastPara="1" wrap="square" lIns="91425" tIns="91425" rIns="91425" bIns="91425" anchor="t" anchorCtr="0">
-            <a:normAutofit/>
-          </a:bodyPr>
-          <a:lstStyle/>
-          <a:p>
-            <a:pPr lvl="0"/>
-            <a:r>
-              <a:rPr lang="en-US"/>
-              <a:t>RAISE</a:t>
-            </a:r>
-          </a:p>
-        </p:txBody>
-      </p:sp>
-      <p:sp>
-        <p:nvSpPr>
-          <p:cNvPr id="507" name="Google Shape;507;p61"/>
-          <p:cNvSpPr txBox="1">
-            <a:spLocks noGrp="1"/>
-          </p:cNvSpPr>
-          <p:nvPr>
-            <p:ph type="body" idx="1"/>
-          </p:nvPr>
-        </p:nvSpPr>
-        <p:spPr>
-          <a:xfrm>
-            <a:off x="240495" y="860782"/>
-            <a:ext cx="8516930" cy="3017520"/>
-          </a:xfrm>
-          <a:noFill/>
-          <a:ln>
-            <a:noFill/>
-          </a:ln>
-        </p:spPr>
-        <p:txBody>
-          <a:bodyPr spcFirstLastPara="1" wrap="square" lIns="91425" tIns="91425" rIns="91425" bIns="91425" anchor="t" anchorCtr="0">
-            <a:normAutofit/>
-          </a:bodyPr>
-          <a:lstStyle/>
-          <a:p>
-            <a:pPr lvl="0"/>
-            <a:r>
-              <a:rPr lang="en-US" dirty="0">
-                <a:solidFill>
-                  <a:schemeClr val="bg1"/>
-                </a:solidFill>
-              </a:rPr>
-              <a:t>“raise” is used to intentionally trigger an error</a:t>
-            </a:r>
-          </a:p>
-          <a:p>
-            <a:pPr lvl="0"/>
-            <a:r>
-              <a:rPr lang="en-US" dirty="0">
-                <a:solidFill>
-                  <a:schemeClr val="bg1"/>
-                </a:solidFill>
-              </a:rPr>
-              <a:t>Helps enforce rules and catch problems early</a:t>
-            </a:r>
-          </a:p>
-          <a:p>
-            <a:pPr lvl="0"/>
-            <a:r>
-              <a:rPr lang="en-US" dirty="0">
-                <a:solidFill>
-                  <a:schemeClr val="bg1"/>
-                </a:solidFill>
-              </a:rPr>
-              <a:t>Make your code more predictable and safe</a:t>
-            </a:r>
-          </a:p>
-          <a:p>
-            <a:pPr lvl="0"/>
-            <a:r>
-              <a:rPr lang="en-US" dirty="0">
-                <a:solidFill>
-                  <a:schemeClr val="bg1"/>
-                </a:solidFill>
-              </a:rPr>
-              <a:t>Useful for custom error messages or defining your own exceptions</a:t>
-            </a:r>
-          </a:p>
-          <a:p>
-            <a:pPr lvl="0"/>
-            <a:endParaRPr lang="en-US" dirty="0"/>
-          </a:p>
-          <a:p>
-            <a:pPr lvl="0"/>
-            <a:endParaRPr lang="en-US" dirty="0"/>
-          </a:p>
-          <a:p>
-            <a:pPr lvl="0"/>
-            <a:endParaRPr lang="en-US" dirty="0"/>
-          </a:p>
-        </p:txBody>
-      </p:sp>
-      <p:sp>
-        <p:nvSpPr>
-          <p:cNvPr id="3" name="TextBox 2">
-            <a:extLst>
-              <a:ext uri="{FF2B5EF4-FFF2-40B4-BE49-F238E27FC236}">
-                <a16:creationId xmlns:a16="http://schemas.microsoft.com/office/drawing/2014/main" id="{5B996DBA-7DE9-0229-30AC-41536D9BD04E}"/>
-              </a:ext>
-            </a:extLst>
-          </p:cNvPr>
-          <p:cNvSpPr txBox="1"/>
-          <p:nvPr/>
-        </p:nvSpPr>
-        <p:spPr>
-          <a:xfrm>
-            <a:off x="539982" y="2278104"/>
-            <a:ext cx="8064036" cy="2462213"/>
-          </a:xfrm>
-          <a:prstGeom prst="rect">
-            <a:avLst/>
-          </a:prstGeom>
-          <a:noFill/>
-        </p:spPr>
-        <p:txBody>
-          <a:bodyPr wrap="square">
-            <a:spAutoFit/>
-          </a:bodyPr>
-          <a:lstStyle/>
-          <a:p>
-            <a:pPr lvl="0"/>
-            <a:endParaRPr lang="en-US" dirty="0">
-              <a:solidFill>
-                <a:schemeClr val="bg1"/>
-              </a:solidFill>
-              <a:sym typeface="Consolas"/>
-            </a:endParaRPr>
-          </a:p>
-          <a:p>
-            <a:pPr lvl="0"/>
-            <a:r>
-              <a:rPr lang="en-US" dirty="0">
-                <a:solidFill>
-                  <a:schemeClr val="bg1"/>
-                </a:solidFill>
-                <a:sym typeface="Consolas"/>
-              </a:rPr>
-              <a:t>if age &lt; 0:</a:t>
-            </a:r>
-          </a:p>
-          <a:p>
-            <a:pPr lvl="0"/>
-            <a:r>
-              <a:rPr lang="en-US" dirty="0">
-                <a:solidFill>
-                  <a:schemeClr val="bg1"/>
-                </a:solidFill>
-                <a:sym typeface="Consolas"/>
-              </a:rPr>
-              <a:t>raise </a:t>
-            </a:r>
-            <a:r>
-              <a:rPr lang="en-US" dirty="0" err="1">
-                <a:solidFill>
-                  <a:schemeClr val="bg1"/>
-                </a:solidFill>
-                <a:sym typeface="Consolas"/>
-              </a:rPr>
-              <a:t>ValueError</a:t>
-            </a:r>
-            <a:r>
-              <a:rPr lang="en-US" dirty="0">
-                <a:solidFill>
-                  <a:schemeClr val="bg1"/>
-                </a:solidFill>
-                <a:sym typeface="Consolas"/>
-              </a:rPr>
-              <a:t>("Age cannot be negative.")</a:t>
-            </a:r>
-          </a:p>
-          <a:p>
-            <a:pPr lvl="0"/>
-            <a:endParaRPr lang="en-US" dirty="0">
-              <a:solidFill>
-                <a:schemeClr val="bg1"/>
-              </a:solidFill>
-              <a:sym typeface="Consolas"/>
-            </a:endParaRPr>
-          </a:p>
-          <a:p>
-            <a:pPr lvl="0"/>
-            <a:r>
-              <a:rPr lang="en-US" dirty="0">
-                <a:solidFill>
-                  <a:schemeClr val="bg1"/>
-                </a:solidFill>
-              </a:rPr>
-              <a:t>Built-in Exceptions</a:t>
-            </a:r>
-          </a:p>
-          <a:p>
-            <a:pPr lvl="0"/>
-            <a:r>
-              <a:rPr lang="en-US" dirty="0">
-                <a:solidFill>
-                  <a:schemeClr val="bg1"/>
-                </a:solidFill>
-                <a:sym typeface="Consolas"/>
-              </a:rPr>
-              <a:t>raise </a:t>
-            </a:r>
-            <a:r>
-              <a:rPr lang="en-US" dirty="0" err="1">
-                <a:solidFill>
-                  <a:schemeClr val="bg1"/>
-                </a:solidFill>
-                <a:sym typeface="Consolas"/>
-              </a:rPr>
-              <a:t>TypeError</a:t>
-            </a:r>
-            <a:r>
-              <a:rPr lang="en-US" dirty="0">
-                <a:solidFill>
-                  <a:schemeClr val="bg1"/>
-                </a:solidFill>
-                <a:sym typeface="Consolas"/>
-              </a:rPr>
-              <a:t>("This function only accepts strings.")</a:t>
-            </a:r>
-          </a:p>
-          <a:p>
-            <a:pPr lvl="0"/>
-            <a:r>
-              <a:rPr lang="en-US" dirty="0">
-                <a:solidFill>
-                  <a:schemeClr val="bg1"/>
-                </a:solidFill>
-                <a:sym typeface="Consolas"/>
-              </a:rPr>
-              <a:t>raise ZeroDivisionError("Cannot divide by zero.")</a:t>
-            </a:r>
-          </a:p>
-          <a:p>
-            <a:pPr lvl="0"/>
-            <a:endParaRPr lang="en-US" dirty="0">
-              <a:solidFill>
-                <a:schemeClr val="bg1"/>
-              </a:solidFill>
-              <a:sym typeface="Consolas"/>
-            </a:endParaRPr>
-          </a:p>
-          <a:p>
-            <a:pPr lvl="0"/>
-            <a:endParaRPr lang="en-US" dirty="0">
-              <a:solidFill>
-                <a:schemeClr val="bg1"/>
-              </a:solidFill>
-            </a:endParaRPr>
-          </a:p>
-          <a:p>
-            <a:pPr lvl="0"/>
-            <a:r>
-              <a:rPr lang="en-US" dirty="0">
-                <a:solidFill>
-                  <a:schemeClr val="bg1"/>
-                </a:solidFill>
-              </a:rPr>
-              <a:t>Raised errors can be caught and handled with try / except</a:t>
-            </a:r>
-          </a:p>
-          <a:p>
-            <a:pPr lvl="0"/>
-            <a:r>
-              <a:rPr lang="en-US" dirty="0">
-                <a:solidFill>
-                  <a:schemeClr val="bg1"/>
-                </a:solidFill>
-              </a:rPr>
-              <a:t>If not caught, they will be passed to the output and stop the program</a:t>
-            </a:r>
-          </a:p>
-        </p:txBody>
-      </p:sp>
-    </p:spTree>
-  </p:cSld>
-  <p:clrMapOvr>
-    <a:masterClrMapping/>
-  </p:clrMapOvr>
-  <p:timing>
-    <p:tnLst>
-      <p:par>
-        <p:cTn id="1" dur="indefinite" restart="never" nodeType="tmRoot">
-          <p:childTnLst>
-            <p:seq concurrent="1" nextAc="seek">
-              <p:cTn id="2" dur="indefinite" nodeType="mainSeq">
-                <p:childTnLst>
-                  <p:par>
-                    <p:cTn id="3" fill="hold">
-                      <p:stCondLst>
-                        <p:cond delay="indefinite"/>
-                      </p:stCondLst>
-                      <p:childTnLst>
-                        <p:par>
-                          <p:cTn id="4" fill="hold">
-                            <p:stCondLst>
-                              <p:cond delay="0"/>
-                            </p:stCondLst>
-                            <p:childTnLst>
-                              <p:par>
-                                <p:cTn id="5" presetID="1" presetClass="entr" presetSubtype="0" fill="hold" grpId="0" nodeType="clickEffect">
-                                  <p:stCondLst>
-                                    <p:cond delay="0"/>
-                                  </p:stCondLst>
-                                  <p:childTnLst>
-                                    <p:set>
-                                      <p:cBhvr>
-                                        <p:cTn id="6" dur="1" fill="hold">
-                                          <p:stCondLst>
-                                            <p:cond delay="0"/>
-                                          </p:stCondLst>
-                                        </p:cTn>
-                                        <p:tgtEl>
-                                          <p:spTgt spid="3"/>
-                                        </p:tgtEl>
-                                        <p:attrNameLst>
-                                          <p:attrName>style.visibility</p:attrName>
-                                        </p:attrNameLst>
-                                      </p:cBhvr>
-                                      <p:to>
-                                        <p:strVal val="visible"/>
-                                      </p:to>
-                                    </p:set>
-                                  </p:childTnLst>
-                                </p:cTn>
-                              </p:par>
-                            </p:childTnLst>
-                          </p:cTn>
-                        </p:par>
-                      </p:childTnLst>
-                    </p:cTn>
-                  </p:par>
-                </p:childTnLst>
-              </p:cTn>
-              <p:prevCondLst>
-                <p:cond evt="onPrev" delay="0">
-                  <p:tgtEl>
-                    <p:sldTgt/>
-                  </p:tgtEl>
-                </p:cond>
-              </p:prevCondLst>
-              <p:nextCondLst>
-                <p:cond evt="onNext" delay="0">
-                  <p:tgtEl>
-                    <p:sldTgt/>
-                  </p:tgtEl>
-                </p:cond>
-              </p:nextCondLst>
-            </p:seq>
-          </p:childTnLst>
-        </p:cTn>
-      </p:par>
-    </p:tnLst>
-    <p:bldLst>
-      <p:bldP spid="3" grpId="0"/>
-    </p:bldLst>
-  </p:timing>
-</p:sld>
-</file>
-
-<file path=ppt/slides/slide15.xml><?xml version="1.0" encoding="utf-8"?>
-<p:sld xmlns:a="http://schemas.openxmlformats.org/drawingml/2006/main" xmlns:r="http://schemas.openxmlformats.org/officeDocument/2006/relationships" xmlns:p="http://schemas.openxmlformats.org/presentationml/2006/main">
-  <p:cSld>
-    <p:spTree>
-      <p:nvGrpSpPr>
-        <p:cNvPr id="1" name="Shape 511"/>
-        <p:cNvGrpSpPr/>
-        <p:nvPr/>
-      </p:nvGrpSpPr>
-      <p:grpSpPr>
-        <a:xfrm>
-          <a:off x="0" y="0"/>
-          <a:ext cx="0" cy="0"/>
-          <a:chOff x="0" y="0"/>
-          <a:chExt cx="0" cy="0"/>
-        </a:xfrm>
-      </p:grpSpPr>
-      <p:sp>
-        <p:nvSpPr>
-          <p:cNvPr id="512" name="Google Shape;512;p62"/>
-          <p:cNvSpPr txBox="1">
-            <a:spLocks noGrp="1"/>
-          </p:cNvSpPr>
-          <p:nvPr>
-            <p:ph type="title"/>
-          </p:nvPr>
-        </p:nvSpPr>
-        <p:spPr>
-          <a:xfrm>
-            <a:off x="411480" y="308611"/>
-            <a:ext cx="6173470" cy="891778"/>
-          </a:xfrm>
-          <a:noFill/>
-          <a:ln>
-            <a:noFill/>
-          </a:ln>
-        </p:spPr>
-        <p:txBody>
-          <a:bodyPr spcFirstLastPara="1" wrap="square" lIns="91425" tIns="91425" rIns="91425" bIns="91425" anchor="t" anchorCtr="0">
-            <a:normAutofit/>
-          </a:bodyPr>
-          <a:lstStyle/>
-          <a:p>
-            <a:pPr lvl="0"/>
-            <a:r>
-              <a:rPr lang="en-US" dirty="0"/>
-              <a:t>Exercise (20 min)</a:t>
-            </a:r>
-          </a:p>
-        </p:txBody>
-      </p:sp>
-      <p:sp>
-        <p:nvSpPr>
-          <p:cNvPr id="513" name="Google Shape;513;p62"/>
-          <p:cNvSpPr txBox="1">
-            <a:spLocks noGrp="1"/>
-          </p:cNvSpPr>
-          <p:nvPr>
-            <p:ph type="body" idx="1"/>
-          </p:nvPr>
-        </p:nvSpPr>
-        <p:spPr>
-          <a:xfrm>
-            <a:off x="411480" y="1611630"/>
-            <a:ext cx="7847857" cy="3017520"/>
-          </a:xfrm>
-          <a:noFill/>
-          <a:ln>
-            <a:noFill/>
-          </a:ln>
-        </p:spPr>
-        <p:txBody>
-          <a:bodyPr spcFirstLastPara="1" wrap="square" lIns="91425" tIns="91425" rIns="91425" bIns="91425" anchor="t" anchorCtr="0">
-            <a:normAutofit fontScale="92500" lnSpcReduction="10000"/>
-          </a:bodyPr>
-          <a:lstStyle/>
-          <a:p>
-            <a:pPr lvl="0"/>
-            <a:r>
-              <a:rPr lang="en-US" dirty="0">
-                <a:solidFill>
-                  <a:schemeClr val="bg1"/>
-                </a:solidFill>
-              </a:rPr>
-              <a:t>Randomly assign a number from 1 to 100.</a:t>
-            </a:r>
-          </a:p>
-          <a:p>
-            <a:pPr lvl="0"/>
-            <a:endParaRPr lang="en-US" dirty="0">
-              <a:solidFill>
-                <a:schemeClr val="bg1"/>
-              </a:solidFill>
-            </a:endParaRPr>
-          </a:p>
-          <a:p>
-            <a:pPr lvl="0"/>
-            <a:r>
-              <a:rPr lang="en-US" dirty="0">
-                <a:solidFill>
-                  <a:schemeClr val="bg1"/>
-                </a:solidFill>
-              </a:rPr>
-              <a:t>Write a block of code that takes in user input until they guess the random number</a:t>
-            </a:r>
-          </a:p>
-          <a:p>
-            <a:pPr lvl="0"/>
-            <a:endParaRPr lang="en-US" dirty="0">
-              <a:solidFill>
-                <a:schemeClr val="bg1"/>
-              </a:solidFill>
-            </a:endParaRPr>
-          </a:p>
-          <a:p>
-            <a:pPr lvl="0"/>
-            <a:r>
-              <a:rPr lang="en-US" dirty="0">
-                <a:solidFill>
-                  <a:schemeClr val="bg1"/>
-                </a:solidFill>
-              </a:rPr>
-              <a:t>Prompt the user to help them with their guess</a:t>
-            </a:r>
-          </a:p>
-          <a:p>
-            <a:pPr lvl="0"/>
-            <a:r>
-              <a:rPr lang="en-US" dirty="0">
-                <a:solidFill>
-                  <a:schemeClr val="bg1"/>
-                </a:solidFill>
-              </a:rPr>
-              <a:t>Handle the following situations:</a:t>
-            </a:r>
-          </a:p>
-          <a:p>
-            <a:pPr lvl="1"/>
-            <a:r>
-              <a:rPr lang="en-US" dirty="0">
-                <a:solidFill>
-                  <a:schemeClr val="bg1"/>
-                </a:solidFill>
-              </a:rPr>
-              <a:t>User does not input the right python data type</a:t>
-            </a:r>
-          </a:p>
-          <a:p>
-            <a:pPr lvl="1"/>
-            <a:r>
-              <a:rPr lang="en-US" dirty="0">
-                <a:solidFill>
-                  <a:schemeClr val="bg1"/>
-                </a:solidFill>
-              </a:rPr>
-              <a:t>User inputs a negative number</a:t>
-            </a:r>
-          </a:p>
-          <a:p>
-            <a:pPr lvl="1"/>
-            <a:r>
-              <a:rPr lang="en-US" dirty="0">
-                <a:solidFill>
-                  <a:schemeClr val="bg1"/>
-                </a:solidFill>
-              </a:rPr>
-              <a:t>User inputs a number outside the guess range</a:t>
-            </a:r>
-          </a:p>
-          <a:p>
-            <a:pPr marL="604838" lvl="1" indent="0">
-              <a:buNone/>
-            </a:pPr>
-            <a:r>
-              <a:rPr lang="en-US" dirty="0">
-                <a:solidFill>
-                  <a:schemeClr val="bg1"/>
-                </a:solidFill>
-              </a:rPr>
-              <a:t>Hint: use </a:t>
-            </a:r>
-            <a:r>
-              <a:rPr lang="en-US" dirty="0" err="1">
-                <a:solidFill>
-                  <a:schemeClr val="bg1"/>
-                </a:solidFill>
-              </a:rPr>
-              <a:t>random.randomint</a:t>
-            </a:r>
-            <a:r>
-              <a:rPr lang="en-US" dirty="0">
-                <a:solidFill>
-                  <a:schemeClr val="bg1"/>
-                </a:solidFill>
-              </a:rPr>
-              <a:t>() to generate a random number</a:t>
-            </a:r>
-          </a:p>
-        </p:txBody>
-      </p:sp>
-    </p:spTree>
-  </p:cSld>
-  <p:clrMapOvr>
-    <a:masterClrMapping/>
-  </p:clrMapOvr>
-</p:sld>
-</file>
-
-<file path=ppt/slides/slide16.xml><?xml version="1.0" encoding="utf-8"?>
-<p:sld xmlns:a="http://schemas.openxmlformats.org/drawingml/2006/main" xmlns:r="http://schemas.openxmlformats.org/officeDocument/2006/relationships" xmlns:p="http://schemas.openxmlformats.org/presentationml/2006/main">
-  <p:cSld>
-    <p:spTree>
-      <p:nvGrpSpPr>
-        <p:cNvPr id="1" name="Shape 517"/>
-        <p:cNvGrpSpPr/>
-        <p:nvPr/>
-      </p:nvGrpSpPr>
-      <p:grpSpPr>
-        <a:xfrm>
-          <a:off x="0" y="0"/>
-          <a:ext cx="0" cy="0"/>
-          <a:chOff x="0" y="0"/>
-          <a:chExt cx="0" cy="0"/>
-        </a:xfrm>
-      </p:grpSpPr>
-      <p:sp>
-        <p:nvSpPr>
-          <p:cNvPr id="518" name="Google Shape;518;p63"/>
-          <p:cNvSpPr txBox="1">
-            <a:spLocks noGrp="1"/>
-          </p:cNvSpPr>
-          <p:nvPr>
-            <p:ph type="title"/>
-          </p:nvPr>
-        </p:nvSpPr>
-        <p:spPr>
-          <a:xfrm>
-            <a:off x="411480" y="308611"/>
-            <a:ext cx="6173470" cy="891778"/>
-          </a:xfrm>
-          <a:noFill/>
-          <a:ln>
-            <a:noFill/>
-          </a:ln>
-        </p:spPr>
-        <p:txBody>
-          <a:bodyPr spcFirstLastPara="1" wrap="square" lIns="91425" tIns="91425" rIns="91425" bIns="91425" anchor="t" anchorCtr="0">
-            <a:normAutofit/>
-          </a:bodyPr>
-          <a:lstStyle/>
-          <a:p>
-            <a:pPr lvl="0"/>
-            <a:r>
-              <a:rPr lang="en-US" dirty="0"/>
-              <a:t>Exercise 3 (20 min)</a:t>
-            </a:r>
-          </a:p>
-        </p:txBody>
-      </p:sp>
-      <p:sp>
-        <p:nvSpPr>
-          <p:cNvPr id="519" name="Google Shape;519;p63"/>
-          <p:cNvSpPr txBox="1">
-            <a:spLocks noGrp="1"/>
-          </p:cNvSpPr>
-          <p:nvPr>
-            <p:ph type="body" idx="1"/>
-          </p:nvPr>
-        </p:nvSpPr>
-        <p:spPr>
-          <a:xfrm>
-            <a:off x="411479" y="1200389"/>
-            <a:ext cx="8390549" cy="3634500"/>
-          </a:xfrm>
-          <a:noFill/>
-          <a:ln>
-            <a:noFill/>
-          </a:ln>
-        </p:spPr>
-        <p:txBody>
-          <a:bodyPr spcFirstLastPara="1" wrap="square" lIns="91425" tIns="91425" rIns="91425" bIns="91425" anchor="t" anchorCtr="0">
-            <a:normAutofit/>
-          </a:bodyPr>
-          <a:lstStyle/>
-          <a:p>
-            <a:pPr lvl="0"/>
-            <a:r>
-              <a:rPr lang="en-US" sz="1400" dirty="0">
-                <a:solidFill>
-                  <a:schemeClr val="bg1"/>
-                </a:solidFill>
-              </a:rPr>
-              <a:t>Given a list of numbers, write a program that:</a:t>
-            </a:r>
-          </a:p>
-          <a:p>
-            <a:pPr lvl="0"/>
-            <a:endParaRPr lang="en-US" sz="1400" dirty="0">
-              <a:solidFill>
-                <a:schemeClr val="bg1"/>
-              </a:solidFill>
-            </a:endParaRPr>
-          </a:p>
-          <a:p>
-            <a:pPr lvl="0"/>
-            <a:r>
-              <a:rPr lang="en-US" sz="1400" dirty="0">
-                <a:solidFill>
-                  <a:schemeClr val="bg1"/>
-                </a:solidFill>
-              </a:rPr>
-              <a:t>Loops through the List: </a:t>
-            </a:r>
-            <a:r>
-              <a:rPr lang="en-US" sz="1400" dirty="0">
-                <a:solidFill>
-                  <a:schemeClr val="bg1"/>
-                </a:solidFill>
-                <a:sym typeface="Consolas"/>
-              </a:rPr>
-              <a:t>[10, -5, 20, ‘hello’, 5.2, 15, None, 30]</a:t>
-            </a:r>
-          </a:p>
-          <a:p>
-            <a:pPr lvl="0"/>
-            <a:endParaRPr lang="en-US" sz="1400" dirty="0">
-              <a:solidFill>
-                <a:schemeClr val="bg1"/>
-              </a:solidFill>
-              <a:sym typeface="Consolas"/>
-            </a:endParaRPr>
-          </a:p>
-          <a:p>
-            <a:pPr lvl="0"/>
-            <a:r>
-              <a:rPr lang="en-US" sz="1400" dirty="0">
-                <a:solidFill>
-                  <a:schemeClr val="bg1"/>
-                </a:solidFill>
-              </a:rPr>
-              <a:t>Skips any None values or non-integer types with an error message using try/except</a:t>
-            </a:r>
-          </a:p>
-          <a:p>
-            <a:pPr lvl="0"/>
-            <a:r>
-              <a:rPr lang="en-US" sz="1400" dirty="0">
-                <a:solidFill>
-                  <a:schemeClr val="bg1"/>
-                </a:solidFill>
-              </a:rPr>
-              <a:t>Raises a </a:t>
-            </a:r>
-            <a:r>
-              <a:rPr lang="en-US" sz="1400" dirty="0" err="1">
-                <a:solidFill>
-                  <a:schemeClr val="bg1"/>
-                </a:solidFill>
-              </a:rPr>
-              <a:t>ValueError</a:t>
-            </a:r>
-            <a:r>
-              <a:rPr lang="en-US" sz="1400" dirty="0">
-                <a:solidFill>
-                  <a:schemeClr val="bg1"/>
-                </a:solidFill>
-              </a:rPr>
-              <a:t> if it finds a negative number (stops the program)</a:t>
-            </a:r>
-          </a:p>
-          <a:p>
-            <a:pPr lvl="0"/>
-            <a:endParaRPr lang="en-US" sz="1400" dirty="0">
-              <a:solidFill>
-                <a:schemeClr val="bg1"/>
-              </a:solidFill>
-            </a:endParaRPr>
-          </a:p>
-          <a:p>
-            <a:pPr lvl="0"/>
-            <a:r>
-              <a:rPr lang="en-US" sz="1400" dirty="0">
-                <a:solidFill>
-                  <a:schemeClr val="bg1"/>
-                </a:solidFill>
-              </a:rPr>
-              <a:t>Collects all valid positive integers into a new list</a:t>
-            </a:r>
-          </a:p>
-          <a:p>
-            <a:pPr lvl="0"/>
-            <a:endParaRPr lang="en-US" sz="1400" dirty="0">
-              <a:solidFill>
-                <a:schemeClr val="bg1"/>
-              </a:solidFill>
-            </a:endParaRPr>
-          </a:p>
-          <a:p>
-            <a:pPr lvl="0"/>
-            <a:r>
-              <a:rPr lang="en-US" sz="1400" dirty="0">
-                <a:solidFill>
-                  <a:schemeClr val="bg1"/>
-                </a:solidFill>
-              </a:rPr>
-              <a:t>Prints the new list and the sum of its numbers</a:t>
-            </a:r>
-          </a:p>
-          <a:p>
-            <a:pPr lvl="0"/>
-            <a:endParaRPr lang="en-US" sz="1400" dirty="0">
-              <a:solidFill>
-                <a:schemeClr val="bg1"/>
-              </a:solidFill>
-            </a:endParaRPr>
-          </a:p>
-          <a:p>
-            <a:pPr lvl="0"/>
-            <a:r>
-              <a:rPr lang="en-US" sz="1400" dirty="0">
-                <a:solidFill>
-                  <a:schemeClr val="bg1"/>
-                </a:solidFill>
-              </a:rPr>
-              <a:t>Once you have a solution, remove -5 from the list and run it again.</a:t>
-            </a:r>
-          </a:p>
-          <a:p>
-            <a:pPr lvl="0"/>
-            <a:endParaRPr lang="en-US" sz="1400" dirty="0">
-              <a:solidFill>
-                <a:schemeClr val="bg1"/>
-              </a:solidFill>
-            </a:endParaRPr>
-          </a:p>
-          <a:p>
-            <a:pPr lvl="0"/>
-            <a:r>
-              <a:rPr lang="en-US" sz="1400" dirty="0">
-                <a:solidFill>
-                  <a:schemeClr val="bg1"/>
-                </a:solidFill>
-              </a:rPr>
-              <a:t>Hints:  </a:t>
-            </a:r>
-          </a:p>
-          <a:p>
-            <a:pPr lvl="0"/>
-            <a:r>
-              <a:rPr lang="en-US" sz="1400" dirty="0">
-                <a:solidFill>
-                  <a:schemeClr val="bg1"/>
-                </a:solidFill>
-              </a:rPr>
-              <a:t>Use </a:t>
-            </a:r>
-            <a:r>
-              <a:rPr lang="en-US" sz="1400" dirty="0" err="1">
-                <a:solidFill>
-                  <a:schemeClr val="bg1"/>
-                </a:solidFill>
-                <a:sym typeface="Consolas"/>
-              </a:rPr>
-              <a:t>isinstance</a:t>
-            </a:r>
-            <a:r>
-              <a:rPr lang="en-US" sz="1400" dirty="0">
-                <a:solidFill>
-                  <a:schemeClr val="bg1"/>
-                </a:solidFill>
-                <a:sym typeface="Consolas"/>
-              </a:rPr>
-              <a:t>(item, int) </a:t>
-            </a:r>
-            <a:r>
-              <a:rPr lang="en-US" sz="1400" dirty="0">
-                <a:solidFill>
-                  <a:schemeClr val="bg1"/>
-                </a:solidFill>
-              </a:rPr>
-              <a:t>to check types</a:t>
-            </a:r>
-          </a:p>
-          <a:p>
-            <a:pPr lvl="0"/>
-            <a:r>
-              <a:rPr lang="en-US" sz="1400" dirty="0">
-                <a:solidFill>
-                  <a:schemeClr val="bg1"/>
-                </a:solidFill>
-              </a:rPr>
-              <a:t>Build the valid list as you go</a:t>
-            </a:r>
-            <a:endParaRPr lang="en-US" sz="1400" dirty="0">
-              <a:solidFill>
-                <a:schemeClr val="bg1"/>
-              </a:solidFill>
-              <a:sym typeface="Consolas"/>
-            </a:endParaRPr>
-          </a:p>
-        </p:txBody>
-      </p:sp>
-    </p:spTree>
-  </p:cSld>
-  <p:clrMapOvr>
-    <a:masterClrMapping/>
-  </p:clrMapOvr>
-</p:sld>
-</file>
-
-<file path=ppt/slides/slide2.xml><?xml version="1.0" encoding="utf-8"?>
-<p:sld xmlns:a="http://schemas.openxmlformats.org/drawingml/2006/main" xmlns:r="http://schemas.openxmlformats.org/officeDocument/2006/relationships" xmlns:p="http://schemas.openxmlformats.org/presentationml/2006/main">
-  <p:cSld>
-    <p:spTree>
-      <p:nvGrpSpPr>
-        <p:cNvPr id="1" name="">
-          <a:extLst>
-            <a:ext uri="{FF2B5EF4-FFF2-40B4-BE49-F238E27FC236}">
-              <a16:creationId xmlns:a16="http://schemas.microsoft.com/office/drawing/2014/main" id="{372D87CF-5E92-D709-ADC1-CD5AB2C3F775}"/>
-            </a:ext>
-          </a:extLst>
-        </p:cNvPr>
-        <p:cNvGrpSpPr/>
-        <p:nvPr/>
-      </p:nvGrpSpPr>
-      <p:grpSpPr>
-        <a:xfrm>
-          <a:off x="0" y="0"/>
-          <a:ext cx="0" cy="0"/>
-          <a:chOff x="0" y="0"/>
-          <a:chExt cx="0" cy="0"/>
-        </a:xfrm>
-      </p:grpSpPr>
-      <p:sp>
-        <p:nvSpPr>
-          <p:cNvPr id="2" name="Title 1">
-            <a:extLst>
-              <a:ext uri="{FF2B5EF4-FFF2-40B4-BE49-F238E27FC236}">
-                <a16:creationId xmlns:a16="http://schemas.microsoft.com/office/drawing/2014/main" id="{2AEBB9CF-99E0-34C2-13BD-CE711791B329}"/>
-              </a:ext>
-            </a:extLst>
-          </p:cNvPr>
-          <p:cNvSpPr>
-            <a:spLocks noGrp="1"/>
-          </p:cNvSpPr>
-          <p:nvPr>
-            <p:ph type="title"/>
-          </p:nvPr>
-        </p:nvSpPr>
-        <p:spPr/>
-        <p:txBody>
-          <a:bodyPr/>
-          <a:lstStyle/>
-          <a:p>
-            <a:br>
-              <a:rPr lang="en-US" dirty="0"/>
-            </a:br>
-            <a:r>
-              <a:rPr lang="en-US" dirty="0"/>
-              <a:t>Course Schedule</a:t>
-            </a:r>
-          </a:p>
-        </p:txBody>
-      </p:sp>
-      <p:pic>
-        <p:nvPicPr>
-          <p:cNvPr id="7" name="Content Placeholder 6">
-            <a:extLst>
-              <a:ext uri="{FF2B5EF4-FFF2-40B4-BE49-F238E27FC236}">
-                <a16:creationId xmlns:a16="http://schemas.microsoft.com/office/drawing/2014/main" id="{D6C03BA8-C242-A7E3-06B9-2FDDD142A3E2}"/>
-              </a:ext>
-            </a:extLst>
-          </p:cNvPr>
-          <p:cNvPicPr>
-            <a:picLocks noGrp="1" noChangeAspect="1"/>
-          </p:cNvPicPr>
-          <p:nvPr>
-            <p:ph idx="1"/>
-          </p:nvPr>
-        </p:nvPicPr>
-        <p:blipFill>
-          <a:blip r:embed="rId3"/>
-          <a:stretch>
-            <a:fillRect/>
-          </a:stretch>
-        </p:blipFill>
-        <p:spPr>
-          <a:xfrm>
-            <a:off x="381000" y="989100"/>
-            <a:ext cx="8382000" cy="3716356"/>
-          </a:xfrm>
-          <a:prstGeom prst="rect">
-            <a:avLst/>
-          </a:prstGeom>
-          <a:noFill/>
-          <a:ln>
-            <a:noFill/>
-          </a:ln>
-        </p:spPr>
-      </p:pic>
-      <p:sp>
-        <p:nvSpPr>
-          <p:cNvPr id="8" name="Rectangle 7">
-            <a:extLst>
-              <a:ext uri="{FF2B5EF4-FFF2-40B4-BE49-F238E27FC236}">
-                <a16:creationId xmlns:a16="http://schemas.microsoft.com/office/drawing/2014/main" id="{0C366FE1-DAFA-E7EC-025F-E1D1E8686851}"/>
-              </a:ext>
-            </a:extLst>
-          </p:cNvPr>
-          <p:cNvSpPr/>
-          <p:nvPr/>
-        </p:nvSpPr>
-        <p:spPr>
-          <a:xfrm>
-            <a:off x="97505" y="2419351"/>
-            <a:ext cx="4713249" cy="227205"/>
-          </a:xfrm>
-          <a:prstGeom prst="rect">
-            <a:avLst/>
-          </a:prstGeom>
-          <a:noFill/>
-          <a:ln w="38100">
-            <a:solidFill>
-              <a:srgbClr val="FF0000"/>
-            </a:solidFill>
-          </a:ln>
-        </p:spPr>
-        <p:style>
-          <a:lnRef idx="2">
-            <a:schemeClr val="accent1">
-              <a:shade val="15000"/>
-            </a:schemeClr>
-          </a:lnRef>
-          <a:fillRef idx="1">
-            <a:schemeClr val="accent1"/>
-          </a:fillRef>
-          <a:effectRef idx="0">
-            <a:schemeClr val="accent1"/>
-          </a:effectRef>
-          <a:fontRef idx="minor">
-            <a:schemeClr val="lt1"/>
-          </a:fontRef>
-        </p:style>
-        <p:txBody>
-          <a:bodyPr rtlCol="0" anchor="ctr"/>
-          <a:lstStyle/>
-          <a:p>
-            <a:pPr algn="ctr"/>
-            <a:endParaRPr lang="en-US" sz="1800" dirty="0"/>
-          </a:p>
-        </p:txBody>
-      </p:sp>
-    </p:spTree>
-    <p:extLst>
-      <p:ext uri="{BB962C8B-B14F-4D97-AF65-F5344CB8AC3E}">
-        <p14:creationId xmlns:p14="http://schemas.microsoft.com/office/powerpoint/2010/main" val="1919185427"/>
-      </p:ext>
-    </p:extLst>
-  </p:cSld>
-  <p:clrMapOvr>
-    <a:masterClrMapping/>
-  </p:clrMapOvr>
-</p:sld>
-</file>
-
-<file path=ppt/slides/slide3.xml><?xml version="1.0" encoding="utf-8"?>
-<p:sld xmlns:a="http://schemas.openxmlformats.org/drawingml/2006/main" xmlns:r="http://schemas.openxmlformats.org/officeDocument/2006/relationships" xmlns:p="http://schemas.openxmlformats.org/presentationml/2006/main">
-  <p:cSld>
-    <p:spTree>
-      <p:nvGrpSpPr>
-        <p:cNvPr id="1" name="Shape 470">
-          <a:extLst>
-            <a:ext uri="{FF2B5EF4-FFF2-40B4-BE49-F238E27FC236}">
-              <a16:creationId xmlns:a16="http://schemas.microsoft.com/office/drawing/2014/main" id="{331C143A-1CF1-E401-0CB5-D7BA22316B98}"/>
-            </a:ext>
-          </a:extLst>
-        </p:cNvPr>
-        <p:cNvGrpSpPr/>
-        <p:nvPr/>
-      </p:nvGrpSpPr>
-      <p:grpSpPr>
-        <a:xfrm>
-          <a:off x="0" y="0"/>
-          <a:ext cx="0" cy="0"/>
-          <a:chOff x="0" y="0"/>
-          <a:chExt cx="0" cy="0"/>
-        </a:xfrm>
-      </p:grpSpPr>
-      <p:sp>
-        <p:nvSpPr>
-          <p:cNvPr id="471" name="Google Shape;471;p55">
-            <a:extLst>
-              <a:ext uri="{FF2B5EF4-FFF2-40B4-BE49-F238E27FC236}">
-                <a16:creationId xmlns:a16="http://schemas.microsoft.com/office/drawing/2014/main" id="{55422540-3734-61F7-53F7-602380429E8F}"/>
-              </a:ext>
-            </a:extLst>
-          </p:cNvPr>
-          <p:cNvSpPr txBox="1">
-            <a:spLocks noGrp="1"/>
-          </p:cNvSpPr>
-          <p:nvPr>
-            <p:ph type="title"/>
-          </p:nvPr>
-        </p:nvSpPr>
-        <p:spPr>
-          <a:xfrm>
-            <a:off x="3578426" y="2125861"/>
-            <a:ext cx="6173470" cy="891778"/>
-          </a:xfrm>
-          <a:noFill/>
-          <a:ln>
-            <a:noFill/>
-          </a:ln>
-        </p:spPr>
-        <p:txBody>
-          <a:bodyPr spcFirstLastPara="1" wrap="square" lIns="91425" tIns="91425" rIns="91425" bIns="91425" anchor="t" anchorCtr="0">
-            <a:normAutofit/>
-          </a:bodyPr>
-          <a:lstStyle/>
-          <a:p>
-            <a:pPr lvl="0"/>
-            <a:r>
-              <a:rPr lang="en-US" dirty="0"/>
-              <a:t>Review</a:t>
-            </a:r>
-          </a:p>
-        </p:txBody>
-      </p:sp>
-    </p:spTree>
-    <p:extLst>
-      <p:ext uri="{BB962C8B-B14F-4D97-AF65-F5344CB8AC3E}">
-        <p14:creationId xmlns:p14="http://schemas.microsoft.com/office/powerpoint/2010/main" val="934622849"/>
-      </p:ext>
-    </p:extLst>
-  </p:cSld>
-  <p:clrMapOvr>
-    <a:masterClrMapping/>
-  </p:clrMapOvr>
-</p:sld>
-</file>
-
-<file path=ppt/slides/slide4.xml><?xml version="1.0" encoding="utf-8"?>
-<p:sld xmlns:a="http://schemas.openxmlformats.org/drawingml/2006/main" xmlns:r="http://schemas.openxmlformats.org/officeDocument/2006/relationships" xmlns:p="http://schemas.openxmlformats.org/presentationml/2006/main">
-  <p:cSld>
-    <p:spTree>
-      <p:nvGrpSpPr>
-        <p:cNvPr id="1" name="Shape 470">
-          <a:extLst>
-            <a:ext uri="{FF2B5EF4-FFF2-40B4-BE49-F238E27FC236}">
-              <a16:creationId xmlns:a16="http://schemas.microsoft.com/office/drawing/2014/main" id="{1105E84A-1205-0701-E7F9-9675FAC2D835}"/>
-            </a:ext>
-          </a:extLst>
-        </p:cNvPr>
-        <p:cNvGrpSpPr/>
-        <p:nvPr/>
-      </p:nvGrpSpPr>
-      <p:grpSpPr>
-        <a:xfrm>
-          <a:off x="0" y="0"/>
-          <a:ext cx="0" cy="0"/>
-          <a:chOff x="0" y="0"/>
-          <a:chExt cx="0" cy="0"/>
-        </a:xfrm>
-      </p:grpSpPr>
-      <p:sp>
-        <p:nvSpPr>
-          <p:cNvPr id="471" name="Google Shape;471;p55">
-            <a:extLst>
-              <a:ext uri="{FF2B5EF4-FFF2-40B4-BE49-F238E27FC236}">
-                <a16:creationId xmlns:a16="http://schemas.microsoft.com/office/drawing/2014/main" id="{CEB7E12F-E2C9-500B-63E1-77AA22B0D1BE}"/>
-              </a:ext>
-            </a:extLst>
-          </p:cNvPr>
-          <p:cNvSpPr txBox="1">
-            <a:spLocks noGrp="1"/>
-          </p:cNvSpPr>
-          <p:nvPr>
-            <p:ph type="title"/>
-          </p:nvPr>
-        </p:nvSpPr>
-        <p:spPr>
-          <a:xfrm>
-            <a:off x="2054426" y="2356319"/>
-            <a:ext cx="6173470" cy="891778"/>
-          </a:xfrm>
-          <a:noFill/>
-          <a:ln>
-            <a:noFill/>
-          </a:ln>
-        </p:spPr>
-        <p:txBody>
-          <a:bodyPr spcFirstLastPara="1" wrap="square" lIns="91425" tIns="91425" rIns="91425" bIns="91425" anchor="t" anchorCtr="0">
-            <a:normAutofit/>
-          </a:bodyPr>
-          <a:lstStyle/>
-          <a:p>
-            <a:pPr lvl="0"/>
-            <a:r>
-              <a:rPr lang="en-US" dirty="0"/>
-              <a:t>What did we do last lesson?</a:t>
-            </a:r>
-          </a:p>
-        </p:txBody>
-      </p:sp>
-    </p:spTree>
-    <p:extLst>
-      <p:ext uri="{BB962C8B-B14F-4D97-AF65-F5344CB8AC3E}">
-        <p14:creationId xmlns:p14="http://schemas.microsoft.com/office/powerpoint/2010/main" val="1808581615"/>
-      </p:ext>
-    </p:extLst>
-  </p:cSld>
-  <p:clrMapOvr>
-    <a:masterClrMapping/>
-  </p:clrMapOvr>
-</p:sld>
-</file>
-
-<file path=ppt/slides/slide5.xml><?xml version="1.0" encoding="utf-8"?>
-<p:sld xmlns:a="http://schemas.openxmlformats.org/drawingml/2006/main" xmlns:r="http://schemas.openxmlformats.org/officeDocument/2006/relationships" xmlns:p="http://schemas.openxmlformats.org/presentationml/2006/main">
-  <p:cSld>
-    <p:spTree>
-      <p:nvGrpSpPr>
-        <p:cNvPr id="1" name="Shape 470">
-          <a:extLst>
-            <a:ext uri="{FF2B5EF4-FFF2-40B4-BE49-F238E27FC236}">
-              <a16:creationId xmlns:a16="http://schemas.microsoft.com/office/drawing/2014/main" id="{A69CB039-FD37-0C39-F21F-C7BACD8C7348}"/>
-            </a:ext>
-          </a:extLst>
-        </p:cNvPr>
-        <p:cNvGrpSpPr/>
-        <p:nvPr/>
-      </p:nvGrpSpPr>
-      <p:grpSpPr>
-        <a:xfrm>
-          <a:off x="0" y="0"/>
-          <a:ext cx="0" cy="0"/>
-          <a:chOff x="0" y="0"/>
-          <a:chExt cx="0" cy="0"/>
-        </a:xfrm>
-      </p:grpSpPr>
-      <p:sp>
-        <p:nvSpPr>
-          <p:cNvPr id="471" name="Google Shape;471;p55">
-            <a:extLst>
-              <a:ext uri="{FF2B5EF4-FFF2-40B4-BE49-F238E27FC236}">
-                <a16:creationId xmlns:a16="http://schemas.microsoft.com/office/drawing/2014/main" id="{9B8D174E-8CC3-13F6-9772-7F086E366F56}"/>
-              </a:ext>
-            </a:extLst>
-          </p:cNvPr>
-          <p:cNvSpPr txBox="1">
-            <a:spLocks noGrp="1"/>
-          </p:cNvSpPr>
-          <p:nvPr>
-            <p:ph type="title"/>
-          </p:nvPr>
-        </p:nvSpPr>
-        <p:spPr>
-          <a:xfrm>
-            <a:off x="359440" y="423441"/>
-            <a:ext cx="6173470" cy="891778"/>
-          </a:xfrm>
-          <a:noFill/>
-          <a:ln>
-            <a:noFill/>
-          </a:ln>
-        </p:spPr>
-        <p:txBody>
-          <a:bodyPr spcFirstLastPara="1" wrap="square" lIns="91425" tIns="91425" rIns="91425" bIns="91425" anchor="t" anchorCtr="0">
-            <a:normAutofit/>
-          </a:bodyPr>
-          <a:lstStyle/>
-          <a:p>
-            <a:pPr lvl="0"/>
-            <a:r>
-              <a:rPr lang="en-US" dirty="0"/>
-              <a:t>Pre Class Problem 1</a:t>
-            </a:r>
-          </a:p>
-        </p:txBody>
-      </p:sp>
-      <p:sp>
-        <p:nvSpPr>
-          <p:cNvPr id="3" name="TextBox 2">
-            <a:extLst>
-              <a:ext uri="{FF2B5EF4-FFF2-40B4-BE49-F238E27FC236}">
-                <a16:creationId xmlns:a16="http://schemas.microsoft.com/office/drawing/2014/main" id="{E0392748-B27B-1B59-3E8A-2EF44BD57245}"/>
-              </a:ext>
-            </a:extLst>
-          </p:cNvPr>
-          <p:cNvSpPr txBox="1"/>
-          <p:nvPr/>
-        </p:nvSpPr>
-        <p:spPr>
-          <a:xfrm>
-            <a:off x="195889" y="1247815"/>
-            <a:ext cx="8390550" cy="2677656"/>
-          </a:xfrm>
-          <a:prstGeom prst="rect">
-            <a:avLst/>
-          </a:prstGeom>
-          <a:noFill/>
-        </p:spPr>
-        <p:txBody>
-          <a:bodyPr wrap="square">
-            <a:spAutoFit/>
-          </a:bodyPr>
-          <a:lstStyle/>
-          <a:p>
-            <a:pPr marL="114300" lvl="0" algn="l" rtl="0">
-              <a:spcBef>
-                <a:spcPts val="0"/>
-              </a:spcBef>
-              <a:spcAft>
-                <a:spcPts val="0"/>
-              </a:spcAft>
-              <a:buSzPts val="1800"/>
-            </a:pPr>
-            <a:r>
-              <a:rPr lang="en-US" sz="2400" dirty="0">
-                <a:solidFill>
-                  <a:schemeClr val="bg1"/>
-                </a:solidFill>
-              </a:rPr>
-              <a:t>Write a Python Script that writes 100 random integer values (from 1 to 1000) to another file (.txt) .  **Only do this once**</a:t>
-            </a:r>
-          </a:p>
-          <a:p>
-            <a:pPr marL="114300" lvl="0" algn="l" rtl="0">
-              <a:spcBef>
-                <a:spcPts val="0"/>
-              </a:spcBef>
-              <a:spcAft>
-                <a:spcPts val="0"/>
-              </a:spcAft>
-              <a:buSzPts val="1800"/>
-            </a:pPr>
-            <a:endParaRPr lang="en-US" sz="2400" dirty="0">
-              <a:solidFill>
-                <a:schemeClr val="bg1"/>
-              </a:solidFill>
-            </a:endParaRPr>
-          </a:p>
-          <a:p>
-            <a:pPr marL="114300" lvl="0" algn="l" rtl="0">
-              <a:spcBef>
-                <a:spcPts val="0"/>
-              </a:spcBef>
-              <a:spcAft>
-                <a:spcPts val="0"/>
-              </a:spcAft>
-              <a:buSzPts val="1800"/>
-            </a:pPr>
-            <a:endParaRPr lang="en-US" sz="2400" dirty="0">
-              <a:solidFill>
-                <a:schemeClr val="bg1"/>
-              </a:solidFill>
-            </a:endParaRPr>
-          </a:p>
-          <a:p>
-            <a:pPr marL="114300" lvl="0" algn="l" rtl="0">
-              <a:spcBef>
-                <a:spcPts val="0"/>
-              </a:spcBef>
-              <a:spcAft>
-                <a:spcPts val="0"/>
-              </a:spcAft>
-              <a:buSzPts val="1800"/>
-            </a:pPr>
-            <a:r>
-              <a:rPr lang="en-US" sz="2400" dirty="0">
-                <a:solidFill>
-                  <a:schemeClr val="bg1"/>
-                </a:solidFill>
-              </a:rPr>
-              <a:t>Write another Python Script that opens that file, displays the highest number in the list, the lowest number in the list, and the average of that list.</a:t>
-            </a:r>
-          </a:p>
-        </p:txBody>
-      </p:sp>
-    </p:spTree>
-    <p:extLst>
-      <p:ext uri="{BB962C8B-B14F-4D97-AF65-F5344CB8AC3E}">
-        <p14:creationId xmlns:p14="http://schemas.microsoft.com/office/powerpoint/2010/main" val="4226055667"/>
-      </p:ext>
-    </p:extLst>
-  </p:cSld>
-  <p:clrMapOvr>
-    <a:masterClrMapping/>
-  </p:clrMapOvr>
-</p:sld>
-</file>
-
-<file path=ppt/slides/slide6.xml><?xml version="1.0" encoding="utf-8"?>
-<p:sld xmlns:a="http://schemas.openxmlformats.org/drawingml/2006/main" xmlns:r="http://schemas.openxmlformats.org/officeDocument/2006/relationships" xmlns:p="http://schemas.openxmlformats.org/presentationml/2006/main">
-  <p:cSld>
-    <p:spTree>
-      <p:nvGrpSpPr>
-        <p:cNvPr id="1" name="Shape 470">
-          <a:extLst>
-            <a:ext uri="{FF2B5EF4-FFF2-40B4-BE49-F238E27FC236}">
-              <a16:creationId xmlns:a16="http://schemas.microsoft.com/office/drawing/2014/main" id="{E9656FE8-FD50-A356-0EE5-BBF10756201B}"/>
-            </a:ext>
-          </a:extLst>
-        </p:cNvPr>
-        <p:cNvGrpSpPr/>
-        <p:nvPr/>
-      </p:nvGrpSpPr>
-      <p:grpSpPr>
-        <a:xfrm>
-          <a:off x="0" y="0"/>
-          <a:ext cx="0" cy="0"/>
-          <a:chOff x="0" y="0"/>
-          <a:chExt cx="0" cy="0"/>
-        </a:xfrm>
-      </p:grpSpPr>
-      <p:sp>
-        <p:nvSpPr>
-          <p:cNvPr id="471" name="Google Shape;471;p55">
-            <a:extLst>
-              <a:ext uri="{FF2B5EF4-FFF2-40B4-BE49-F238E27FC236}">
-                <a16:creationId xmlns:a16="http://schemas.microsoft.com/office/drawing/2014/main" id="{11CF11BC-40F7-7823-BE15-7648E4FEBC84}"/>
-              </a:ext>
-            </a:extLst>
-          </p:cNvPr>
-          <p:cNvSpPr txBox="1">
-            <a:spLocks noGrp="1"/>
-          </p:cNvSpPr>
-          <p:nvPr>
-            <p:ph type="title"/>
-          </p:nvPr>
-        </p:nvSpPr>
-        <p:spPr>
-          <a:xfrm>
-            <a:off x="359440" y="423441"/>
-            <a:ext cx="6173470" cy="891778"/>
-          </a:xfrm>
-          <a:noFill/>
-          <a:ln>
-            <a:noFill/>
-          </a:ln>
-        </p:spPr>
-        <p:txBody>
-          <a:bodyPr spcFirstLastPara="1" wrap="square" lIns="91425" tIns="91425" rIns="91425" bIns="91425" anchor="t" anchorCtr="0">
-            <a:normAutofit/>
-          </a:bodyPr>
-          <a:lstStyle/>
-          <a:p>
-            <a:pPr lvl="0"/>
-            <a:r>
-              <a:rPr lang="en-US" dirty="0"/>
-              <a:t>Pre Class Problem 2</a:t>
-            </a:r>
-          </a:p>
-        </p:txBody>
-      </p:sp>
-      <p:sp>
-        <p:nvSpPr>
-          <p:cNvPr id="3" name="TextBox 2">
-            <a:extLst>
-              <a:ext uri="{FF2B5EF4-FFF2-40B4-BE49-F238E27FC236}">
-                <a16:creationId xmlns:a16="http://schemas.microsoft.com/office/drawing/2014/main" id="{6677DEC7-1E2D-6138-2E95-98E16C392A91}"/>
-              </a:ext>
-            </a:extLst>
-          </p:cNvPr>
-          <p:cNvSpPr txBox="1"/>
-          <p:nvPr/>
-        </p:nvSpPr>
-        <p:spPr>
-          <a:xfrm>
-            <a:off x="195889" y="1247815"/>
-            <a:ext cx="8390550" cy="2308324"/>
-          </a:xfrm>
-          <a:prstGeom prst="rect">
-            <a:avLst/>
-          </a:prstGeom>
-          <a:noFill/>
-        </p:spPr>
-        <p:txBody>
-          <a:bodyPr wrap="square">
-            <a:spAutoFit/>
-          </a:bodyPr>
-          <a:lstStyle/>
-          <a:p>
-            <a:pPr marL="114300" lvl="0">
-              <a:buSzPts val="1800"/>
-            </a:pPr>
-            <a:r>
-              <a:rPr lang="en-US" sz="2400" dirty="0">
-                <a:solidFill>
-                  <a:schemeClr val="bg1"/>
-                </a:solidFill>
-              </a:rPr>
-              <a:t>cd into the Lesson 04 folder</a:t>
-            </a:r>
-          </a:p>
-          <a:p>
-            <a:pPr marL="114300" lvl="0">
-              <a:buSzPts val="1800"/>
-            </a:pPr>
-            <a:endParaRPr lang="en-US" sz="2400" dirty="0">
-              <a:solidFill>
-                <a:schemeClr val="bg1"/>
-              </a:solidFill>
-            </a:endParaRPr>
-          </a:p>
-          <a:p>
-            <a:pPr marL="114300" lvl="0">
-              <a:buSzPts val="1800"/>
-            </a:pPr>
-            <a:r>
-              <a:rPr lang="en-US" sz="2400" dirty="0">
-                <a:solidFill>
-                  <a:schemeClr val="bg1"/>
-                </a:solidFill>
-              </a:rPr>
-              <a:t>Create a virtual environment there.  Activate the virtual environment and install all of the dependencies listed in requirements.txt.  After you do this, add this folder to your .</a:t>
-            </a:r>
-            <a:r>
-              <a:rPr lang="en-US" sz="2400" dirty="0" err="1">
-                <a:solidFill>
-                  <a:schemeClr val="bg1"/>
-                </a:solidFill>
-              </a:rPr>
-              <a:t>gitignore</a:t>
-            </a:r>
-            <a:r>
-              <a:rPr lang="en-US" sz="2400" dirty="0">
-                <a:solidFill>
-                  <a:schemeClr val="bg1"/>
-                </a:solidFill>
-              </a:rPr>
-              <a:t> within your repo.</a:t>
-            </a:r>
-          </a:p>
-        </p:txBody>
-      </p:sp>
-    </p:spTree>
-    <p:extLst>
-      <p:ext uri="{BB962C8B-B14F-4D97-AF65-F5344CB8AC3E}">
-        <p14:creationId xmlns:p14="http://schemas.microsoft.com/office/powerpoint/2010/main" val="2152760586"/>
-      </p:ext>
-    </p:extLst>
-  </p:cSld>
-  <p:clrMapOvr>
-    <a:masterClrMapping/>
-  </p:clrMapOvr>
-</p:sld>
-</file>
-
-<file path=ppt/slides/slide7.xml><?xml version="1.0" encoding="utf-8"?>
-<p:sld xmlns:a="http://schemas.openxmlformats.org/drawingml/2006/main" xmlns:r="http://schemas.openxmlformats.org/officeDocument/2006/relationships" xmlns:p="http://schemas.openxmlformats.org/presentationml/2006/main">
-  <p:cSld>
-    <p:spTree>
-      <p:nvGrpSpPr>
-        <p:cNvPr id="1" name="Shape 470"/>
-        <p:cNvGrpSpPr/>
-        <p:nvPr/>
-      </p:nvGrpSpPr>
-      <p:grpSpPr>
-        <a:xfrm>
-          <a:off x="0" y="0"/>
-          <a:ext cx="0" cy="0"/>
-          <a:chOff x="0" y="0"/>
-          <a:chExt cx="0" cy="0"/>
-        </a:xfrm>
-      </p:grpSpPr>
-      <p:sp>
-        <p:nvSpPr>
-          <p:cNvPr id="471" name="Google Shape;471;p55"/>
-          <p:cNvSpPr txBox="1">
-            <a:spLocks noGrp="1"/>
-          </p:cNvSpPr>
-          <p:nvPr>
-            <p:ph type="title"/>
-          </p:nvPr>
-        </p:nvSpPr>
-        <p:spPr>
-          <a:xfrm>
-            <a:off x="411480" y="308611"/>
-            <a:ext cx="6173470" cy="891778"/>
-          </a:xfrm>
-          <a:noFill/>
-          <a:ln>
-            <a:noFill/>
-          </a:ln>
-        </p:spPr>
-        <p:txBody>
-          <a:bodyPr spcFirstLastPara="1" wrap="square" lIns="91425" tIns="91425" rIns="91425" bIns="91425" anchor="t" anchorCtr="0">
-            <a:normAutofit/>
-          </a:bodyPr>
-          <a:lstStyle/>
-          <a:p>
-            <a:pPr lvl="0"/>
-            <a:r>
-              <a:rPr lang="en-US"/>
-              <a:t>PYTHON ERRORS</a:t>
-            </a:r>
-          </a:p>
-        </p:txBody>
-      </p:sp>
-      <p:sp>
-        <p:nvSpPr>
-          <p:cNvPr id="472" name="Google Shape;472;p55"/>
-          <p:cNvSpPr txBox="1"/>
-          <p:nvPr/>
-        </p:nvSpPr>
-        <p:spPr>
-          <a:xfrm>
-            <a:off x="616150" y="1580550"/>
-            <a:ext cx="7647000" cy="3241500"/>
-          </a:xfrm>
-          <a:prstGeom prst="rect">
-            <a:avLst/>
-          </a:prstGeom>
-          <a:noFill/>
-          <a:ln>
-            <a:noFill/>
-          </a:ln>
-        </p:spPr>
-        <p:txBody>
-          <a:bodyPr spcFirstLastPara="1" wrap="square" lIns="91425" tIns="91425" rIns="91425" bIns="91425" anchor="t" anchorCtr="0">
-            <a:noAutofit/>
-          </a:bodyPr>
-          <a:lstStyle/>
-          <a:p>
-            <a:pPr marL="457200" marR="0" lvl="0" indent="-342900" algn="l" rtl="0">
-              <a:lnSpc>
-                <a:spcPct val="100000"/>
-              </a:lnSpc>
-              <a:spcBef>
-                <a:spcPts val="0"/>
-              </a:spcBef>
-              <a:spcAft>
-                <a:spcPts val="0"/>
-              </a:spcAft>
-              <a:buClr>
-                <a:schemeClr val="dk2"/>
-              </a:buClr>
-              <a:buSzPts val="1800"/>
-              <a:buFont typeface="Roboto"/>
-              <a:buChar char="●"/>
-            </a:pPr>
-            <a:r>
-              <a:rPr lang="en" sz="1800" b="0" i="0" u="none" strike="noStrike" cap="none" dirty="0">
-                <a:solidFill>
-                  <a:schemeClr val="lt1"/>
-                </a:solidFill>
-                <a:latin typeface="Roboto"/>
-                <a:ea typeface="Roboto"/>
-                <a:cs typeface="Roboto"/>
-                <a:sym typeface="Roboto"/>
-              </a:rPr>
-              <a:t>Errors are issues in a program that prevent it from running as expected</a:t>
-            </a:r>
-          </a:p>
-          <a:p>
-            <a:pPr marL="457200" marR="0" lvl="0" indent="-342900" algn="l" rtl="0">
-              <a:lnSpc>
-                <a:spcPct val="100000"/>
-              </a:lnSpc>
-              <a:spcBef>
-                <a:spcPts val="0"/>
-              </a:spcBef>
-              <a:spcAft>
-                <a:spcPts val="0"/>
-              </a:spcAft>
-              <a:buClr>
-                <a:schemeClr val="dk2"/>
-              </a:buClr>
-              <a:buSzPts val="1800"/>
-              <a:buFont typeface="Roboto"/>
-              <a:buChar char="●"/>
-            </a:pPr>
-            <a:endParaRPr sz="1800" b="0" i="0" u="none" strike="noStrike" cap="none" dirty="0">
-              <a:solidFill>
-                <a:schemeClr val="lt1"/>
-              </a:solidFill>
-              <a:latin typeface="Roboto"/>
-              <a:ea typeface="Roboto"/>
-              <a:cs typeface="Roboto"/>
-              <a:sym typeface="Roboto"/>
-            </a:endParaRPr>
-          </a:p>
-          <a:p>
-            <a:pPr marL="457200" marR="0" lvl="0" indent="-342900" algn="l" rtl="0">
-              <a:lnSpc>
-                <a:spcPct val="100000"/>
-              </a:lnSpc>
-              <a:spcBef>
-                <a:spcPts val="0"/>
-              </a:spcBef>
-              <a:spcAft>
-                <a:spcPts val="0"/>
-              </a:spcAft>
-              <a:buClr>
-                <a:schemeClr val="dk2"/>
-              </a:buClr>
-              <a:buSzPts val="1800"/>
-              <a:buFont typeface="Roboto"/>
-              <a:buChar char="●"/>
-            </a:pPr>
-            <a:r>
-              <a:rPr lang="en" sz="1800" b="0" i="0" u="none" strike="noStrike" cap="none" dirty="0">
-                <a:solidFill>
-                  <a:schemeClr val="lt1"/>
-                </a:solidFill>
-                <a:latin typeface="Roboto"/>
-                <a:ea typeface="Roboto"/>
-                <a:cs typeface="Roboto"/>
-                <a:sym typeface="Roboto"/>
-              </a:rPr>
-              <a:t>They help programmers find and fix mistakes</a:t>
-            </a:r>
-          </a:p>
-          <a:p>
-            <a:pPr marL="457200" marR="0" lvl="0" indent="-342900" algn="l" rtl="0">
-              <a:lnSpc>
-                <a:spcPct val="100000"/>
-              </a:lnSpc>
-              <a:spcBef>
-                <a:spcPts val="0"/>
-              </a:spcBef>
-              <a:spcAft>
-                <a:spcPts val="0"/>
-              </a:spcAft>
-              <a:buClr>
-                <a:schemeClr val="dk2"/>
-              </a:buClr>
-              <a:buSzPts val="1800"/>
-              <a:buFont typeface="Roboto"/>
-              <a:buChar char="●"/>
-            </a:pPr>
-            <a:endParaRPr sz="1800" b="0" i="0" u="none" strike="noStrike" cap="none" dirty="0">
-              <a:solidFill>
-                <a:schemeClr val="lt1"/>
-              </a:solidFill>
-              <a:latin typeface="Roboto"/>
-              <a:ea typeface="Roboto"/>
-              <a:cs typeface="Roboto"/>
-              <a:sym typeface="Roboto"/>
-            </a:endParaRPr>
-          </a:p>
-          <a:p>
-            <a:pPr marL="457200" marR="0" lvl="0" indent="-342900" algn="l" rtl="0">
-              <a:lnSpc>
-                <a:spcPct val="100000"/>
-              </a:lnSpc>
-              <a:spcBef>
-                <a:spcPts val="0"/>
-              </a:spcBef>
-              <a:spcAft>
-                <a:spcPts val="0"/>
-              </a:spcAft>
-              <a:buClr>
-                <a:schemeClr val="dk2"/>
-              </a:buClr>
-              <a:buSzPts val="1800"/>
-              <a:buFont typeface="Roboto"/>
-              <a:buChar char="●"/>
-            </a:pPr>
-            <a:r>
-              <a:rPr lang="en" sz="1800" b="0" i="0" u="none" strike="noStrike" cap="none" dirty="0">
-                <a:solidFill>
-                  <a:schemeClr val="lt1"/>
-                </a:solidFill>
-                <a:latin typeface="Roboto"/>
-                <a:ea typeface="Roboto"/>
-                <a:cs typeface="Roboto"/>
-                <a:sym typeface="Roboto"/>
-              </a:rPr>
-              <a:t>Why learn errors?</a:t>
-            </a:r>
-            <a:endParaRPr sz="1800" b="0" i="0" u="none" strike="noStrike" cap="none" dirty="0">
-              <a:solidFill>
-                <a:schemeClr val="lt1"/>
-              </a:solidFill>
-              <a:latin typeface="Roboto"/>
-              <a:ea typeface="Roboto"/>
-              <a:cs typeface="Roboto"/>
-              <a:sym typeface="Roboto"/>
-            </a:endParaRPr>
-          </a:p>
-          <a:p>
-            <a:pPr marL="914400" marR="0" lvl="1" indent="-342900" algn="l" rtl="0">
-              <a:lnSpc>
-                <a:spcPct val="100000"/>
-              </a:lnSpc>
-              <a:spcBef>
-                <a:spcPts val="0"/>
-              </a:spcBef>
-              <a:spcAft>
-                <a:spcPts val="0"/>
-              </a:spcAft>
-              <a:buClr>
-                <a:schemeClr val="dk2"/>
-              </a:buClr>
-              <a:buSzPts val="1800"/>
-              <a:buFont typeface="Roboto"/>
-              <a:buChar char="○"/>
-            </a:pPr>
-            <a:r>
-              <a:rPr lang="en" sz="1800" b="0" i="0" u="none" strike="noStrike" cap="none" dirty="0">
-                <a:solidFill>
-                  <a:schemeClr val="lt1"/>
-                </a:solidFill>
-                <a:latin typeface="Roboto"/>
-                <a:ea typeface="Roboto"/>
-                <a:cs typeface="Roboto"/>
-                <a:sym typeface="Roboto"/>
-              </a:rPr>
-              <a:t>Errors help you debug</a:t>
-            </a:r>
-            <a:endParaRPr sz="1800" b="0" i="0" u="none" strike="noStrike" cap="none" dirty="0">
-              <a:solidFill>
-                <a:schemeClr val="lt1"/>
-              </a:solidFill>
-              <a:latin typeface="Roboto"/>
-              <a:ea typeface="Roboto"/>
-              <a:cs typeface="Roboto"/>
-              <a:sym typeface="Roboto"/>
-            </a:endParaRPr>
-          </a:p>
-          <a:p>
-            <a:pPr marL="914400" marR="0" lvl="1" indent="-342900" algn="l" rtl="0">
-              <a:lnSpc>
-                <a:spcPct val="100000"/>
-              </a:lnSpc>
-              <a:spcBef>
-                <a:spcPts val="0"/>
-              </a:spcBef>
-              <a:spcAft>
-                <a:spcPts val="0"/>
-              </a:spcAft>
-              <a:buClr>
-                <a:schemeClr val="dk2"/>
-              </a:buClr>
-              <a:buSzPts val="1800"/>
-              <a:buFont typeface="Roboto"/>
-              <a:buChar char="○"/>
-            </a:pPr>
-            <a:r>
-              <a:rPr lang="en" sz="1800" b="0" i="0" u="none" strike="noStrike" cap="none" dirty="0">
-                <a:solidFill>
-                  <a:schemeClr val="lt1"/>
-                </a:solidFill>
-                <a:latin typeface="Roboto"/>
-                <a:ea typeface="Roboto"/>
-                <a:cs typeface="Roboto"/>
-                <a:sym typeface="Roboto"/>
-              </a:rPr>
-              <a:t>Knowing common errors makes writing and fixing code faster</a:t>
-            </a:r>
-            <a:endParaRPr sz="1800" b="0" i="0" u="none" strike="noStrike" cap="none" dirty="0">
-              <a:solidFill>
-                <a:schemeClr val="lt1"/>
-              </a:solidFill>
-              <a:latin typeface="Roboto"/>
-              <a:ea typeface="Roboto"/>
-              <a:cs typeface="Roboto"/>
-              <a:sym typeface="Roboto"/>
-            </a:endParaRPr>
-          </a:p>
-          <a:p>
-            <a:pPr marL="914400" marR="0" lvl="1" indent="-342900" algn="l" rtl="0">
-              <a:lnSpc>
-                <a:spcPct val="100000"/>
-              </a:lnSpc>
-              <a:spcBef>
-                <a:spcPts val="0"/>
-              </a:spcBef>
-              <a:spcAft>
-                <a:spcPts val="0"/>
-              </a:spcAft>
-              <a:buClr>
-                <a:schemeClr val="dk2"/>
-              </a:buClr>
-              <a:buSzPts val="1800"/>
-              <a:buFont typeface="Roboto"/>
-              <a:buChar char="○"/>
-            </a:pPr>
-            <a:r>
-              <a:rPr lang="en" sz="1800" b="0" i="0" u="none" strike="noStrike" cap="none" dirty="0">
-                <a:solidFill>
-                  <a:schemeClr val="lt1"/>
-                </a:solidFill>
-                <a:latin typeface="Roboto"/>
-                <a:ea typeface="Roboto"/>
-                <a:cs typeface="Roboto"/>
-                <a:sym typeface="Roboto"/>
-              </a:rPr>
-              <a:t>Good programs handle errors gracefully</a:t>
-            </a:r>
-            <a:endParaRPr sz="1800" b="0" i="0" u="none" strike="noStrike" cap="none" dirty="0">
-              <a:solidFill>
-                <a:schemeClr val="lt1"/>
-              </a:solidFill>
-              <a:latin typeface="Roboto"/>
-              <a:ea typeface="Roboto"/>
-              <a:cs typeface="Roboto"/>
-              <a:sym typeface="Roboto"/>
-            </a:endParaRPr>
-          </a:p>
-        </p:txBody>
-      </p:sp>
-    </p:spTree>
-  </p:cSld>
-  <p:clrMapOvr>
-    <a:masterClrMapping/>
-  </p:clrMapOvr>
-  <p:timing>
-    <p:tnLst>
-      <p:par>
-        <p:cTn id="1" dur="indefinite" restart="never" nodeType="tmRoot">
-          <p:childTnLst>
-            <p:seq concurrent="1" nextAc="seek">
-              <p:cTn id="2" dur="indefinite" nodeType="mainSeq">
-                <p:childTnLst>
-                  <p:par>
-                    <p:cTn id="3" fill="hold">
-                      <p:stCondLst>
-                        <p:cond delay="indefinite"/>
-                      </p:stCondLst>
-                      <p:childTnLst>
-                        <p:par>
-                          <p:cTn id="4" fill="hold">
-                            <p:stCondLst>
-                              <p:cond delay="0"/>
-                            </p:stCondLst>
-                            <p:childTnLst>
-                              <p:par>
-                                <p:cTn id="5" presetID="1" presetClass="entr" presetSubtype="0" fill="hold" nodeType="clickEffect">
-                                  <p:stCondLst>
-                                    <p:cond delay="0"/>
-                                  </p:stCondLst>
-                                  <p:childTnLst>
-                                    <p:set>
-                                      <p:cBhvr>
-                                        <p:cTn id="6" dur="1" fill="hold">
-                                          <p:stCondLst>
-                                            <p:cond delay="0"/>
-                                          </p:stCondLst>
-                                        </p:cTn>
-                                        <p:tgtEl>
-                                          <p:spTgt spid="472">
-                                            <p:txEl>
-                                              <p:pRg st="0" end="0"/>
-                                            </p:txEl>
-                                          </p:spTgt>
-                                        </p:tgtEl>
-                                        <p:attrNameLst>
-                                          <p:attrName>style.visibility</p:attrName>
-                                        </p:attrNameLst>
-                                      </p:cBhvr>
-                                      <p:to>
-                                        <p:strVal val="visible"/>
-                                      </p:to>
-                                    </p:set>
-                                  </p:childTnLst>
-                                </p:cTn>
-                              </p:par>
-                            </p:childTnLst>
-                          </p:cTn>
-                        </p:par>
-                      </p:childTnLst>
-                    </p:cTn>
-                  </p:par>
-                  <p:par>
-                    <p:cTn id="7" fill="hold">
-                      <p:stCondLst>
-                        <p:cond delay="indefinite"/>
-                      </p:stCondLst>
-                      <p:childTnLst>
-                        <p:par>
-                          <p:cTn id="8" fill="hold">
-                            <p:stCondLst>
-                              <p:cond delay="0"/>
-                            </p:stCondLst>
-                            <p:childTnLst>
-                              <p:par>
-                                <p:cTn id="9" presetID="1" presetClass="entr" presetSubtype="0" fill="hold" nodeType="clickEffect">
-                                  <p:stCondLst>
-                                    <p:cond delay="0"/>
-                                  </p:stCondLst>
-                                  <p:childTnLst>
-                                    <p:set>
-                                      <p:cBhvr>
-                                        <p:cTn id="10" dur="1" fill="hold">
-                                          <p:stCondLst>
-                                            <p:cond delay="0"/>
-                                          </p:stCondLst>
-                                        </p:cTn>
-                                        <p:tgtEl>
-                                          <p:spTgt spid="472">
-                                            <p:txEl>
-                                              <p:pRg st="2" end="2"/>
-                                            </p:txEl>
-                                          </p:spTgt>
-                                        </p:tgtEl>
-                                        <p:attrNameLst>
-                                          <p:attrName>style.visibility</p:attrName>
-                                        </p:attrNameLst>
-                                      </p:cBhvr>
-                                      <p:to>
-                                        <p:strVal val="visible"/>
-                                      </p:to>
-                                    </p:set>
-                                  </p:childTnLst>
-                                </p:cTn>
-                              </p:par>
-                            </p:childTnLst>
-                          </p:cTn>
-                        </p:par>
-                      </p:childTnLst>
-                    </p:cTn>
-                  </p:par>
-                  <p:par>
-                    <p:cTn id="11" fill="hold">
-                      <p:stCondLst>
-                        <p:cond delay="indefinite"/>
-                      </p:stCondLst>
-                      <p:childTnLst>
-                        <p:par>
-                          <p:cTn id="12" fill="hold">
-                            <p:stCondLst>
-                              <p:cond delay="0"/>
-                            </p:stCondLst>
-                            <p:childTnLst>
-                              <p:par>
-                                <p:cTn id="13" presetID="1" presetClass="entr" presetSubtype="0" fill="hold" nodeType="clickEffect">
-                                  <p:stCondLst>
-                                    <p:cond delay="0"/>
-                                  </p:stCondLst>
-                                  <p:childTnLst>
-                                    <p:set>
-                                      <p:cBhvr>
-                                        <p:cTn id="14" dur="1" fill="hold">
-                                          <p:stCondLst>
-                                            <p:cond delay="0"/>
-                                          </p:stCondLst>
-                                        </p:cTn>
-                                        <p:tgtEl>
-                                          <p:spTgt spid="472">
-                                            <p:txEl>
-                                              <p:pRg st="4" end="4"/>
-                                            </p:txEl>
-                                          </p:spTgt>
-                                        </p:tgtEl>
-                                        <p:attrNameLst>
-                                          <p:attrName>style.visibility</p:attrName>
-                                        </p:attrNameLst>
-                                      </p:cBhvr>
-                                      <p:to>
-                                        <p:strVal val="visible"/>
-                                      </p:to>
-                                    </p:set>
-                                  </p:childTnLst>
-                                </p:cTn>
-                              </p:par>
-                            </p:childTnLst>
-                          </p:cTn>
-                        </p:par>
-                      </p:childTnLst>
-                    </p:cTn>
-                  </p:par>
-                  <p:par>
-                    <p:cTn id="15" fill="hold">
-                      <p:stCondLst>
-                        <p:cond delay="indefinite"/>
-                      </p:stCondLst>
-                      <p:childTnLst>
-                        <p:par>
-                          <p:cTn id="16" fill="hold">
-                            <p:stCondLst>
-                              <p:cond delay="0"/>
-                            </p:stCondLst>
-                            <p:childTnLst>
-                              <p:par>
-                                <p:cTn id="17" presetID="1" presetClass="entr" presetSubtype="0" fill="hold" nodeType="clickEffect">
-                                  <p:stCondLst>
-                                    <p:cond delay="0"/>
-                                  </p:stCondLst>
-                                  <p:childTnLst>
-                                    <p:set>
-                                      <p:cBhvr>
-                                        <p:cTn id="18" dur="1" fill="hold">
-                                          <p:stCondLst>
-                                            <p:cond delay="0"/>
-                                          </p:stCondLst>
-                                        </p:cTn>
-                                        <p:tgtEl>
-                                          <p:spTgt spid="472">
-                                            <p:txEl>
-                                              <p:pRg st="5" end="5"/>
-                                            </p:txEl>
-                                          </p:spTgt>
-                                        </p:tgtEl>
-                                        <p:attrNameLst>
-                                          <p:attrName>style.visibility</p:attrName>
-                                        </p:attrNameLst>
-                                      </p:cBhvr>
-                                      <p:to>
-                                        <p:strVal val="visible"/>
-                                      </p:to>
-                                    </p:set>
-                                  </p:childTnLst>
-                                </p:cTn>
-                              </p:par>
-                            </p:childTnLst>
-                          </p:cTn>
-                        </p:par>
-                      </p:childTnLst>
-                    </p:cTn>
-                  </p:par>
-                  <p:par>
-                    <p:cTn id="19" fill="hold">
-                      <p:stCondLst>
-                        <p:cond delay="indefinite"/>
-                      </p:stCondLst>
-                      <p:childTnLst>
-                        <p:par>
-                          <p:cTn id="20" fill="hold">
-                            <p:stCondLst>
-                              <p:cond delay="0"/>
-                            </p:stCondLst>
-                            <p:childTnLst>
-                              <p:par>
-                                <p:cTn id="21" presetID="1" presetClass="entr" presetSubtype="0" fill="hold" nodeType="clickEffect">
-                                  <p:stCondLst>
-                                    <p:cond delay="0"/>
-                                  </p:stCondLst>
-                                  <p:childTnLst>
-                                    <p:set>
-                                      <p:cBhvr>
-                                        <p:cTn id="22" dur="1" fill="hold">
-                                          <p:stCondLst>
-                                            <p:cond delay="0"/>
-                                          </p:stCondLst>
-                                        </p:cTn>
-                                        <p:tgtEl>
-                                          <p:spTgt spid="472">
-                                            <p:txEl>
-                                              <p:pRg st="6" end="6"/>
-                                            </p:txEl>
-                                          </p:spTgt>
-                                        </p:tgtEl>
-                                        <p:attrNameLst>
-                                          <p:attrName>style.visibility</p:attrName>
-                                        </p:attrNameLst>
-                                      </p:cBhvr>
-                                      <p:to>
-                                        <p:strVal val="visible"/>
-                                      </p:to>
-                                    </p:set>
-                                  </p:childTnLst>
-                                </p:cTn>
-                              </p:par>
-                            </p:childTnLst>
-                          </p:cTn>
-                        </p:par>
-                      </p:childTnLst>
-                    </p:cTn>
-                  </p:par>
-                  <p:par>
-                    <p:cTn id="23" fill="hold">
-                      <p:stCondLst>
-                        <p:cond delay="indefinite"/>
-                      </p:stCondLst>
-                      <p:childTnLst>
-                        <p:par>
-                          <p:cTn id="24" fill="hold">
-                            <p:stCondLst>
-                              <p:cond delay="0"/>
-                            </p:stCondLst>
-                            <p:childTnLst>
-                              <p:par>
-                                <p:cTn id="25" presetID="1" presetClass="entr" presetSubtype="0" fill="hold" nodeType="clickEffect">
-                                  <p:stCondLst>
-                                    <p:cond delay="0"/>
-                                  </p:stCondLst>
-                                  <p:childTnLst>
-                                    <p:set>
-                                      <p:cBhvr>
-                                        <p:cTn id="26" dur="1" fill="hold">
-                                          <p:stCondLst>
-                                            <p:cond delay="0"/>
-                                          </p:stCondLst>
-                                        </p:cTn>
-                                        <p:tgtEl>
-                                          <p:spTgt spid="472">
-                                            <p:txEl>
-                                              <p:pRg st="7" end="7"/>
-                                            </p:txEl>
-                                          </p:spTgt>
-                                        </p:tgtEl>
-                                        <p:attrNameLst>
-                                          <p:attrName>style.visibility</p:attrName>
-                                        </p:attrNameLst>
-                                      </p:cBhvr>
-                                      <p:to>
-                                        <p:strVal val="visible"/>
-                                      </p:to>
-                                    </p:set>
-                                  </p:childTnLst>
-                                </p:cTn>
-                              </p:par>
-                            </p:childTnLst>
-                          </p:cTn>
-                        </p:par>
-                      </p:childTnLst>
-                    </p:cTn>
-                  </p:par>
-                </p:childTnLst>
-              </p:cTn>
-              <p:prevCondLst>
-                <p:cond evt="onPrev" delay="0">
-                  <p:tgtEl>
-                    <p:sldTgt/>
-                  </p:tgtEl>
-                </p:cond>
-              </p:prevCondLst>
-              <p:nextCondLst>
-                <p:cond evt="onNext" delay="0">
-                  <p:tgtEl>
-                    <p:sldTgt/>
-                  </p:tgtEl>
-                </p:cond>
-              </p:nextCondLst>
-            </p:seq>
-          </p:childTnLst>
-        </p:cTn>
-      </p:par>
-    </p:tnLst>
-  </p:timing>
-</p:sld>
-</file>
-
-<file path=ppt/slides/slide8.xml><?xml version="1.0" encoding="utf-8"?>
-<p:sld xmlns:a="http://schemas.openxmlformats.org/drawingml/2006/main" xmlns:r="http://schemas.openxmlformats.org/officeDocument/2006/relationships" xmlns:p="http://schemas.openxmlformats.org/presentationml/2006/main" show="0">
-  <p:cSld>
-    <p:spTree>
-      <p:nvGrpSpPr>
-        <p:cNvPr id="1" name="Shape 476"/>
-        <p:cNvGrpSpPr/>
-        <p:nvPr/>
-      </p:nvGrpSpPr>
-      <p:grpSpPr>
-        <a:xfrm>
-          <a:off x="0" y="0"/>
-          <a:ext cx="0" cy="0"/>
-          <a:chOff x="0" y="0"/>
-          <a:chExt cx="0" cy="0"/>
-        </a:xfrm>
-      </p:grpSpPr>
-      <p:sp>
-        <p:nvSpPr>
-          <p:cNvPr id="477" name="Google Shape;477;p56"/>
-          <p:cNvSpPr txBox="1">
-            <a:spLocks noGrp="1"/>
-          </p:cNvSpPr>
-          <p:nvPr>
-            <p:ph type="title"/>
-          </p:nvPr>
-        </p:nvSpPr>
-        <p:spPr>
-          <a:xfrm>
-            <a:off x="411480" y="308611"/>
-            <a:ext cx="6173470" cy="891778"/>
-          </a:xfrm>
-          <a:noFill/>
-          <a:ln>
-            <a:noFill/>
-          </a:ln>
-        </p:spPr>
-        <p:txBody>
-          <a:bodyPr spcFirstLastPara="1" wrap="square" lIns="91425" tIns="91425" rIns="91425" bIns="91425" anchor="t" anchorCtr="0">
-            <a:normAutofit/>
-          </a:bodyPr>
-          <a:lstStyle/>
-          <a:p>
-            <a:pPr lvl="0"/>
-            <a:r>
-              <a:rPr lang="en-US"/>
-              <a:t>EXERCISE - PYTHON ERRORS</a:t>
-            </a:r>
-          </a:p>
-        </p:txBody>
-      </p:sp>
-      <p:sp>
-        <p:nvSpPr>
-          <p:cNvPr id="478" name="Google Shape;478;p56"/>
-          <p:cNvSpPr txBox="1">
-            <a:spLocks noGrp="1"/>
-          </p:cNvSpPr>
-          <p:nvPr>
-            <p:ph type="body" idx="1"/>
-          </p:nvPr>
-        </p:nvSpPr>
-        <p:spPr>
-          <a:xfrm>
-            <a:off x="411480" y="1611630"/>
-            <a:ext cx="5096351" cy="3017520"/>
-          </a:xfrm>
-          <a:noFill/>
-          <a:ln>
-            <a:noFill/>
-          </a:ln>
-        </p:spPr>
-        <p:txBody>
-          <a:bodyPr spcFirstLastPara="1" wrap="square" lIns="91425" tIns="91425" rIns="91425" bIns="91425" anchor="t" anchorCtr="0">
-            <a:normAutofit fontScale="77500" lnSpcReduction="20000"/>
-          </a:bodyPr>
-          <a:lstStyle/>
-          <a:p>
-            <a:pPr lvl="0"/>
-            <a:r>
-              <a:rPr lang="en-US"/>
-              <a:t>5 minutes</a:t>
-            </a:r>
-          </a:p>
-          <a:p>
-            <a:pPr lvl="0"/>
-            <a:endParaRPr lang="en-US"/>
-          </a:p>
-          <a:p>
-            <a:pPr lvl="0"/>
-            <a:r>
-              <a:rPr lang="en-US"/>
-              <a:t>Groups of 2-3</a:t>
-            </a:r>
-          </a:p>
-          <a:p>
-            <a:pPr lvl="0"/>
-            <a:r>
-              <a:rPr lang="en-US"/>
-              <a:t>Research each python error and demonstrate an example case of when this error will be raised</a:t>
-            </a:r>
-          </a:p>
-          <a:p>
-            <a:pPr lvl="0"/>
-            <a:r>
-              <a:rPr lang="en-US"/>
-              <a:t>SyntaxError</a:t>
-            </a:r>
-          </a:p>
-          <a:p>
-            <a:pPr lvl="0"/>
-            <a:r>
-              <a:rPr lang="en-US"/>
-              <a:t>IndentationError</a:t>
-            </a:r>
-          </a:p>
-          <a:p>
-            <a:pPr lvl="0"/>
-            <a:r>
-              <a:rPr lang="en-US"/>
-              <a:t>TypeError </a:t>
-            </a:r>
-          </a:p>
-          <a:p>
-            <a:pPr lvl="0"/>
-            <a:r>
-              <a:rPr lang="en-US"/>
-              <a:t>ValueError</a:t>
-            </a:r>
-          </a:p>
-          <a:p>
-            <a:pPr lvl="0"/>
-            <a:r>
-              <a:rPr lang="en-US"/>
-              <a:t>ZeroDivisionError</a:t>
-            </a:r>
-          </a:p>
-          <a:p>
-            <a:pPr lvl="0"/>
-            <a:r>
-              <a:rPr lang="en-US"/>
-              <a:t>IndexError</a:t>
-            </a:r>
-          </a:p>
-          <a:p>
-            <a:pPr lvl="0"/>
-            <a:r>
-              <a:rPr lang="en-US"/>
-              <a:t>KeyError</a:t>
-            </a:r>
-          </a:p>
-          <a:p>
-            <a:pPr lvl="0"/>
-            <a:r>
-              <a:rPr lang="en-US"/>
-              <a:t>AttributeError</a:t>
-            </a:r>
-          </a:p>
-          <a:p>
-            <a:pPr lvl="0"/>
-            <a:r>
-              <a:rPr lang="en-US"/>
-              <a:t>FileNotFoundError</a:t>
-            </a:r>
-          </a:p>
-          <a:p>
-            <a:pPr lvl="0"/>
-            <a:r>
-              <a:rPr lang="en-US"/>
-              <a:t>ImportError</a:t>
-            </a:r>
-          </a:p>
-        </p:txBody>
-      </p:sp>
-    </p:spTree>
-  </p:cSld>
-  <p:clrMapOvr>
-    <a:masterClrMapping/>
-  </p:clrMapOvr>
-</p:sld>
-</file>
-
-<file path=ppt/slides/slide9.xml><?xml version="1.0" encoding="utf-8"?>
 <p:sld xmlns:a="http://schemas.openxmlformats.org/drawingml/2006/main" xmlns:r="http://schemas.openxmlformats.org/officeDocument/2006/relationships" xmlns:p="http://schemas.openxmlformats.org/presentationml/2006/main">
   <p:cSld>
     <p:spTree>
@@ -51078,6 +47596,3808 @@
 </p:sld>
 </file>
 
+<file path=ppt/slides/slide11.xml><?xml version="1.0" encoding="utf-8"?>
+<p:sld xmlns:a="http://schemas.openxmlformats.org/drawingml/2006/main" xmlns:r="http://schemas.openxmlformats.org/officeDocument/2006/relationships" xmlns:p="http://schemas.openxmlformats.org/presentationml/2006/main">
+  <p:cSld>
+    <p:spTree>
+      <p:nvGrpSpPr>
+        <p:cNvPr id="1" name="Shape 487"/>
+        <p:cNvGrpSpPr/>
+        <p:nvPr/>
+      </p:nvGrpSpPr>
+      <p:grpSpPr>
+        <a:xfrm>
+          <a:off x="0" y="0"/>
+          <a:ext cx="0" cy="0"/>
+          <a:chOff x="0" y="0"/>
+          <a:chExt cx="0" cy="0"/>
+        </a:xfrm>
+      </p:grpSpPr>
+      <p:sp>
+        <p:nvSpPr>
+          <p:cNvPr id="488" name="Google Shape;488;p58"/>
+          <p:cNvSpPr txBox="1">
+            <a:spLocks noGrp="1"/>
+          </p:cNvSpPr>
+          <p:nvPr>
+            <p:ph type="title"/>
+          </p:nvPr>
+        </p:nvSpPr>
+        <p:spPr>
+          <a:xfrm>
+            <a:off x="411480" y="308611"/>
+            <a:ext cx="6173470" cy="891778"/>
+          </a:xfrm>
+          <a:noFill/>
+          <a:ln>
+            <a:noFill/>
+          </a:ln>
+        </p:spPr>
+        <p:txBody>
+          <a:bodyPr spcFirstLastPara="1" wrap="square" lIns="91425" tIns="91425" rIns="91425" bIns="91425" anchor="t" anchorCtr="0">
+            <a:normAutofit/>
+          </a:bodyPr>
+          <a:lstStyle/>
+          <a:p>
+            <a:pPr lvl="0"/>
+            <a:r>
+              <a:rPr lang="en-US"/>
+              <a:t>ERROR HANDLING</a:t>
+            </a:r>
+          </a:p>
+        </p:txBody>
+      </p:sp>
+      <p:sp>
+        <p:nvSpPr>
+          <p:cNvPr id="489" name="Google Shape;489;p58"/>
+          <p:cNvSpPr txBox="1"/>
+          <p:nvPr/>
+        </p:nvSpPr>
+        <p:spPr>
+          <a:xfrm>
+            <a:off x="606210" y="1570610"/>
+            <a:ext cx="7647000" cy="3241500"/>
+          </a:xfrm>
+          <a:prstGeom prst="rect">
+            <a:avLst/>
+          </a:prstGeom>
+          <a:noFill/>
+          <a:ln>
+            <a:noFill/>
+          </a:ln>
+        </p:spPr>
+        <p:txBody>
+          <a:bodyPr spcFirstLastPara="1" wrap="square" lIns="91425" tIns="91425" rIns="91425" bIns="91425" anchor="t" anchorCtr="0">
+            <a:noAutofit/>
+          </a:bodyPr>
+          <a:lstStyle/>
+          <a:p>
+            <a:pPr marL="457200" marR="0" lvl="0" indent="-342900" algn="l" rtl="0">
+              <a:lnSpc>
+                <a:spcPct val="100000"/>
+              </a:lnSpc>
+              <a:spcBef>
+                <a:spcPts val="0"/>
+              </a:spcBef>
+              <a:spcAft>
+                <a:spcPts val="0"/>
+              </a:spcAft>
+              <a:buClr>
+                <a:srgbClr val="FFFFFF"/>
+              </a:buClr>
+              <a:buSzPts val="1800"/>
+              <a:buFont typeface="Arial"/>
+              <a:buChar char="•"/>
+            </a:pPr>
+            <a:r>
+              <a:rPr lang="en" sz="1800" b="0" i="0" u="none" strike="noStrike" cap="none">
+                <a:solidFill>
+                  <a:schemeClr val="lt1"/>
+                </a:solidFill>
+                <a:latin typeface="Roboto"/>
+                <a:ea typeface="Roboto"/>
+                <a:cs typeface="Roboto"/>
+                <a:sym typeface="Roboto"/>
+              </a:rPr>
+              <a:t>Why Handle Errors?</a:t>
+            </a:r>
+            <a:endParaRPr sz="1800" b="0" i="0" u="none" strike="noStrike" cap="none">
+              <a:solidFill>
+                <a:schemeClr val="lt1"/>
+              </a:solidFill>
+              <a:latin typeface="Roboto"/>
+              <a:ea typeface="Roboto"/>
+              <a:cs typeface="Roboto"/>
+              <a:sym typeface="Roboto"/>
+            </a:endParaRPr>
+          </a:p>
+          <a:p>
+            <a:pPr marL="914400" marR="0" lvl="1" indent="-342900" algn="l" rtl="0">
+              <a:lnSpc>
+                <a:spcPct val="100000"/>
+              </a:lnSpc>
+              <a:spcBef>
+                <a:spcPts val="0"/>
+              </a:spcBef>
+              <a:spcAft>
+                <a:spcPts val="0"/>
+              </a:spcAft>
+              <a:buClr>
+                <a:srgbClr val="FFFFFF"/>
+              </a:buClr>
+              <a:buSzPts val="1800"/>
+              <a:buFont typeface="Arial"/>
+              <a:buChar char="•"/>
+            </a:pPr>
+            <a:r>
+              <a:rPr lang="en" sz="1800" b="0" i="0" u="none" strike="noStrike" cap="none">
+                <a:solidFill>
+                  <a:schemeClr val="lt1"/>
+                </a:solidFill>
+                <a:latin typeface="Roboto"/>
+                <a:ea typeface="Roboto"/>
+                <a:cs typeface="Roboto"/>
+                <a:sym typeface="Roboto"/>
+              </a:rPr>
+              <a:t>Prevent your program from crashing</a:t>
+            </a:r>
+            <a:endParaRPr sz="1800" b="0" i="0" u="none" strike="noStrike" cap="none">
+              <a:solidFill>
+                <a:schemeClr val="lt1"/>
+              </a:solidFill>
+              <a:latin typeface="Roboto"/>
+              <a:ea typeface="Roboto"/>
+              <a:cs typeface="Roboto"/>
+              <a:sym typeface="Roboto"/>
+            </a:endParaRPr>
+          </a:p>
+          <a:p>
+            <a:pPr marL="914400" marR="0" lvl="1" indent="-342900" algn="l" rtl="0">
+              <a:lnSpc>
+                <a:spcPct val="100000"/>
+              </a:lnSpc>
+              <a:spcBef>
+                <a:spcPts val="0"/>
+              </a:spcBef>
+              <a:spcAft>
+                <a:spcPts val="0"/>
+              </a:spcAft>
+              <a:buClr>
+                <a:srgbClr val="FFFFFF"/>
+              </a:buClr>
+              <a:buSzPts val="1800"/>
+              <a:buFont typeface="Arial"/>
+              <a:buChar char="•"/>
+            </a:pPr>
+            <a:r>
+              <a:rPr lang="en" sz="1800" b="0" i="0" u="none" strike="noStrike" cap="none">
+                <a:solidFill>
+                  <a:schemeClr val="lt1"/>
+                </a:solidFill>
+                <a:latin typeface="Roboto"/>
+                <a:ea typeface="Roboto"/>
+                <a:cs typeface="Roboto"/>
+                <a:sym typeface="Roboto"/>
+              </a:rPr>
+              <a:t>Provide helpful messages to users</a:t>
+            </a:r>
+            <a:endParaRPr sz="1800" b="0" i="0" u="none" strike="noStrike" cap="none">
+              <a:solidFill>
+                <a:schemeClr val="lt1"/>
+              </a:solidFill>
+              <a:latin typeface="Roboto"/>
+              <a:ea typeface="Roboto"/>
+              <a:cs typeface="Roboto"/>
+              <a:sym typeface="Roboto"/>
+            </a:endParaRPr>
+          </a:p>
+          <a:p>
+            <a:pPr marL="914400" marR="0" lvl="1" indent="-342900" algn="l" rtl="0">
+              <a:lnSpc>
+                <a:spcPct val="100000"/>
+              </a:lnSpc>
+              <a:spcBef>
+                <a:spcPts val="0"/>
+              </a:spcBef>
+              <a:spcAft>
+                <a:spcPts val="0"/>
+              </a:spcAft>
+              <a:buClr>
+                <a:srgbClr val="FFFFFF"/>
+              </a:buClr>
+              <a:buSzPts val="1800"/>
+              <a:buFont typeface="Arial"/>
+              <a:buChar char="•"/>
+            </a:pPr>
+            <a:r>
+              <a:rPr lang="en" sz="1800" b="0" i="0" u="none" strike="noStrike" cap="none">
+                <a:solidFill>
+                  <a:schemeClr val="lt1"/>
+                </a:solidFill>
+                <a:latin typeface="Roboto"/>
+                <a:ea typeface="Roboto"/>
+                <a:cs typeface="Roboto"/>
+                <a:sym typeface="Roboto"/>
+              </a:rPr>
+              <a:t>Let your code recover from unexpected situations</a:t>
+            </a:r>
+            <a:endParaRPr sz="1800" b="0" i="0" u="none" strike="noStrike" cap="none">
+              <a:solidFill>
+                <a:schemeClr val="lt1"/>
+              </a:solidFill>
+              <a:latin typeface="Roboto"/>
+              <a:ea typeface="Roboto"/>
+              <a:cs typeface="Roboto"/>
+              <a:sym typeface="Roboto"/>
+            </a:endParaRPr>
+          </a:p>
+        </p:txBody>
+      </p:sp>
+    </p:spTree>
+  </p:cSld>
+  <p:clrMapOvr>
+    <a:masterClrMapping/>
+  </p:clrMapOvr>
+</p:sld>
+</file>
+
+<file path=ppt/slides/slide12.xml><?xml version="1.0" encoding="utf-8"?>
+<p:sld xmlns:a="http://schemas.openxmlformats.org/drawingml/2006/main" xmlns:r="http://schemas.openxmlformats.org/officeDocument/2006/relationships" xmlns:p="http://schemas.openxmlformats.org/presentationml/2006/main">
+  <p:cSld>
+    <p:spTree>
+      <p:nvGrpSpPr>
+        <p:cNvPr id="1" name="Shape 493"/>
+        <p:cNvGrpSpPr/>
+        <p:nvPr/>
+      </p:nvGrpSpPr>
+      <p:grpSpPr>
+        <a:xfrm>
+          <a:off x="0" y="0"/>
+          <a:ext cx="0" cy="0"/>
+          <a:chOff x="0" y="0"/>
+          <a:chExt cx="0" cy="0"/>
+        </a:xfrm>
+      </p:grpSpPr>
+      <p:sp>
+        <p:nvSpPr>
+          <p:cNvPr id="494" name="Google Shape;494;p59"/>
+          <p:cNvSpPr txBox="1">
+            <a:spLocks noGrp="1"/>
+          </p:cNvSpPr>
+          <p:nvPr>
+            <p:ph type="title"/>
+          </p:nvPr>
+        </p:nvSpPr>
+        <p:spPr>
+          <a:xfrm>
+            <a:off x="411480" y="308611"/>
+            <a:ext cx="6173470" cy="891778"/>
+          </a:xfrm>
+          <a:noFill/>
+          <a:ln>
+            <a:noFill/>
+          </a:ln>
+        </p:spPr>
+        <p:txBody>
+          <a:bodyPr spcFirstLastPara="1" wrap="square" lIns="91425" tIns="91425" rIns="91425" bIns="91425" anchor="t" anchorCtr="0">
+            <a:normAutofit/>
+          </a:bodyPr>
+          <a:lstStyle/>
+          <a:p>
+            <a:pPr lvl="0"/>
+            <a:r>
+              <a:rPr lang="en-US"/>
+              <a:t>TRY - EXCEPT</a:t>
+            </a:r>
+          </a:p>
+        </p:txBody>
+      </p:sp>
+      <p:sp>
+        <p:nvSpPr>
+          <p:cNvPr id="495" name="Google Shape;495;p59"/>
+          <p:cNvSpPr txBox="1">
+            <a:spLocks noGrp="1"/>
+          </p:cNvSpPr>
+          <p:nvPr>
+            <p:ph type="body" idx="1"/>
+          </p:nvPr>
+        </p:nvSpPr>
+        <p:spPr>
+          <a:xfrm>
+            <a:off x="411480" y="1062990"/>
+            <a:ext cx="7572793" cy="3017520"/>
+          </a:xfrm>
+          <a:noFill/>
+          <a:ln>
+            <a:noFill/>
+          </a:ln>
+        </p:spPr>
+        <p:txBody>
+          <a:bodyPr spcFirstLastPara="1" wrap="square" lIns="91425" tIns="91425" rIns="91425" bIns="91425" anchor="t" anchorCtr="0">
+            <a:normAutofit/>
+          </a:bodyPr>
+          <a:lstStyle/>
+          <a:p>
+            <a:pPr lvl="0"/>
+            <a:r>
+              <a:rPr lang="en-US" dirty="0">
+                <a:solidFill>
+                  <a:schemeClr val="bg1"/>
+                </a:solidFill>
+              </a:rPr>
+              <a:t>Tries a block a code and if an error is raised, can handle that error gracefully</a:t>
+            </a:r>
+          </a:p>
+          <a:p>
+            <a:pPr lvl="0"/>
+            <a:endParaRPr lang="en-US" dirty="0"/>
+          </a:p>
+        </p:txBody>
+      </p:sp>
+      <p:sp>
+        <p:nvSpPr>
+          <p:cNvPr id="3" name="TextBox 2">
+            <a:extLst>
+              <a:ext uri="{FF2B5EF4-FFF2-40B4-BE49-F238E27FC236}">
+                <a16:creationId xmlns:a16="http://schemas.microsoft.com/office/drawing/2014/main" id="{FBB90202-0B70-8588-4936-1142769ECA11}"/>
+              </a:ext>
+            </a:extLst>
+          </p:cNvPr>
+          <p:cNvSpPr txBox="1"/>
+          <p:nvPr/>
+        </p:nvSpPr>
+        <p:spPr>
+          <a:xfrm>
+            <a:off x="553841" y="2099097"/>
+            <a:ext cx="5356303" cy="1631216"/>
+          </a:xfrm>
+          <a:prstGeom prst="rect">
+            <a:avLst/>
+          </a:prstGeom>
+          <a:noFill/>
+        </p:spPr>
+        <p:txBody>
+          <a:bodyPr wrap="square">
+            <a:spAutoFit/>
+          </a:bodyPr>
+          <a:lstStyle/>
+          <a:p>
+            <a:pPr lvl="0"/>
+            <a:r>
+              <a:rPr lang="en-US" sz="2000" dirty="0">
+                <a:solidFill>
+                  <a:schemeClr val="bg1"/>
+                </a:solidFill>
+                <a:sym typeface="Consolas"/>
+              </a:rPr>
+              <a:t>try:</a:t>
+            </a:r>
+          </a:p>
+          <a:p>
+            <a:pPr lvl="0"/>
+            <a:r>
+              <a:rPr lang="en-US" sz="2000" dirty="0">
+                <a:solidFill>
+                  <a:schemeClr val="bg1"/>
+                </a:solidFill>
+                <a:sym typeface="Consolas"/>
+              </a:rPr>
+              <a:t>     # code that might cause an error</a:t>
+            </a:r>
+          </a:p>
+          <a:p>
+            <a:pPr lvl="0"/>
+            <a:r>
+              <a:rPr lang="en-US" sz="2000" dirty="0">
+                <a:solidFill>
+                  <a:schemeClr val="bg1"/>
+                </a:solidFill>
+                <a:sym typeface="Consolas"/>
+              </a:rPr>
+              <a:t>     number = int("</a:t>
+            </a:r>
+            <a:r>
+              <a:rPr lang="en-US" sz="2000" dirty="0" err="1">
+                <a:solidFill>
+                  <a:schemeClr val="bg1"/>
+                </a:solidFill>
+                <a:sym typeface="Consolas"/>
+              </a:rPr>
+              <a:t>abc</a:t>
+            </a:r>
+            <a:r>
+              <a:rPr lang="en-US" sz="2000" dirty="0">
+                <a:solidFill>
+                  <a:schemeClr val="bg1"/>
+                </a:solidFill>
+                <a:sym typeface="Consolas"/>
+              </a:rPr>
+              <a:t>")</a:t>
+            </a:r>
+            <a:endParaRPr lang="en-US" sz="2000" dirty="0">
+              <a:solidFill>
+                <a:schemeClr val="bg1"/>
+              </a:solidFill>
+            </a:endParaRPr>
+          </a:p>
+          <a:p>
+            <a:pPr lvl="0"/>
+            <a:r>
+              <a:rPr lang="en-US" sz="2000" dirty="0">
+                <a:solidFill>
+                  <a:schemeClr val="bg1"/>
+                </a:solidFill>
+                <a:sym typeface="Consolas"/>
+              </a:rPr>
+              <a:t>except </a:t>
+            </a:r>
+            <a:r>
+              <a:rPr lang="en-US" sz="2000" dirty="0" err="1">
+                <a:solidFill>
+                  <a:schemeClr val="bg1"/>
+                </a:solidFill>
+                <a:sym typeface="Consolas"/>
+              </a:rPr>
+              <a:t>ValueError</a:t>
+            </a:r>
+            <a:r>
+              <a:rPr lang="en-US" sz="2000" dirty="0">
+                <a:solidFill>
+                  <a:schemeClr val="bg1"/>
+                </a:solidFill>
+                <a:sym typeface="Consolas"/>
+              </a:rPr>
+              <a:t>:</a:t>
+            </a:r>
+          </a:p>
+          <a:p>
+            <a:pPr lvl="0"/>
+            <a:r>
+              <a:rPr lang="en-US" sz="2000" dirty="0">
+                <a:solidFill>
+                  <a:schemeClr val="bg1"/>
+                </a:solidFill>
+                <a:sym typeface="Consolas"/>
+              </a:rPr>
+              <a:t>     print("Oops! That wasn't a number.")</a:t>
+            </a:r>
+          </a:p>
+        </p:txBody>
+      </p:sp>
+    </p:spTree>
+  </p:cSld>
+  <p:clrMapOvr>
+    <a:masterClrMapping/>
+  </p:clrMapOvr>
+</p:sld>
+</file>
+
+<file path=ppt/slides/slide13.xml><?xml version="1.0" encoding="utf-8"?>
+<p:sld xmlns:a="http://schemas.openxmlformats.org/drawingml/2006/main" xmlns:r="http://schemas.openxmlformats.org/officeDocument/2006/relationships" xmlns:p="http://schemas.openxmlformats.org/presentationml/2006/main">
+  <p:cSld>
+    <p:spTree>
+      <p:nvGrpSpPr>
+        <p:cNvPr id="1" name="Shape 499"/>
+        <p:cNvGrpSpPr/>
+        <p:nvPr/>
+      </p:nvGrpSpPr>
+      <p:grpSpPr>
+        <a:xfrm>
+          <a:off x="0" y="0"/>
+          <a:ext cx="0" cy="0"/>
+          <a:chOff x="0" y="0"/>
+          <a:chExt cx="0" cy="0"/>
+        </a:xfrm>
+      </p:grpSpPr>
+      <p:sp>
+        <p:nvSpPr>
+          <p:cNvPr id="500" name="Google Shape;500;p60"/>
+          <p:cNvSpPr txBox="1">
+            <a:spLocks noGrp="1"/>
+          </p:cNvSpPr>
+          <p:nvPr>
+            <p:ph type="title"/>
+          </p:nvPr>
+        </p:nvSpPr>
+        <p:spPr>
+          <a:xfrm>
+            <a:off x="411480" y="308611"/>
+            <a:ext cx="6173470" cy="891778"/>
+          </a:xfrm>
+          <a:noFill/>
+          <a:ln>
+            <a:noFill/>
+          </a:ln>
+        </p:spPr>
+        <p:txBody>
+          <a:bodyPr spcFirstLastPara="1" wrap="square" lIns="91425" tIns="91425" rIns="91425" bIns="91425" anchor="t" anchorCtr="0">
+            <a:normAutofit/>
+          </a:bodyPr>
+          <a:lstStyle/>
+          <a:p>
+            <a:pPr lvl="0"/>
+            <a:r>
+              <a:rPr lang="en-US"/>
+              <a:t>TRY - EXCEPT CONTINUED</a:t>
+            </a:r>
+          </a:p>
+        </p:txBody>
+      </p:sp>
+      <p:sp>
+        <p:nvSpPr>
+          <p:cNvPr id="501" name="Google Shape;501;p60"/>
+          <p:cNvSpPr txBox="1">
+            <a:spLocks noGrp="1"/>
+          </p:cNvSpPr>
+          <p:nvPr>
+            <p:ph type="body" idx="1"/>
+          </p:nvPr>
+        </p:nvSpPr>
+        <p:spPr>
+          <a:xfrm>
+            <a:off x="352007" y="914400"/>
+            <a:ext cx="5929847" cy="1457093"/>
+          </a:xfrm>
+          <a:noFill/>
+          <a:ln>
+            <a:noFill/>
+          </a:ln>
+        </p:spPr>
+        <p:txBody>
+          <a:bodyPr spcFirstLastPara="1" wrap="square" lIns="91425" tIns="91425" rIns="91425" bIns="91425" anchor="t" anchorCtr="0">
+            <a:normAutofit/>
+          </a:bodyPr>
+          <a:lstStyle/>
+          <a:p>
+            <a:pPr lvl="0"/>
+            <a:r>
+              <a:rPr lang="en-US" sz="2600" dirty="0">
+                <a:solidFill>
+                  <a:schemeClr val="bg1"/>
+                </a:solidFill>
+              </a:rPr>
+              <a:t>Multiple except statements</a:t>
+            </a:r>
+            <a:endParaRPr lang="en-US" sz="2100" dirty="0">
+              <a:solidFill>
+                <a:schemeClr val="bg1"/>
+              </a:solidFill>
+            </a:endParaRPr>
+          </a:p>
+          <a:p>
+            <a:pPr marL="604838" lvl="1" indent="0">
+              <a:buNone/>
+            </a:pPr>
+            <a:endParaRPr lang="en-US" dirty="0">
+              <a:solidFill>
+                <a:schemeClr val="bg1"/>
+              </a:solidFill>
+            </a:endParaRPr>
+          </a:p>
+          <a:p>
+            <a:pPr lvl="0"/>
+            <a:endParaRPr lang="en-US" dirty="0">
+              <a:sym typeface="Consolas"/>
+            </a:endParaRPr>
+          </a:p>
+          <a:p>
+            <a:pPr lvl="0"/>
+            <a:endParaRPr lang="en-US" dirty="0"/>
+          </a:p>
+          <a:p>
+            <a:pPr lvl="0"/>
+            <a:endParaRPr lang="en-US" dirty="0"/>
+          </a:p>
+        </p:txBody>
+      </p:sp>
+      <p:sp>
+        <p:nvSpPr>
+          <p:cNvPr id="3" name="TextBox 2">
+            <a:extLst>
+              <a:ext uri="{FF2B5EF4-FFF2-40B4-BE49-F238E27FC236}">
+                <a16:creationId xmlns:a16="http://schemas.microsoft.com/office/drawing/2014/main" id="{70A03235-D35B-4026-1609-55A4708471CD}"/>
+              </a:ext>
+            </a:extLst>
+          </p:cNvPr>
+          <p:cNvSpPr txBox="1"/>
+          <p:nvPr/>
+        </p:nvSpPr>
+        <p:spPr>
+          <a:xfrm>
+            <a:off x="702524" y="1642946"/>
+            <a:ext cx="5690841" cy="2554545"/>
+          </a:xfrm>
+          <a:prstGeom prst="rect">
+            <a:avLst/>
+          </a:prstGeom>
+          <a:noFill/>
+        </p:spPr>
+        <p:txBody>
+          <a:bodyPr wrap="square">
+            <a:spAutoFit/>
+          </a:bodyPr>
+          <a:lstStyle/>
+          <a:p>
+            <a:pPr lvl="0"/>
+            <a:r>
+              <a:rPr lang="en-US" sz="2000" dirty="0">
+                <a:solidFill>
+                  <a:schemeClr val="bg1"/>
+                </a:solidFill>
+                <a:sym typeface="Consolas"/>
+              </a:rPr>
+              <a:t>try:</a:t>
+            </a:r>
+          </a:p>
+          <a:p>
+            <a:pPr lvl="0"/>
+            <a:r>
+              <a:rPr lang="en-US" sz="2000" dirty="0">
+                <a:solidFill>
+                  <a:schemeClr val="bg1"/>
+                </a:solidFill>
+                <a:sym typeface="Consolas"/>
+              </a:rPr>
+              <a:t>    result = 10 / 2</a:t>
+            </a:r>
+          </a:p>
+          <a:p>
+            <a:pPr lvl="0"/>
+            <a:r>
+              <a:rPr lang="en-US" sz="2000" dirty="0">
+                <a:solidFill>
+                  <a:schemeClr val="bg1"/>
+                </a:solidFill>
+                <a:sym typeface="Consolas"/>
+              </a:rPr>
+              <a:t>except ZeroDivisionError:</a:t>
+            </a:r>
+          </a:p>
+          <a:p>
+            <a:pPr lvl="0"/>
+            <a:r>
+              <a:rPr lang="en-US" sz="2000" dirty="0">
+                <a:solidFill>
+                  <a:schemeClr val="bg1"/>
+                </a:solidFill>
+                <a:sym typeface="Consolas"/>
+              </a:rPr>
+              <a:t>    print("Cannot divide by zero.")</a:t>
+            </a:r>
+          </a:p>
+          <a:p>
+            <a:pPr lvl="0"/>
+            <a:r>
+              <a:rPr lang="en-US" sz="2000" dirty="0">
+                <a:solidFill>
+                  <a:schemeClr val="bg1"/>
+                </a:solidFill>
+                <a:sym typeface="Consolas"/>
+              </a:rPr>
+              <a:t>except </a:t>
+            </a:r>
+            <a:r>
+              <a:rPr lang="en-US" sz="2000" dirty="0" err="1">
+                <a:solidFill>
+                  <a:schemeClr val="bg1"/>
+                </a:solidFill>
+                <a:sym typeface="Consolas"/>
+              </a:rPr>
+              <a:t>ValueError</a:t>
+            </a:r>
+            <a:r>
+              <a:rPr lang="en-US" sz="2000" dirty="0">
+                <a:solidFill>
+                  <a:schemeClr val="bg1"/>
+                </a:solidFill>
+                <a:sym typeface="Consolas"/>
+              </a:rPr>
+              <a:t>:</a:t>
+            </a:r>
+          </a:p>
+          <a:p>
+            <a:pPr lvl="0"/>
+            <a:r>
+              <a:rPr lang="en-US" sz="2000" dirty="0">
+                <a:solidFill>
+                  <a:schemeClr val="bg1"/>
+                </a:solidFill>
+                <a:sym typeface="Consolas"/>
+              </a:rPr>
+              <a:t>    print(“Incorrect conversion”)</a:t>
+            </a:r>
+          </a:p>
+          <a:p>
+            <a:pPr lvl="0"/>
+            <a:r>
+              <a:rPr lang="en-US" sz="2000" dirty="0">
+                <a:solidFill>
+                  <a:schemeClr val="bg1"/>
+                </a:solidFill>
+                <a:sym typeface="Consolas"/>
+              </a:rPr>
+              <a:t>except:</a:t>
+            </a:r>
+          </a:p>
+          <a:p>
+            <a:pPr lvl="0"/>
+            <a:r>
+              <a:rPr lang="en-US" sz="2000" dirty="0">
+                <a:solidFill>
+                  <a:schemeClr val="bg1"/>
+                </a:solidFill>
+                <a:sym typeface="Consolas"/>
+              </a:rPr>
+              <a:t>    print(“You are seeing this message in error!”)</a:t>
+            </a:r>
+          </a:p>
+        </p:txBody>
+      </p:sp>
+    </p:spTree>
+  </p:cSld>
+  <p:clrMapOvr>
+    <a:masterClrMapping/>
+  </p:clrMapOvr>
+  <p:timing>
+    <p:tnLst>
+      <p:par>
+        <p:cTn id="1" dur="indefinite" restart="never" nodeType="tmRoot">
+          <p:childTnLst>
+            <p:seq concurrent="1" nextAc="seek">
+              <p:cTn id="2" dur="indefinite" nodeType="mainSeq">
+                <p:childTnLst>
+                  <p:par>
+                    <p:cTn id="3" fill="hold">
+                      <p:stCondLst>
+                        <p:cond delay="indefinite"/>
+                      </p:stCondLst>
+                      <p:childTnLst>
+                        <p:par>
+                          <p:cTn id="4" fill="hold">
+                            <p:stCondLst>
+                              <p:cond delay="0"/>
+                            </p:stCondLst>
+                            <p:childTnLst>
+                              <p:par>
+                                <p:cTn id="5" presetID="1" presetClass="entr" presetSubtype="0" fill="hold" grpId="0" nodeType="clickEffect">
+                                  <p:stCondLst>
+                                    <p:cond delay="0"/>
+                                  </p:stCondLst>
+                                  <p:childTnLst>
+                                    <p:set>
+                                      <p:cBhvr>
+                                        <p:cTn id="6" dur="1" fill="hold">
+                                          <p:stCondLst>
+                                            <p:cond delay="0"/>
+                                          </p:stCondLst>
+                                        </p:cTn>
+                                        <p:tgtEl>
+                                          <p:spTgt spid="3"/>
+                                        </p:tgtEl>
+                                        <p:attrNameLst>
+                                          <p:attrName>style.visibility</p:attrName>
+                                        </p:attrNameLst>
+                                      </p:cBhvr>
+                                      <p:to>
+                                        <p:strVal val="visible"/>
+                                      </p:to>
+                                    </p:set>
+                                  </p:childTnLst>
+                                </p:cTn>
+                              </p:par>
+                            </p:childTnLst>
+                          </p:cTn>
+                        </p:par>
+                      </p:childTnLst>
+                    </p:cTn>
+                  </p:par>
+                </p:childTnLst>
+              </p:cTn>
+              <p:prevCondLst>
+                <p:cond evt="onPrev" delay="0">
+                  <p:tgtEl>
+                    <p:sldTgt/>
+                  </p:tgtEl>
+                </p:cond>
+              </p:prevCondLst>
+              <p:nextCondLst>
+                <p:cond evt="onNext" delay="0">
+                  <p:tgtEl>
+                    <p:sldTgt/>
+                  </p:tgtEl>
+                </p:cond>
+              </p:nextCondLst>
+            </p:seq>
+          </p:childTnLst>
+        </p:cTn>
+      </p:par>
+    </p:tnLst>
+    <p:bldLst>
+      <p:bldP spid="3" grpId="0"/>
+    </p:bldLst>
+  </p:timing>
+</p:sld>
+</file>
+
+<file path=ppt/slides/slide14.xml><?xml version="1.0" encoding="utf-8"?>
+<p:sld xmlns:a="http://schemas.openxmlformats.org/drawingml/2006/main" xmlns:r="http://schemas.openxmlformats.org/officeDocument/2006/relationships" xmlns:p="http://schemas.openxmlformats.org/presentationml/2006/main">
+  <p:cSld>
+    <p:spTree>
+      <p:nvGrpSpPr>
+        <p:cNvPr id="1" name="Shape 499">
+          <a:extLst>
+            <a:ext uri="{FF2B5EF4-FFF2-40B4-BE49-F238E27FC236}">
+              <a16:creationId xmlns:a16="http://schemas.microsoft.com/office/drawing/2014/main" id="{EEBC8AFD-5F6C-C21C-EC80-EC2EE62AEAA0}"/>
+            </a:ext>
+          </a:extLst>
+        </p:cNvPr>
+        <p:cNvGrpSpPr/>
+        <p:nvPr/>
+      </p:nvGrpSpPr>
+      <p:grpSpPr>
+        <a:xfrm>
+          <a:off x="0" y="0"/>
+          <a:ext cx="0" cy="0"/>
+          <a:chOff x="0" y="0"/>
+          <a:chExt cx="0" cy="0"/>
+        </a:xfrm>
+      </p:grpSpPr>
+      <p:sp>
+        <p:nvSpPr>
+          <p:cNvPr id="500" name="Google Shape;500;p60">
+            <a:extLst>
+              <a:ext uri="{FF2B5EF4-FFF2-40B4-BE49-F238E27FC236}">
+                <a16:creationId xmlns:a16="http://schemas.microsoft.com/office/drawing/2014/main" id="{F1D83413-65FF-EA44-5CA2-D03B294AE4B2}"/>
+              </a:ext>
+            </a:extLst>
+          </p:cNvPr>
+          <p:cNvSpPr txBox="1">
+            <a:spLocks noGrp="1"/>
+          </p:cNvSpPr>
+          <p:nvPr>
+            <p:ph type="title"/>
+          </p:nvPr>
+        </p:nvSpPr>
+        <p:spPr>
+          <a:xfrm>
+            <a:off x="411480" y="308611"/>
+            <a:ext cx="6173470" cy="891778"/>
+          </a:xfrm>
+          <a:noFill/>
+          <a:ln>
+            <a:noFill/>
+          </a:ln>
+        </p:spPr>
+        <p:txBody>
+          <a:bodyPr spcFirstLastPara="1" wrap="square" lIns="91425" tIns="91425" rIns="91425" bIns="91425" anchor="t" anchorCtr="0">
+            <a:normAutofit/>
+          </a:bodyPr>
+          <a:lstStyle/>
+          <a:p>
+            <a:pPr lvl="0"/>
+            <a:r>
+              <a:rPr lang="en-US"/>
+              <a:t>TRY - EXCEPT CONTINUED</a:t>
+            </a:r>
+          </a:p>
+        </p:txBody>
+      </p:sp>
+      <p:sp>
+        <p:nvSpPr>
+          <p:cNvPr id="501" name="Google Shape;501;p60">
+            <a:extLst>
+              <a:ext uri="{FF2B5EF4-FFF2-40B4-BE49-F238E27FC236}">
+                <a16:creationId xmlns:a16="http://schemas.microsoft.com/office/drawing/2014/main" id="{559571E5-1152-2BFE-0A02-FA002AFE9AAB}"/>
+              </a:ext>
+            </a:extLst>
+          </p:cNvPr>
+          <p:cNvSpPr txBox="1">
+            <a:spLocks noGrp="1"/>
+          </p:cNvSpPr>
+          <p:nvPr>
+            <p:ph type="body" idx="1"/>
+          </p:nvPr>
+        </p:nvSpPr>
+        <p:spPr>
+          <a:xfrm>
+            <a:off x="352007" y="914400"/>
+            <a:ext cx="5929847" cy="1457093"/>
+          </a:xfrm>
+          <a:noFill/>
+          <a:ln>
+            <a:noFill/>
+          </a:ln>
+        </p:spPr>
+        <p:txBody>
+          <a:bodyPr spcFirstLastPara="1" wrap="square" lIns="91425" tIns="91425" rIns="91425" bIns="91425" anchor="t" anchorCtr="0">
+            <a:normAutofit/>
+          </a:bodyPr>
+          <a:lstStyle/>
+          <a:p>
+            <a:pPr lvl="0"/>
+            <a:r>
+              <a:rPr lang="en-US" sz="2600" dirty="0">
+                <a:solidFill>
+                  <a:schemeClr val="bg1"/>
+                </a:solidFill>
+              </a:rPr>
+              <a:t>Optional</a:t>
+            </a:r>
+          </a:p>
+          <a:p>
+            <a:pPr lvl="1"/>
+            <a:r>
+              <a:rPr lang="en-US" sz="2100" dirty="0">
+                <a:solidFill>
+                  <a:schemeClr val="bg1"/>
+                </a:solidFill>
+                <a:sym typeface="Consolas"/>
+              </a:rPr>
+              <a:t>else</a:t>
+            </a:r>
+            <a:r>
+              <a:rPr lang="en-US" sz="2100" dirty="0">
+                <a:solidFill>
+                  <a:schemeClr val="bg1"/>
+                </a:solidFill>
+              </a:rPr>
+              <a:t>: Runs if no error occurs</a:t>
+            </a:r>
+          </a:p>
+          <a:p>
+            <a:pPr lvl="1"/>
+            <a:r>
+              <a:rPr lang="en-US" sz="2100" dirty="0">
+                <a:solidFill>
+                  <a:schemeClr val="bg1"/>
+                </a:solidFill>
+                <a:sym typeface="Consolas"/>
+              </a:rPr>
+              <a:t>finally</a:t>
+            </a:r>
+            <a:r>
+              <a:rPr lang="en-US" sz="2100" dirty="0">
+                <a:solidFill>
+                  <a:schemeClr val="bg1"/>
+                </a:solidFill>
+              </a:rPr>
+              <a:t>: always runs</a:t>
+            </a:r>
+          </a:p>
+          <a:p>
+            <a:pPr marL="604838" lvl="1" indent="0">
+              <a:buNone/>
+            </a:pPr>
+            <a:endParaRPr lang="en-US" dirty="0">
+              <a:solidFill>
+                <a:schemeClr val="bg1"/>
+              </a:solidFill>
+            </a:endParaRPr>
+          </a:p>
+          <a:p>
+            <a:pPr lvl="0"/>
+            <a:endParaRPr lang="en-US" dirty="0">
+              <a:sym typeface="Consolas"/>
+            </a:endParaRPr>
+          </a:p>
+          <a:p>
+            <a:pPr lvl="0"/>
+            <a:endParaRPr lang="en-US" dirty="0"/>
+          </a:p>
+          <a:p>
+            <a:pPr lvl="0"/>
+            <a:endParaRPr lang="en-US" dirty="0"/>
+          </a:p>
+        </p:txBody>
+      </p:sp>
+      <p:sp>
+        <p:nvSpPr>
+          <p:cNvPr id="3" name="TextBox 2">
+            <a:extLst>
+              <a:ext uri="{FF2B5EF4-FFF2-40B4-BE49-F238E27FC236}">
+                <a16:creationId xmlns:a16="http://schemas.microsoft.com/office/drawing/2014/main" id="{CD35D585-17CB-A1A3-D712-7F458F86A4FC}"/>
+              </a:ext>
+            </a:extLst>
+          </p:cNvPr>
+          <p:cNvSpPr txBox="1"/>
+          <p:nvPr/>
+        </p:nvSpPr>
+        <p:spPr>
+          <a:xfrm>
+            <a:off x="687657" y="2371493"/>
+            <a:ext cx="4572000" cy="2554545"/>
+          </a:xfrm>
+          <a:prstGeom prst="rect">
+            <a:avLst/>
+          </a:prstGeom>
+          <a:noFill/>
+        </p:spPr>
+        <p:txBody>
+          <a:bodyPr wrap="square">
+            <a:spAutoFit/>
+          </a:bodyPr>
+          <a:lstStyle/>
+          <a:p>
+            <a:pPr lvl="0"/>
+            <a:r>
+              <a:rPr lang="en-US" sz="2000" dirty="0">
+                <a:solidFill>
+                  <a:schemeClr val="bg1"/>
+                </a:solidFill>
+                <a:sym typeface="Consolas"/>
+              </a:rPr>
+              <a:t>try:</a:t>
+            </a:r>
+          </a:p>
+          <a:p>
+            <a:pPr lvl="0"/>
+            <a:r>
+              <a:rPr lang="en-US" sz="2000" dirty="0">
+                <a:solidFill>
+                  <a:schemeClr val="bg1"/>
+                </a:solidFill>
+                <a:sym typeface="Consolas"/>
+              </a:rPr>
+              <a:t>    result = 10 / 2</a:t>
+            </a:r>
+          </a:p>
+          <a:p>
+            <a:pPr lvl="0"/>
+            <a:r>
+              <a:rPr lang="en-US" sz="2000" dirty="0">
+                <a:solidFill>
+                  <a:schemeClr val="bg1"/>
+                </a:solidFill>
+                <a:sym typeface="Consolas"/>
+              </a:rPr>
+              <a:t>except ZeroDivisionError:</a:t>
+            </a:r>
+          </a:p>
+          <a:p>
+            <a:pPr lvl="0"/>
+            <a:r>
+              <a:rPr lang="en-US" sz="2000" dirty="0">
+                <a:solidFill>
+                  <a:schemeClr val="bg1"/>
+                </a:solidFill>
+                <a:sym typeface="Consolas"/>
+              </a:rPr>
+              <a:t>    print("Cannot divide by zero.")</a:t>
+            </a:r>
+          </a:p>
+          <a:p>
+            <a:pPr lvl="0"/>
+            <a:r>
+              <a:rPr lang="en-US" sz="2000" dirty="0">
+                <a:solidFill>
+                  <a:schemeClr val="bg1"/>
+                </a:solidFill>
+                <a:sym typeface="Consolas"/>
+              </a:rPr>
+              <a:t>else:</a:t>
+            </a:r>
+          </a:p>
+          <a:p>
+            <a:pPr lvl="0"/>
+            <a:r>
+              <a:rPr lang="en-US" sz="2000" dirty="0">
+                <a:solidFill>
+                  <a:schemeClr val="bg1"/>
+                </a:solidFill>
+                <a:sym typeface="Consolas"/>
+              </a:rPr>
+              <a:t>    print("Division successful.")</a:t>
+            </a:r>
+          </a:p>
+          <a:p>
+            <a:pPr lvl="0"/>
+            <a:r>
+              <a:rPr lang="en-US" sz="2000" dirty="0">
+                <a:solidFill>
+                  <a:schemeClr val="bg1"/>
+                </a:solidFill>
+                <a:sym typeface="Consolas"/>
+              </a:rPr>
+              <a:t>finally:</a:t>
+            </a:r>
+          </a:p>
+          <a:p>
+            <a:pPr lvl="0"/>
+            <a:r>
+              <a:rPr lang="en-US" sz="2000" dirty="0">
+                <a:solidFill>
+                  <a:schemeClr val="bg1"/>
+                </a:solidFill>
+                <a:sym typeface="Consolas"/>
+              </a:rPr>
+              <a:t>    print("Done.")</a:t>
+            </a:r>
+          </a:p>
+        </p:txBody>
+      </p:sp>
+    </p:spTree>
+    <p:extLst>
+      <p:ext uri="{BB962C8B-B14F-4D97-AF65-F5344CB8AC3E}">
+        <p14:creationId xmlns:p14="http://schemas.microsoft.com/office/powerpoint/2010/main" val="2410237747"/>
+      </p:ext>
+    </p:extLst>
+  </p:cSld>
+  <p:clrMapOvr>
+    <a:masterClrMapping/>
+  </p:clrMapOvr>
+  <p:timing>
+    <p:tnLst>
+      <p:par>
+        <p:cTn id="1" dur="indefinite" restart="never" nodeType="tmRoot">
+          <p:childTnLst>
+            <p:seq concurrent="1" nextAc="seek">
+              <p:cTn id="2" dur="indefinite" nodeType="mainSeq">
+                <p:childTnLst>
+                  <p:par>
+                    <p:cTn id="3" fill="hold">
+                      <p:stCondLst>
+                        <p:cond delay="indefinite"/>
+                      </p:stCondLst>
+                      <p:childTnLst>
+                        <p:par>
+                          <p:cTn id="4" fill="hold">
+                            <p:stCondLst>
+                              <p:cond delay="0"/>
+                            </p:stCondLst>
+                            <p:childTnLst>
+                              <p:par>
+                                <p:cTn id="5" presetID="1" presetClass="entr" presetSubtype="0" fill="hold" grpId="0" nodeType="clickEffect">
+                                  <p:stCondLst>
+                                    <p:cond delay="0"/>
+                                  </p:stCondLst>
+                                  <p:childTnLst>
+                                    <p:set>
+                                      <p:cBhvr>
+                                        <p:cTn id="6" dur="1" fill="hold">
+                                          <p:stCondLst>
+                                            <p:cond delay="0"/>
+                                          </p:stCondLst>
+                                        </p:cTn>
+                                        <p:tgtEl>
+                                          <p:spTgt spid="3"/>
+                                        </p:tgtEl>
+                                        <p:attrNameLst>
+                                          <p:attrName>style.visibility</p:attrName>
+                                        </p:attrNameLst>
+                                      </p:cBhvr>
+                                      <p:to>
+                                        <p:strVal val="visible"/>
+                                      </p:to>
+                                    </p:set>
+                                  </p:childTnLst>
+                                </p:cTn>
+                              </p:par>
+                            </p:childTnLst>
+                          </p:cTn>
+                        </p:par>
+                      </p:childTnLst>
+                    </p:cTn>
+                  </p:par>
+                </p:childTnLst>
+              </p:cTn>
+              <p:prevCondLst>
+                <p:cond evt="onPrev" delay="0">
+                  <p:tgtEl>
+                    <p:sldTgt/>
+                  </p:tgtEl>
+                </p:cond>
+              </p:prevCondLst>
+              <p:nextCondLst>
+                <p:cond evt="onNext" delay="0">
+                  <p:tgtEl>
+                    <p:sldTgt/>
+                  </p:tgtEl>
+                </p:cond>
+              </p:nextCondLst>
+            </p:seq>
+          </p:childTnLst>
+        </p:cTn>
+      </p:par>
+    </p:tnLst>
+    <p:bldLst>
+      <p:bldP spid="3" grpId="0"/>
+    </p:bldLst>
+  </p:timing>
+</p:sld>
+</file>
+
+<file path=ppt/slides/slide15.xml><?xml version="1.0" encoding="utf-8"?>
+<p:sld xmlns:a="http://schemas.openxmlformats.org/drawingml/2006/main" xmlns:r="http://schemas.openxmlformats.org/officeDocument/2006/relationships" xmlns:p="http://schemas.openxmlformats.org/presentationml/2006/main">
+  <p:cSld>
+    <p:spTree>
+      <p:nvGrpSpPr>
+        <p:cNvPr id="1" name="Shape 505"/>
+        <p:cNvGrpSpPr/>
+        <p:nvPr/>
+      </p:nvGrpSpPr>
+      <p:grpSpPr>
+        <a:xfrm>
+          <a:off x="0" y="0"/>
+          <a:ext cx="0" cy="0"/>
+          <a:chOff x="0" y="0"/>
+          <a:chExt cx="0" cy="0"/>
+        </a:xfrm>
+      </p:grpSpPr>
+      <p:sp>
+        <p:nvSpPr>
+          <p:cNvPr id="506" name="Google Shape;506;p61"/>
+          <p:cNvSpPr txBox="1">
+            <a:spLocks noGrp="1"/>
+          </p:cNvSpPr>
+          <p:nvPr>
+            <p:ph type="title"/>
+          </p:nvPr>
+        </p:nvSpPr>
+        <p:spPr>
+          <a:xfrm>
+            <a:off x="411480" y="308611"/>
+            <a:ext cx="6173470" cy="891778"/>
+          </a:xfrm>
+          <a:noFill/>
+          <a:ln>
+            <a:noFill/>
+          </a:ln>
+        </p:spPr>
+        <p:txBody>
+          <a:bodyPr spcFirstLastPara="1" wrap="square" lIns="91425" tIns="91425" rIns="91425" bIns="91425" anchor="t" anchorCtr="0">
+            <a:normAutofit/>
+          </a:bodyPr>
+          <a:lstStyle/>
+          <a:p>
+            <a:pPr lvl="0"/>
+            <a:r>
+              <a:rPr lang="en-US"/>
+              <a:t>RAISE</a:t>
+            </a:r>
+          </a:p>
+        </p:txBody>
+      </p:sp>
+      <p:sp>
+        <p:nvSpPr>
+          <p:cNvPr id="507" name="Google Shape;507;p61"/>
+          <p:cNvSpPr txBox="1">
+            <a:spLocks noGrp="1"/>
+          </p:cNvSpPr>
+          <p:nvPr>
+            <p:ph type="body" idx="1"/>
+          </p:nvPr>
+        </p:nvSpPr>
+        <p:spPr>
+          <a:xfrm>
+            <a:off x="240495" y="860782"/>
+            <a:ext cx="8516930" cy="3017520"/>
+          </a:xfrm>
+          <a:noFill/>
+          <a:ln>
+            <a:noFill/>
+          </a:ln>
+        </p:spPr>
+        <p:txBody>
+          <a:bodyPr spcFirstLastPara="1" wrap="square" lIns="91425" tIns="91425" rIns="91425" bIns="91425" anchor="t" anchorCtr="0">
+            <a:normAutofit/>
+          </a:bodyPr>
+          <a:lstStyle/>
+          <a:p>
+            <a:pPr lvl="0"/>
+            <a:r>
+              <a:rPr lang="en-US" dirty="0">
+                <a:solidFill>
+                  <a:schemeClr val="bg1"/>
+                </a:solidFill>
+              </a:rPr>
+              <a:t>“raise” is used to intentionally trigger an error</a:t>
+            </a:r>
+          </a:p>
+          <a:p>
+            <a:pPr lvl="0"/>
+            <a:r>
+              <a:rPr lang="en-US" dirty="0">
+                <a:solidFill>
+                  <a:schemeClr val="bg1"/>
+                </a:solidFill>
+              </a:rPr>
+              <a:t>Helps enforce rules and catch problems early</a:t>
+            </a:r>
+          </a:p>
+          <a:p>
+            <a:pPr lvl="0"/>
+            <a:r>
+              <a:rPr lang="en-US" dirty="0">
+                <a:solidFill>
+                  <a:schemeClr val="bg1"/>
+                </a:solidFill>
+              </a:rPr>
+              <a:t>Make your code more predictable and safe</a:t>
+            </a:r>
+          </a:p>
+          <a:p>
+            <a:pPr lvl="0"/>
+            <a:r>
+              <a:rPr lang="en-US" dirty="0">
+                <a:solidFill>
+                  <a:schemeClr val="bg1"/>
+                </a:solidFill>
+              </a:rPr>
+              <a:t>Useful for custom error messages or defining your own exceptions</a:t>
+            </a:r>
+          </a:p>
+          <a:p>
+            <a:pPr lvl="0"/>
+            <a:endParaRPr lang="en-US" dirty="0"/>
+          </a:p>
+          <a:p>
+            <a:pPr lvl="0"/>
+            <a:endParaRPr lang="en-US" dirty="0"/>
+          </a:p>
+          <a:p>
+            <a:pPr lvl="0"/>
+            <a:endParaRPr lang="en-US" dirty="0"/>
+          </a:p>
+        </p:txBody>
+      </p:sp>
+      <p:sp>
+        <p:nvSpPr>
+          <p:cNvPr id="3" name="TextBox 2">
+            <a:extLst>
+              <a:ext uri="{FF2B5EF4-FFF2-40B4-BE49-F238E27FC236}">
+                <a16:creationId xmlns:a16="http://schemas.microsoft.com/office/drawing/2014/main" id="{5B996DBA-7DE9-0229-30AC-41536D9BD04E}"/>
+              </a:ext>
+            </a:extLst>
+          </p:cNvPr>
+          <p:cNvSpPr txBox="1"/>
+          <p:nvPr/>
+        </p:nvSpPr>
+        <p:spPr>
+          <a:xfrm>
+            <a:off x="539982" y="2278104"/>
+            <a:ext cx="8064036" cy="2462213"/>
+          </a:xfrm>
+          <a:prstGeom prst="rect">
+            <a:avLst/>
+          </a:prstGeom>
+          <a:noFill/>
+        </p:spPr>
+        <p:txBody>
+          <a:bodyPr wrap="square">
+            <a:spAutoFit/>
+          </a:bodyPr>
+          <a:lstStyle/>
+          <a:p>
+            <a:pPr lvl="0"/>
+            <a:endParaRPr lang="en-US" dirty="0">
+              <a:solidFill>
+                <a:schemeClr val="bg1"/>
+              </a:solidFill>
+              <a:sym typeface="Consolas"/>
+            </a:endParaRPr>
+          </a:p>
+          <a:p>
+            <a:pPr lvl="0"/>
+            <a:r>
+              <a:rPr lang="en-US" dirty="0">
+                <a:solidFill>
+                  <a:schemeClr val="bg1"/>
+                </a:solidFill>
+                <a:sym typeface="Consolas"/>
+              </a:rPr>
+              <a:t>if age &lt; 0:</a:t>
+            </a:r>
+          </a:p>
+          <a:p>
+            <a:pPr lvl="0"/>
+            <a:r>
+              <a:rPr lang="en-US" dirty="0">
+                <a:solidFill>
+                  <a:schemeClr val="bg1"/>
+                </a:solidFill>
+                <a:sym typeface="Consolas"/>
+              </a:rPr>
+              <a:t>raise </a:t>
+            </a:r>
+            <a:r>
+              <a:rPr lang="en-US" dirty="0" err="1">
+                <a:solidFill>
+                  <a:schemeClr val="bg1"/>
+                </a:solidFill>
+                <a:sym typeface="Consolas"/>
+              </a:rPr>
+              <a:t>ValueError</a:t>
+            </a:r>
+            <a:r>
+              <a:rPr lang="en-US" dirty="0">
+                <a:solidFill>
+                  <a:schemeClr val="bg1"/>
+                </a:solidFill>
+                <a:sym typeface="Consolas"/>
+              </a:rPr>
+              <a:t>("Age cannot be negative.")</a:t>
+            </a:r>
+          </a:p>
+          <a:p>
+            <a:pPr lvl="0"/>
+            <a:endParaRPr lang="en-US" dirty="0">
+              <a:solidFill>
+                <a:schemeClr val="bg1"/>
+              </a:solidFill>
+              <a:sym typeface="Consolas"/>
+            </a:endParaRPr>
+          </a:p>
+          <a:p>
+            <a:pPr lvl="0"/>
+            <a:r>
+              <a:rPr lang="en-US" dirty="0">
+                <a:solidFill>
+                  <a:schemeClr val="bg1"/>
+                </a:solidFill>
+              </a:rPr>
+              <a:t>Built-in Exceptions</a:t>
+            </a:r>
+          </a:p>
+          <a:p>
+            <a:pPr lvl="0"/>
+            <a:r>
+              <a:rPr lang="en-US" dirty="0">
+                <a:solidFill>
+                  <a:schemeClr val="bg1"/>
+                </a:solidFill>
+                <a:sym typeface="Consolas"/>
+              </a:rPr>
+              <a:t>raise </a:t>
+            </a:r>
+            <a:r>
+              <a:rPr lang="en-US" dirty="0" err="1">
+                <a:solidFill>
+                  <a:schemeClr val="bg1"/>
+                </a:solidFill>
+                <a:sym typeface="Consolas"/>
+              </a:rPr>
+              <a:t>TypeError</a:t>
+            </a:r>
+            <a:r>
+              <a:rPr lang="en-US" dirty="0">
+                <a:solidFill>
+                  <a:schemeClr val="bg1"/>
+                </a:solidFill>
+                <a:sym typeface="Consolas"/>
+              </a:rPr>
+              <a:t>("This function only accepts strings.")</a:t>
+            </a:r>
+          </a:p>
+          <a:p>
+            <a:pPr lvl="0"/>
+            <a:r>
+              <a:rPr lang="en-US" dirty="0">
+                <a:solidFill>
+                  <a:schemeClr val="bg1"/>
+                </a:solidFill>
+                <a:sym typeface="Consolas"/>
+              </a:rPr>
+              <a:t>raise ZeroDivisionError("Cannot divide by zero.")</a:t>
+            </a:r>
+          </a:p>
+          <a:p>
+            <a:pPr lvl="0"/>
+            <a:endParaRPr lang="en-US" dirty="0">
+              <a:solidFill>
+                <a:schemeClr val="bg1"/>
+              </a:solidFill>
+              <a:sym typeface="Consolas"/>
+            </a:endParaRPr>
+          </a:p>
+          <a:p>
+            <a:pPr lvl="0"/>
+            <a:endParaRPr lang="en-US" dirty="0">
+              <a:solidFill>
+                <a:schemeClr val="bg1"/>
+              </a:solidFill>
+            </a:endParaRPr>
+          </a:p>
+          <a:p>
+            <a:pPr lvl="0"/>
+            <a:r>
+              <a:rPr lang="en-US" dirty="0">
+                <a:solidFill>
+                  <a:schemeClr val="bg1"/>
+                </a:solidFill>
+              </a:rPr>
+              <a:t>Raised errors can be caught and handled with try / except</a:t>
+            </a:r>
+          </a:p>
+          <a:p>
+            <a:pPr lvl="0"/>
+            <a:r>
+              <a:rPr lang="en-US" dirty="0">
+                <a:solidFill>
+                  <a:schemeClr val="bg1"/>
+                </a:solidFill>
+              </a:rPr>
+              <a:t>If not caught, they will be passed to the output and stop the program</a:t>
+            </a:r>
+          </a:p>
+        </p:txBody>
+      </p:sp>
+    </p:spTree>
+  </p:cSld>
+  <p:clrMapOvr>
+    <a:masterClrMapping/>
+  </p:clrMapOvr>
+  <p:timing>
+    <p:tnLst>
+      <p:par>
+        <p:cTn id="1" dur="indefinite" restart="never" nodeType="tmRoot">
+          <p:childTnLst>
+            <p:seq concurrent="1" nextAc="seek">
+              <p:cTn id="2" dur="indefinite" nodeType="mainSeq">
+                <p:childTnLst>
+                  <p:par>
+                    <p:cTn id="3" fill="hold">
+                      <p:stCondLst>
+                        <p:cond delay="indefinite"/>
+                      </p:stCondLst>
+                      <p:childTnLst>
+                        <p:par>
+                          <p:cTn id="4" fill="hold">
+                            <p:stCondLst>
+                              <p:cond delay="0"/>
+                            </p:stCondLst>
+                            <p:childTnLst>
+                              <p:par>
+                                <p:cTn id="5" presetID="1" presetClass="entr" presetSubtype="0" fill="hold" grpId="0" nodeType="clickEffect">
+                                  <p:stCondLst>
+                                    <p:cond delay="0"/>
+                                  </p:stCondLst>
+                                  <p:childTnLst>
+                                    <p:set>
+                                      <p:cBhvr>
+                                        <p:cTn id="6" dur="1" fill="hold">
+                                          <p:stCondLst>
+                                            <p:cond delay="0"/>
+                                          </p:stCondLst>
+                                        </p:cTn>
+                                        <p:tgtEl>
+                                          <p:spTgt spid="3"/>
+                                        </p:tgtEl>
+                                        <p:attrNameLst>
+                                          <p:attrName>style.visibility</p:attrName>
+                                        </p:attrNameLst>
+                                      </p:cBhvr>
+                                      <p:to>
+                                        <p:strVal val="visible"/>
+                                      </p:to>
+                                    </p:set>
+                                  </p:childTnLst>
+                                </p:cTn>
+                              </p:par>
+                            </p:childTnLst>
+                          </p:cTn>
+                        </p:par>
+                      </p:childTnLst>
+                    </p:cTn>
+                  </p:par>
+                </p:childTnLst>
+              </p:cTn>
+              <p:prevCondLst>
+                <p:cond evt="onPrev" delay="0">
+                  <p:tgtEl>
+                    <p:sldTgt/>
+                  </p:tgtEl>
+                </p:cond>
+              </p:prevCondLst>
+              <p:nextCondLst>
+                <p:cond evt="onNext" delay="0">
+                  <p:tgtEl>
+                    <p:sldTgt/>
+                  </p:tgtEl>
+                </p:cond>
+              </p:nextCondLst>
+            </p:seq>
+          </p:childTnLst>
+        </p:cTn>
+      </p:par>
+    </p:tnLst>
+    <p:bldLst>
+      <p:bldP spid="3" grpId="0"/>
+    </p:bldLst>
+  </p:timing>
+</p:sld>
+</file>
+
+<file path=ppt/slides/slide16.xml><?xml version="1.0" encoding="utf-8"?>
+<p:sld xmlns:a="http://schemas.openxmlformats.org/drawingml/2006/main" xmlns:r="http://schemas.openxmlformats.org/officeDocument/2006/relationships" xmlns:p="http://schemas.openxmlformats.org/presentationml/2006/main">
+  <p:cSld>
+    <p:spTree>
+      <p:nvGrpSpPr>
+        <p:cNvPr id="1" name="Shape 511"/>
+        <p:cNvGrpSpPr/>
+        <p:nvPr/>
+      </p:nvGrpSpPr>
+      <p:grpSpPr>
+        <a:xfrm>
+          <a:off x="0" y="0"/>
+          <a:ext cx="0" cy="0"/>
+          <a:chOff x="0" y="0"/>
+          <a:chExt cx="0" cy="0"/>
+        </a:xfrm>
+      </p:grpSpPr>
+      <p:sp>
+        <p:nvSpPr>
+          <p:cNvPr id="512" name="Google Shape;512;p62"/>
+          <p:cNvSpPr txBox="1">
+            <a:spLocks noGrp="1"/>
+          </p:cNvSpPr>
+          <p:nvPr>
+            <p:ph type="title"/>
+          </p:nvPr>
+        </p:nvSpPr>
+        <p:spPr>
+          <a:xfrm>
+            <a:off x="411480" y="308611"/>
+            <a:ext cx="6173470" cy="891778"/>
+          </a:xfrm>
+          <a:noFill/>
+          <a:ln>
+            <a:noFill/>
+          </a:ln>
+        </p:spPr>
+        <p:txBody>
+          <a:bodyPr spcFirstLastPara="1" wrap="square" lIns="91425" tIns="91425" rIns="91425" bIns="91425" anchor="t" anchorCtr="0">
+            <a:normAutofit/>
+          </a:bodyPr>
+          <a:lstStyle/>
+          <a:p>
+            <a:pPr lvl="0"/>
+            <a:r>
+              <a:rPr lang="en-US" dirty="0"/>
+              <a:t>Exercise (20 min)</a:t>
+            </a:r>
+          </a:p>
+        </p:txBody>
+      </p:sp>
+      <p:sp>
+        <p:nvSpPr>
+          <p:cNvPr id="513" name="Google Shape;513;p62"/>
+          <p:cNvSpPr txBox="1">
+            <a:spLocks noGrp="1"/>
+          </p:cNvSpPr>
+          <p:nvPr>
+            <p:ph type="body" idx="1"/>
+          </p:nvPr>
+        </p:nvSpPr>
+        <p:spPr>
+          <a:xfrm>
+            <a:off x="411480" y="1611630"/>
+            <a:ext cx="7847857" cy="3017520"/>
+          </a:xfrm>
+          <a:noFill/>
+          <a:ln>
+            <a:noFill/>
+          </a:ln>
+        </p:spPr>
+        <p:txBody>
+          <a:bodyPr spcFirstLastPara="1" wrap="square" lIns="91425" tIns="91425" rIns="91425" bIns="91425" anchor="t" anchorCtr="0">
+            <a:normAutofit fontScale="92500" lnSpcReduction="10000"/>
+          </a:bodyPr>
+          <a:lstStyle/>
+          <a:p>
+            <a:pPr lvl="0"/>
+            <a:r>
+              <a:rPr lang="en-US" dirty="0">
+                <a:solidFill>
+                  <a:schemeClr val="bg1"/>
+                </a:solidFill>
+              </a:rPr>
+              <a:t>Randomly assign a number from 1 to 100.</a:t>
+            </a:r>
+          </a:p>
+          <a:p>
+            <a:pPr lvl="0"/>
+            <a:endParaRPr lang="en-US" dirty="0">
+              <a:solidFill>
+                <a:schemeClr val="bg1"/>
+              </a:solidFill>
+            </a:endParaRPr>
+          </a:p>
+          <a:p>
+            <a:pPr lvl="0"/>
+            <a:r>
+              <a:rPr lang="en-US" dirty="0">
+                <a:solidFill>
+                  <a:schemeClr val="bg1"/>
+                </a:solidFill>
+              </a:rPr>
+              <a:t>Write a block of code that takes in user input until they guess the random number</a:t>
+            </a:r>
+          </a:p>
+          <a:p>
+            <a:pPr lvl="0"/>
+            <a:endParaRPr lang="en-US" dirty="0">
+              <a:solidFill>
+                <a:schemeClr val="bg1"/>
+              </a:solidFill>
+            </a:endParaRPr>
+          </a:p>
+          <a:p>
+            <a:pPr lvl="0"/>
+            <a:r>
+              <a:rPr lang="en-US" dirty="0">
+                <a:solidFill>
+                  <a:schemeClr val="bg1"/>
+                </a:solidFill>
+              </a:rPr>
+              <a:t>Prompt the user to help them with their guess</a:t>
+            </a:r>
+          </a:p>
+          <a:p>
+            <a:pPr lvl="0"/>
+            <a:r>
+              <a:rPr lang="en-US" dirty="0">
+                <a:solidFill>
+                  <a:schemeClr val="bg1"/>
+                </a:solidFill>
+              </a:rPr>
+              <a:t>Handle the following situations:</a:t>
+            </a:r>
+          </a:p>
+          <a:p>
+            <a:pPr lvl="1"/>
+            <a:r>
+              <a:rPr lang="en-US" dirty="0">
+                <a:solidFill>
+                  <a:schemeClr val="bg1"/>
+                </a:solidFill>
+              </a:rPr>
+              <a:t>User does not input the right python data type</a:t>
+            </a:r>
+          </a:p>
+          <a:p>
+            <a:pPr lvl="1"/>
+            <a:r>
+              <a:rPr lang="en-US" dirty="0">
+                <a:solidFill>
+                  <a:schemeClr val="bg1"/>
+                </a:solidFill>
+              </a:rPr>
+              <a:t>User inputs a negative number</a:t>
+            </a:r>
+          </a:p>
+          <a:p>
+            <a:pPr lvl="1"/>
+            <a:r>
+              <a:rPr lang="en-US" dirty="0">
+                <a:solidFill>
+                  <a:schemeClr val="bg1"/>
+                </a:solidFill>
+              </a:rPr>
+              <a:t>User inputs a number outside the guess range</a:t>
+            </a:r>
+          </a:p>
+          <a:p>
+            <a:pPr marL="604838" lvl="1" indent="0">
+              <a:buNone/>
+            </a:pPr>
+            <a:r>
+              <a:rPr lang="en-US" dirty="0">
+                <a:solidFill>
+                  <a:schemeClr val="bg1"/>
+                </a:solidFill>
+              </a:rPr>
+              <a:t>Hint: use </a:t>
+            </a:r>
+            <a:r>
+              <a:rPr lang="en-US" dirty="0" err="1">
+                <a:solidFill>
+                  <a:schemeClr val="bg1"/>
+                </a:solidFill>
+              </a:rPr>
+              <a:t>random.randomint</a:t>
+            </a:r>
+            <a:r>
+              <a:rPr lang="en-US" dirty="0">
+                <a:solidFill>
+                  <a:schemeClr val="bg1"/>
+                </a:solidFill>
+              </a:rPr>
+              <a:t>() to generate a random number</a:t>
+            </a:r>
+          </a:p>
+        </p:txBody>
+      </p:sp>
+    </p:spTree>
+  </p:cSld>
+  <p:clrMapOvr>
+    <a:masterClrMapping/>
+  </p:clrMapOvr>
+</p:sld>
+</file>
+
+<file path=ppt/slides/slide17.xml><?xml version="1.0" encoding="utf-8"?>
+<p:sld xmlns:a="http://schemas.openxmlformats.org/drawingml/2006/main" xmlns:r="http://schemas.openxmlformats.org/officeDocument/2006/relationships" xmlns:p="http://schemas.openxmlformats.org/presentationml/2006/main">
+  <p:cSld>
+    <p:spTree>
+      <p:nvGrpSpPr>
+        <p:cNvPr id="1" name="Shape 517"/>
+        <p:cNvGrpSpPr/>
+        <p:nvPr/>
+      </p:nvGrpSpPr>
+      <p:grpSpPr>
+        <a:xfrm>
+          <a:off x="0" y="0"/>
+          <a:ext cx="0" cy="0"/>
+          <a:chOff x="0" y="0"/>
+          <a:chExt cx="0" cy="0"/>
+        </a:xfrm>
+      </p:grpSpPr>
+      <p:sp>
+        <p:nvSpPr>
+          <p:cNvPr id="518" name="Google Shape;518;p63"/>
+          <p:cNvSpPr txBox="1">
+            <a:spLocks noGrp="1"/>
+          </p:cNvSpPr>
+          <p:nvPr>
+            <p:ph type="title"/>
+          </p:nvPr>
+        </p:nvSpPr>
+        <p:spPr>
+          <a:xfrm>
+            <a:off x="411480" y="308611"/>
+            <a:ext cx="6173470" cy="891778"/>
+          </a:xfrm>
+          <a:noFill/>
+          <a:ln>
+            <a:noFill/>
+          </a:ln>
+        </p:spPr>
+        <p:txBody>
+          <a:bodyPr spcFirstLastPara="1" wrap="square" lIns="91425" tIns="91425" rIns="91425" bIns="91425" anchor="t" anchorCtr="0">
+            <a:normAutofit/>
+          </a:bodyPr>
+          <a:lstStyle/>
+          <a:p>
+            <a:pPr lvl="0"/>
+            <a:r>
+              <a:rPr lang="en-US" dirty="0"/>
+              <a:t>Exercise 3 (20 min)</a:t>
+            </a:r>
+          </a:p>
+        </p:txBody>
+      </p:sp>
+      <p:sp>
+        <p:nvSpPr>
+          <p:cNvPr id="519" name="Google Shape;519;p63"/>
+          <p:cNvSpPr txBox="1">
+            <a:spLocks noGrp="1"/>
+          </p:cNvSpPr>
+          <p:nvPr>
+            <p:ph type="body" idx="1"/>
+          </p:nvPr>
+        </p:nvSpPr>
+        <p:spPr>
+          <a:xfrm>
+            <a:off x="411479" y="1200389"/>
+            <a:ext cx="8390549" cy="3634500"/>
+          </a:xfrm>
+          <a:noFill/>
+          <a:ln>
+            <a:noFill/>
+          </a:ln>
+        </p:spPr>
+        <p:txBody>
+          <a:bodyPr spcFirstLastPara="1" wrap="square" lIns="91425" tIns="91425" rIns="91425" bIns="91425" anchor="t" anchorCtr="0">
+            <a:normAutofit/>
+          </a:bodyPr>
+          <a:lstStyle/>
+          <a:p>
+            <a:pPr lvl="0"/>
+            <a:r>
+              <a:rPr lang="en-US" sz="1400" dirty="0">
+                <a:solidFill>
+                  <a:schemeClr val="bg1"/>
+                </a:solidFill>
+              </a:rPr>
+              <a:t>Given a list of numbers, write a program that:</a:t>
+            </a:r>
+          </a:p>
+          <a:p>
+            <a:pPr lvl="0"/>
+            <a:endParaRPr lang="en-US" sz="1400" dirty="0">
+              <a:solidFill>
+                <a:schemeClr val="bg1"/>
+              </a:solidFill>
+            </a:endParaRPr>
+          </a:p>
+          <a:p>
+            <a:pPr lvl="0"/>
+            <a:r>
+              <a:rPr lang="en-US" sz="1400" dirty="0">
+                <a:solidFill>
+                  <a:schemeClr val="bg1"/>
+                </a:solidFill>
+              </a:rPr>
+              <a:t>Loops through the List: </a:t>
+            </a:r>
+            <a:r>
+              <a:rPr lang="en-US" sz="1400" dirty="0">
+                <a:solidFill>
+                  <a:schemeClr val="bg1"/>
+                </a:solidFill>
+                <a:sym typeface="Consolas"/>
+              </a:rPr>
+              <a:t>[10, -5, 20, ‘hello’, 5.2, 15, None, 30]</a:t>
+            </a:r>
+          </a:p>
+          <a:p>
+            <a:pPr lvl="0"/>
+            <a:endParaRPr lang="en-US" sz="1400" dirty="0">
+              <a:solidFill>
+                <a:schemeClr val="bg1"/>
+              </a:solidFill>
+              <a:sym typeface="Consolas"/>
+            </a:endParaRPr>
+          </a:p>
+          <a:p>
+            <a:pPr lvl="0"/>
+            <a:r>
+              <a:rPr lang="en-US" sz="1400" dirty="0">
+                <a:solidFill>
+                  <a:schemeClr val="bg1"/>
+                </a:solidFill>
+              </a:rPr>
+              <a:t>Skips any None values or non-integer types with an error message using try/except</a:t>
+            </a:r>
+          </a:p>
+          <a:p>
+            <a:pPr lvl="0"/>
+            <a:r>
+              <a:rPr lang="en-US" sz="1400" dirty="0">
+                <a:solidFill>
+                  <a:schemeClr val="bg1"/>
+                </a:solidFill>
+              </a:rPr>
+              <a:t>Raises a </a:t>
+            </a:r>
+            <a:r>
+              <a:rPr lang="en-US" sz="1400" dirty="0" err="1">
+                <a:solidFill>
+                  <a:schemeClr val="bg1"/>
+                </a:solidFill>
+              </a:rPr>
+              <a:t>ValueError</a:t>
+            </a:r>
+            <a:r>
+              <a:rPr lang="en-US" sz="1400" dirty="0">
+                <a:solidFill>
+                  <a:schemeClr val="bg1"/>
+                </a:solidFill>
+              </a:rPr>
+              <a:t> if it finds a negative number (stops the program)</a:t>
+            </a:r>
+          </a:p>
+          <a:p>
+            <a:pPr lvl="0"/>
+            <a:endParaRPr lang="en-US" sz="1400" dirty="0">
+              <a:solidFill>
+                <a:schemeClr val="bg1"/>
+              </a:solidFill>
+            </a:endParaRPr>
+          </a:p>
+          <a:p>
+            <a:pPr lvl="0"/>
+            <a:r>
+              <a:rPr lang="en-US" sz="1400" dirty="0">
+                <a:solidFill>
+                  <a:schemeClr val="bg1"/>
+                </a:solidFill>
+              </a:rPr>
+              <a:t>Collects all valid positive integers into a new list</a:t>
+            </a:r>
+          </a:p>
+          <a:p>
+            <a:pPr lvl="0"/>
+            <a:endParaRPr lang="en-US" sz="1400" dirty="0">
+              <a:solidFill>
+                <a:schemeClr val="bg1"/>
+              </a:solidFill>
+            </a:endParaRPr>
+          </a:p>
+          <a:p>
+            <a:pPr lvl="0"/>
+            <a:r>
+              <a:rPr lang="en-US" sz="1400" dirty="0">
+                <a:solidFill>
+                  <a:schemeClr val="bg1"/>
+                </a:solidFill>
+              </a:rPr>
+              <a:t>Prints the new list and the sum of its numbers</a:t>
+            </a:r>
+          </a:p>
+          <a:p>
+            <a:pPr lvl="0"/>
+            <a:endParaRPr lang="en-US" sz="1400" dirty="0">
+              <a:solidFill>
+                <a:schemeClr val="bg1"/>
+              </a:solidFill>
+            </a:endParaRPr>
+          </a:p>
+          <a:p>
+            <a:pPr lvl="0"/>
+            <a:r>
+              <a:rPr lang="en-US" sz="1400" dirty="0">
+                <a:solidFill>
+                  <a:schemeClr val="bg1"/>
+                </a:solidFill>
+              </a:rPr>
+              <a:t>Once you have a solution, remove -5 from the list and run it again.</a:t>
+            </a:r>
+          </a:p>
+          <a:p>
+            <a:pPr lvl="0"/>
+            <a:endParaRPr lang="en-US" sz="1400" dirty="0">
+              <a:solidFill>
+                <a:schemeClr val="bg1"/>
+              </a:solidFill>
+            </a:endParaRPr>
+          </a:p>
+          <a:p>
+            <a:pPr lvl="0"/>
+            <a:r>
+              <a:rPr lang="en-US" sz="1400" dirty="0">
+                <a:solidFill>
+                  <a:schemeClr val="bg1"/>
+                </a:solidFill>
+              </a:rPr>
+              <a:t>Hints:  </a:t>
+            </a:r>
+          </a:p>
+          <a:p>
+            <a:pPr lvl="0"/>
+            <a:r>
+              <a:rPr lang="en-US" sz="1400" dirty="0">
+                <a:solidFill>
+                  <a:schemeClr val="bg1"/>
+                </a:solidFill>
+              </a:rPr>
+              <a:t>Use </a:t>
+            </a:r>
+            <a:r>
+              <a:rPr lang="en-US" sz="1400" dirty="0" err="1">
+                <a:solidFill>
+                  <a:schemeClr val="bg1"/>
+                </a:solidFill>
+                <a:sym typeface="Consolas"/>
+              </a:rPr>
+              <a:t>isinstance</a:t>
+            </a:r>
+            <a:r>
+              <a:rPr lang="en-US" sz="1400" dirty="0">
+                <a:solidFill>
+                  <a:schemeClr val="bg1"/>
+                </a:solidFill>
+                <a:sym typeface="Consolas"/>
+              </a:rPr>
+              <a:t>(item, int) </a:t>
+            </a:r>
+            <a:r>
+              <a:rPr lang="en-US" sz="1400" dirty="0">
+                <a:solidFill>
+                  <a:schemeClr val="bg1"/>
+                </a:solidFill>
+              </a:rPr>
+              <a:t>to check types</a:t>
+            </a:r>
+          </a:p>
+          <a:p>
+            <a:pPr lvl="0"/>
+            <a:r>
+              <a:rPr lang="en-US" sz="1400" dirty="0">
+                <a:solidFill>
+                  <a:schemeClr val="bg1"/>
+                </a:solidFill>
+              </a:rPr>
+              <a:t>Build the valid list as you go</a:t>
+            </a:r>
+            <a:endParaRPr lang="en-US" sz="1400" dirty="0">
+              <a:solidFill>
+                <a:schemeClr val="bg1"/>
+              </a:solidFill>
+              <a:sym typeface="Consolas"/>
+            </a:endParaRPr>
+          </a:p>
+        </p:txBody>
+      </p:sp>
+    </p:spTree>
+  </p:cSld>
+  <p:clrMapOvr>
+    <a:masterClrMapping/>
+  </p:clrMapOvr>
+</p:sld>
+</file>
+
+<file path=ppt/slides/slide2.xml><?xml version="1.0" encoding="utf-8"?>
+<p:sld xmlns:a="http://schemas.openxmlformats.org/drawingml/2006/main" xmlns:r="http://schemas.openxmlformats.org/officeDocument/2006/relationships" xmlns:p="http://schemas.openxmlformats.org/presentationml/2006/main">
+  <p:cSld>
+    <p:spTree>
+      <p:nvGrpSpPr>
+        <p:cNvPr id="1" name="">
+          <a:extLst>
+            <a:ext uri="{FF2B5EF4-FFF2-40B4-BE49-F238E27FC236}">
+              <a16:creationId xmlns:a16="http://schemas.microsoft.com/office/drawing/2014/main" id="{372D87CF-5E92-D709-ADC1-CD5AB2C3F775}"/>
+            </a:ext>
+          </a:extLst>
+        </p:cNvPr>
+        <p:cNvGrpSpPr/>
+        <p:nvPr/>
+      </p:nvGrpSpPr>
+      <p:grpSpPr>
+        <a:xfrm>
+          <a:off x="0" y="0"/>
+          <a:ext cx="0" cy="0"/>
+          <a:chOff x="0" y="0"/>
+          <a:chExt cx="0" cy="0"/>
+        </a:xfrm>
+      </p:grpSpPr>
+      <p:pic>
+        <p:nvPicPr>
+          <p:cNvPr id="6" name="Picture 5">
+            <a:extLst>
+              <a:ext uri="{FF2B5EF4-FFF2-40B4-BE49-F238E27FC236}">
+                <a16:creationId xmlns:a16="http://schemas.microsoft.com/office/drawing/2014/main" id="{1C597834-3CB9-D2D2-07EE-7AF72725DB63}"/>
+              </a:ext>
+            </a:extLst>
+          </p:cNvPr>
+          <p:cNvPicPr>
+            <a:picLocks noChangeAspect="1"/>
+          </p:cNvPicPr>
+          <p:nvPr/>
+        </p:nvPicPr>
+        <p:blipFill>
+          <a:blip r:embed="rId3"/>
+          <a:stretch>
+            <a:fillRect/>
+          </a:stretch>
+        </p:blipFill>
+        <p:spPr>
+          <a:xfrm>
+            <a:off x="97505" y="870725"/>
+            <a:ext cx="9144000" cy="3877949"/>
+          </a:xfrm>
+          <a:prstGeom prst="rect">
+            <a:avLst/>
+          </a:prstGeom>
+        </p:spPr>
+      </p:pic>
+      <p:sp>
+        <p:nvSpPr>
+          <p:cNvPr id="2" name="Title 1">
+            <a:extLst>
+              <a:ext uri="{FF2B5EF4-FFF2-40B4-BE49-F238E27FC236}">
+                <a16:creationId xmlns:a16="http://schemas.microsoft.com/office/drawing/2014/main" id="{2AEBB9CF-99E0-34C2-13BD-CE711791B329}"/>
+              </a:ext>
+            </a:extLst>
+          </p:cNvPr>
+          <p:cNvSpPr>
+            <a:spLocks noGrp="1"/>
+          </p:cNvSpPr>
+          <p:nvPr>
+            <p:ph type="title"/>
+          </p:nvPr>
+        </p:nvSpPr>
+        <p:spPr/>
+        <p:txBody>
+          <a:bodyPr/>
+          <a:lstStyle/>
+          <a:p>
+            <a:br>
+              <a:rPr lang="en-US" dirty="0"/>
+            </a:br>
+            <a:r>
+              <a:rPr lang="en-US" dirty="0"/>
+              <a:t>Course Schedule</a:t>
+            </a:r>
+          </a:p>
+        </p:txBody>
+      </p:sp>
+      <p:sp>
+        <p:nvSpPr>
+          <p:cNvPr id="8" name="Rectangle 7">
+            <a:extLst>
+              <a:ext uri="{FF2B5EF4-FFF2-40B4-BE49-F238E27FC236}">
+                <a16:creationId xmlns:a16="http://schemas.microsoft.com/office/drawing/2014/main" id="{0C366FE1-DAFA-E7EC-025F-E1D1E8686851}"/>
+              </a:ext>
+            </a:extLst>
+          </p:cNvPr>
+          <p:cNvSpPr/>
+          <p:nvPr/>
+        </p:nvSpPr>
+        <p:spPr>
+          <a:xfrm>
+            <a:off x="8295" y="2696096"/>
+            <a:ext cx="4713249" cy="227205"/>
+          </a:xfrm>
+          <a:prstGeom prst="rect">
+            <a:avLst/>
+          </a:prstGeom>
+          <a:noFill/>
+          <a:ln w="38100">
+            <a:solidFill>
+              <a:srgbClr val="FF0000"/>
+            </a:solidFill>
+          </a:ln>
+        </p:spPr>
+        <p:style>
+          <a:lnRef idx="2">
+            <a:schemeClr val="accent1">
+              <a:shade val="15000"/>
+            </a:schemeClr>
+          </a:lnRef>
+          <a:fillRef idx="1">
+            <a:schemeClr val="accent1"/>
+          </a:fillRef>
+          <a:effectRef idx="0">
+            <a:schemeClr val="accent1"/>
+          </a:effectRef>
+          <a:fontRef idx="minor">
+            <a:schemeClr val="lt1"/>
+          </a:fontRef>
+        </p:style>
+        <p:txBody>
+          <a:bodyPr rtlCol="0" anchor="ctr"/>
+          <a:lstStyle/>
+          <a:p>
+            <a:pPr algn="ctr"/>
+            <a:endParaRPr lang="en-US" sz="1800" dirty="0"/>
+          </a:p>
+        </p:txBody>
+      </p:sp>
+      <p:sp>
+        <p:nvSpPr>
+          <p:cNvPr id="4" name="Content Placeholder 3">
+            <a:extLst>
+              <a:ext uri="{FF2B5EF4-FFF2-40B4-BE49-F238E27FC236}">
+                <a16:creationId xmlns:a16="http://schemas.microsoft.com/office/drawing/2014/main" id="{2AA47940-905D-681C-419F-799A93057732}"/>
+              </a:ext>
+            </a:extLst>
+          </p:cNvPr>
+          <p:cNvSpPr>
+            <a:spLocks noGrp="1"/>
+          </p:cNvSpPr>
+          <p:nvPr>
+            <p:ph idx="1"/>
+          </p:nvPr>
+        </p:nvSpPr>
+        <p:spPr/>
+        <p:txBody>
+          <a:bodyPr/>
+          <a:lstStyle/>
+          <a:p>
+            <a:endParaRPr lang="en-US" dirty="0"/>
+          </a:p>
+        </p:txBody>
+      </p:sp>
+    </p:spTree>
+    <p:extLst>
+      <p:ext uri="{BB962C8B-B14F-4D97-AF65-F5344CB8AC3E}">
+        <p14:creationId xmlns:p14="http://schemas.microsoft.com/office/powerpoint/2010/main" val="1919185427"/>
+      </p:ext>
+    </p:extLst>
+  </p:cSld>
+  <p:clrMapOvr>
+    <a:masterClrMapping/>
+  </p:clrMapOvr>
+</p:sld>
+</file>
+
+<file path=ppt/slides/slide3.xml><?xml version="1.0" encoding="utf-8"?>
+<p:sld xmlns:a="http://schemas.openxmlformats.org/drawingml/2006/main" xmlns:r="http://schemas.openxmlformats.org/officeDocument/2006/relationships" xmlns:p="http://schemas.openxmlformats.org/presentationml/2006/main">
+  <p:cSld>
+    <p:spTree>
+      <p:nvGrpSpPr>
+        <p:cNvPr id="1" name="Shape 470">
+          <a:extLst>
+            <a:ext uri="{FF2B5EF4-FFF2-40B4-BE49-F238E27FC236}">
+              <a16:creationId xmlns:a16="http://schemas.microsoft.com/office/drawing/2014/main" id="{331C143A-1CF1-E401-0CB5-D7BA22316B98}"/>
+            </a:ext>
+          </a:extLst>
+        </p:cNvPr>
+        <p:cNvGrpSpPr/>
+        <p:nvPr/>
+      </p:nvGrpSpPr>
+      <p:grpSpPr>
+        <a:xfrm>
+          <a:off x="0" y="0"/>
+          <a:ext cx="0" cy="0"/>
+          <a:chOff x="0" y="0"/>
+          <a:chExt cx="0" cy="0"/>
+        </a:xfrm>
+      </p:grpSpPr>
+      <p:sp>
+        <p:nvSpPr>
+          <p:cNvPr id="471" name="Google Shape;471;p55">
+            <a:extLst>
+              <a:ext uri="{FF2B5EF4-FFF2-40B4-BE49-F238E27FC236}">
+                <a16:creationId xmlns:a16="http://schemas.microsoft.com/office/drawing/2014/main" id="{55422540-3734-61F7-53F7-602380429E8F}"/>
+              </a:ext>
+            </a:extLst>
+          </p:cNvPr>
+          <p:cNvSpPr txBox="1">
+            <a:spLocks noGrp="1"/>
+          </p:cNvSpPr>
+          <p:nvPr>
+            <p:ph type="title"/>
+          </p:nvPr>
+        </p:nvSpPr>
+        <p:spPr>
+          <a:xfrm>
+            <a:off x="3578426" y="2125861"/>
+            <a:ext cx="6173470" cy="891778"/>
+          </a:xfrm>
+          <a:noFill/>
+          <a:ln>
+            <a:noFill/>
+          </a:ln>
+        </p:spPr>
+        <p:txBody>
+          <a:bodyPr spcFirstLastPara="1" wrap="square" lIns="91425" tIns="91425" rIns="91425" bIns="91425" anchor="t" anchorCtr="0">
+            <a:normAutofit/>
+          </a:bodyPr>
+          <a:lstStyle/>
+          <a:p>
+            <a:pPr lvl="0"/>
+            <a:r>
+              <a:rPr lang="en-US" dirty="0"/>
+              <a:t>Review</a:t>
+            </a:r>
+          </a:p>
+        </p:txBody>
+      </p:sp>
+    </p:spTree>
+    <p:extLst>
+      <p:ext uri="{BB962C8B-B14F-4D97-AF65-F5344CB8AC3E}">
+        <p14:creationId xmlns:p14="http://schemas.microsoft.com/office/powerpoint/2010/main" val="934622849"/>
+      </p:ext>
+    </p:extLst>
+  </p:cSld>
+  <p:clrMapOvr>
+    <a:masterClrMapping/>
+  </p:clrMapOvr>
+</p:sld>
+</file>
+
+<file path=ppt/slides/slide4.xml><?xml version="1.0" encoding="utf-8"?>
+<p:sld xmlns:a="http://schemas.openxmlformats.org/drawingml/2006/main" xmlns:r="http://schemas.openxmlformats.org/officeDocument/2006/relationships" xmlns:p="http://schemas.openxmlformats.org/presentationml/2006/main">
+  <p:cSld>
+    <p:spTree>
+      <p:nvGrpSpPr>
+        <p:cNvPr id="1" name="Shape 470">
+          <a:extLst>
+            <a:ext uri="{FF2B5EF4-FFF2-40B4-BE49-F238E27FC236}">
+              <a16:creationId xmlns:a16="http://schemas.microsoft.com/office/drawing/2014/main" id="{1105E84A-1205-0701-E7F9-9675FAC2D835}"/>
+            </a:ext>
+          </a:extLst>
+        </p:cNvPr>
+        <p:cNvGrpSpPr/>
+        <p:nvPr/>
+      </p:nvGrpSpPr>
+      <p:grpSpPr>
+        <a:xfrm>
+          <a:off x="0" y="0"/>
+          <a:ext cx="0" cy="0"/>
+          <a:chOff x="0" y="0"/>
+          <a:chExt cx="0" cy="0"/>
+        </a:xfrm>
+      </p:grpSpPr>
+      <p:sp>
+        <p:nvSpPr>
+          <p:cNvPr id="471" name="Google Shape;471;p55">
+            <a:extLst>
+              <a:ext uri="{FF2B5EF4-FFF2-40B4-BE49-F238E27FC236}">
+                <a16:creationId xmlns:a16="http://schemas.microsoft.com/office/drawing/2014/main" id="{CEB7E12F-E2C9-500B-63E1-77AA22B0D1BE}"/>
+              </a:ext>
+            </a:extLst>
+          </p:cNvPr>
+          <p:cNvSpPr txBox="1">
+            <a:spLocks noGrp="1"/>
+          </p:cNvSpPr>
+          <p:nvPr>
+            <p:ph type="title"/>
+          </p:nvPr>
+        </p:nvSpPr>
+        <p:spPr>
+          <a:xfrm>
+            <a:off x="2054426" y="2356319"/>
+            <a:ext cx="6173470" cy="891778"/>
+          </a:xfrm>
+          <a:noFill/>
+          <a:ln>
+            <a:noFill/>
+          </a:ln>
+        </p:spPr>
+        <p:txBody>
+          <a:bodyPr spcFirstLastPara="1" wrap="square" lIns="91425" tIns="91425" rIns="91425" bIns="91425" anchor="t" anchorCtr="0">
+            <a:normAutofit/>
+          </a:bodyPr>
+          <a:lstStyle/>
+          <a:p>
+            <a:pPr lvl="0"/>
+            <a:r>
+              <a:rPr lang="en-US" dirty="0"/>
+              <a:t>What did we do last lesson?</a:t>
+            </a:r>
+          </a:p>
+        </p:txBody>
+      </p:sp>
+    </p:spTree>
+    <p:extLst>
+      <p:ext uri="{BB962C8B-B14F-4D97-AF65-F5344CB8AC3E}">
+        <p14:creationId xmlns:p14="http://schemas.microsoft.com/office/powerpoint/2010/main" val="1808581615"/>
+      </p:ext>
+    </p:extLst>
+  </p:cSld>
+  <p:clrMapOvr>
+    <a:masterClrMapping/>
+  </p:clrMapOvr>
+</p:sld>
+</file>
+
+<file path=ppt/slides/slide5.xml><?xml version="1.0" encoding="utf-8"?>
+<p:sld xmlns:a="http://schemas.openxmlformats.org/drawingml/2006/main" xmlns:r="http://schemas.openxmlformats.org/officeDocument/2006/relationships" xmlns:p="http://schemas.openxmlformats.org/presentationml/2006/main">
+  <p:cSld>
+    <p:spTree>
+      <p:nvGrpSpPr>
+        <p:cNvPr id="1" name="Shape 470">
+          <a:extLst>
+            <a:ext uri="{FF2B5EF4-FFF2-40B4-BE49-F238E27FC236}">
+              <a16:creationId xmlns:a16="http://schemas.microsoft.com/office/drawing/2014/main" id="{A69CB039-FD37-0C39-F21F-C7BACD8C7348}"/>
+            </a:ext>
+          </a:extLst>
+        </p:cNvPr>
+        <p:cNvGrpSpPr/>
+        <p:nvPr/>
+      </p:nvGrpSpPr>
+      <p:grpSpPr>
+        <a:xfrm>
+          <a:off x="0" y="0"/>
+          <a:ext cx="0" cy="0"/>
+          <a:chOff x="0" y="0"/>
+          <a:chExt cx="0" cy="0"/>
+        </a:xfrm>
+      </p:grpSpPr>
+      <p:sp>
+        <p:nvSpPr>
+          <p:cNvPr id="471" name="Google Shape;471;p55">
+            <a:extLst>
+              <a:ext uri="{FF2B5EF4-FFF2-40B4-BE49-F238E27FC236}">
+                <a16:creationId xmlns:a16="http://schemas.microsoft.com/office/drawing/2014/main" id="{9B8D174E-8CC3-13F6-9772-7F086E366F56}"/>
+              </a:ext>
+            </a:extLst>
+          </p:cNvPr>
+          <p:cNvSpPr txBox="1">
+            <a:spLocks noGrp="1"/>
+          </p:cNvSpPr>
+          <p:nvPr>
+            <p:ph type="title"/>
+          </p:nvPr>
+        </p:nvSpPr>
+        <p:spPr>
+          <a:xfrm>
+            <a:off x="359440" y="423441"/>
+            <a:ext cx="6173470" cy="891778"/>
+          </a:xfrm>
+          <a:noFill/>
+          <a:ln>
+            <a:noFill/>
+          </a:ln>
+        </p:spPr>
+        <p:txBody>
+          <a:bodyPr spcFirstLastPara="1" wrap="square" lIns="91425" tIns="91425" rIns="91425" bIns="91425" anchor="t" anchorCtr="0">
+            <a:normAutofit/>
+          </a:bodyPr>
+          <a:lstStyle/>
+          <a:p>
+            <a:pPr lvl="0"/>
+            <a:r>
+              <a:rPr lang="en-US" dirty="0"/>
+              <a:t>Pre Class Problem 1</a:t>
+            </a:r>
+          </a:p>
+        </p:txBody>
+      </p:sp>
+      <p:sp>
+        <p:nvSpPr>
+          <p:cNvPr id="3" name="TextBox 2">
+            <a:extLst>
+              <a:ext uri="{FF2B5EF4-FFF2-40B4-BE49-F238E27FC236}">
+                <a16:creationId xmlns:a16="http://schemas.microsoft.com/office/drawing/2014/main" id="{E0392748-B27B-1B59-3E8A-2EF44BD57245}"/>
+              </a:ext>
+            </a:extLst>
+          </p:cNvPr>
+          <p:cNvSpPr txBox="1"/>
+          <p:nvPr/>
+        </p:nvSpPr>
+        <p:spPr>
+          <a:xfrm>
+            <a:off x="195889" y="1247815"/>
+            <a:ext cx="8390550" cy="2677656"/>
+          </a:xfrm>
+          <a:prstGeom prst="rect">
+            <a:avLst/>
+          </a:prstGeom>
+          <a:noFill/>
+        </p:spPr>
+        <p:txBody>
+          <a:bodyPr wrap="square">
+            <a:spAutoFit/>
+          </a:bodyPr>
+          <a:lstStyle/>
+          <a:p>
+            <a:pPr marL="114300" lvl="0" algn="l" rtl="0">
+              <a:spcBef>
+                <a:spcPts val="0"/>
+              </a:spcBef>
+              <a:spcAft>
+                <a:spcPts val="0"/>
+              </a:spcAft>
+              <a:buSzPts val="1800"/>
+            </a:pPr>
+            <a:r>
+              <a:rPr lang="en-US" sz="2400" dirty="0">
+                <a:solidFill>
+                  <a:schemeClr val="bg1"/>
+                </a:solidFill>
+              </a:rPr>
+              <a:t>Write a Python Script that writes 100 random integer values (from 1 to 1000) to another file (.txt) .  **Only do this once**</a:t>
+            </a:r>
+          </a:p>
+          <a:p>
+            <a:pPr marL="114300" lvl="0" algn="l" rtl="0">
+              <a:spcBef>
+                <a:spcPts val="0"/>
+              </a:spcBef>
+              <a:spcAft>
+                <a:spcPts val="0"/>
+              </a:spcAft>
+              <a:buSzPts val="1800"/>
+            </a:pPr>
+            <a:endParaRPr lang="en-US" sz="2400" dirty="0">
+              <a:solidFill>
+                <a:schemeClr val="bg1"/>
+              </a:solidFill>
+            </a:endParaRPr>
+          </a:p>
+          <a:p>
+            <a:pPr marL="114300" lvl="0" algn="l" rtl="0">
+              <a:spcBef>
+                <a:spcPts val="0"/>
+              </a:spcBef>
+              <a:spcAft>
+                <a:spcPts val="0"/>
+              </a:spcAft>
+              <a:buSzPts val="1800"/>
+            </a:pPr>
+            <a:endParaRPr lang="en-US" sz="2400" dirty="0">
+              <a:solidFill>
+                <a:schemeClr val="bg1"/>
+              </a:solidFill>
+            </a:endParaRPr>
+          </a:p>
+          <a:p>
+            <a:pPr marL="114300" lvl="0" algn="l" rtl="0">
+              <a:spcBef>
+                <a:spcPts val="0"/>
+              </a:spcBef>
+              <a:spcAft>
+                <a:spcPts val="0"/>
+              </a:spcAft>
+              <a:buSzPts val="1800"/>
+            </a:pPr>
+            <a:r>
+              <a:rPr lang="en-US" sz="2400" dirty="0">
+                <a:solidFill>
+                  <a:schemeClr val="bg1"/>
+                </a:solidFill>
+              </a:rPr>
+              <a:t>Write another Python Script that opens that file, displays the highest number in the list, the lowest number in the list, and the average of that list.</a:t>
+            </a:r>
+          </a:p>
+        </p:txBody>
+      </p:sp>
+    </p:spTree>
+    <p:extLst>
+      <p:ext uri="{BB962C8B-B14F-4D97-AF65-F5344CB8AC3E}">
+        <p14:creationId xmlns:p14="http://schemas.microsoft.com/office/powerpoint/2010/main" val="4226055667"/>
+      </p:ext>
+    </p:extLst>
+  </p:cSld>
+  <p:clrMapOvr>
+    <a:masterClrMapping/>
+  </p:clrMapOvr>
+</p:sld>
+</file>
+
+<file path=ppt/slides/slide6.xml><?xml version="1.0" encoding="utf-8"?>
+<p:sld xmlns:a="http://schemas.openxmlformats.org/drawingml/2006/main" xmlns:r="http://schemas.openxmlformats.org/officeDocument/2006/relationships" xmlns:p="http://schemas.openxmlformats.org/presentationml/2006/main">
+  <p:cSld>
+    <p:spTree>
+      <p:nvGrpSpPr>
+        <p:cNvPr id="1" name="Shape 470">
+          <a:extLst>
+            <a:ext uri="{FF2B5EF4-FFF2-40B4-BE49-F238E27FC236}">
+              <a16:creationId xmlns:a16="http://schemas.microsoft.com/office/drawing/2014/main" id="{E9656FE8-FD50-A356-0EE5-BBF10756201B}"/>
+            </a:ext>
+          </a:extLst>
+        </p:cNvPr>
+        <p:cNvGrpSpPr/>
+        <p:nvPr/>
+      </p:nvGrpSpPr>
+      <p:grpSpPr>
+        <a:xfrm>
+          <a:off x="0" y="0"/>
+          <a:ext cx="0" cy="0"/>
+          <a:chOff x="0" y="0"/>
+          <a:chExt cx="0" cy="0"/>
+        </a:xfrm>
+      </p:grpSpPr>
+      <p:sp>
+        <p:nvSpPr>
+          <p:cNvPr id="471" name="Google Shape;471;p55">
+            <a:extLst>
+              <a:ext uri="{FF2B5EF4-FFF2-40B4-BE49-F238E27FC236}">
+                <a16:creationId xmlns:a16="http://schemas.microsoft.com/office/drawing/2014/main" id="{11CF11BC-40F7-7823-BE15-7648E4FEBC84}"/>
+              </a:ext>
+            </a:extLst>
+          </p:cNvPr>
+          <p:cNvSpPr txBox="1">
+            <a:spLocks noGrp="1"/>
+          </p:cNvSpPr>
+          <p:nvPr>
+            <p:ph type="title"/>
+          </p:nvPr>
+        </p:nvSpPr>
+        <p:spPr>
+          <a:xfrm>
+            <a:off x="359440" y="423441"/>
+            <a:ext cx="6173470" cy="891778"/>
+          </a:xfrm>
+          <a:noFill/>
+          <a:ln>
+            <a:noFill/>
+          </a:ln>
+        </p:spPr>
+        <p:txBody>
+          <a:bodyPr spcFirstLastPara="1" wrap="square" lIns="91425" tIns="91425" rIns="91425" bIns="91425" anchor="t" anchorCtr="0">
+            <a:normAutofit/>
+          </a:bodyPr>
+          <a:lstStyle/>
+          <a:p>
+            <a:pPr lvl="0"/>
+            <a:r>
+              <a:rPr lang="en-US" dirty="0"/>
+              <a:t>Pre Class Problem 2</a:t>
+            </a:r>
+          </a:p>
+        </p:txBody>
+      </p:sp>
+      <p:sp>
+        <p:nvSpPr>
+          <p:cNvPr id="3" name="TextBox 2">
+            <a:extLst>
+              <a:ext uri="{FF2B5EF4-FFF2-40B4-BE49-F238E27FC236}">
+                <a16:creationId xmlns:a16="http://schemas.microsoft.com/office/drawing/2014/main" id="{6677DEC7-1E2D-6138-2E95-98E16C392A91}"/>
+              </a:ext>
+            </a:extLst>
+          </p:cNvPr>
+          <p:cNvSpPr txBox="1"/>
+          <p:nvPr/>
+        </p:nvSpPr>
+        <p:spPr>
+          <a:xfrm>
+            <a:off x="218192" y="1265797"/>
+            <a:ext cx="8390550" cy="2308324"/>
+          </a:xfrm>
+          <a:prstGeom prst="rect">
+            <a:avLst/>
+          </a:prstGeom>
+          <a:noFill/>
+        </p:spPr>
+        <p:txBody>
+          <a:bodyPr wrap="square">
+            <a:spAutoFit/>
+          </a:bodyPr>
+          <a:lstStyle/>
+          <a:p>
+            <a:pPr marL="114300" lvl="0">
+              <a:buSzPts val="1800"/>
+            </a:pPr>
+            <a:r>
+              <a:rPr lang="en-US" sz="2400" dirty="0">
+                <a:solidFill>
+                  <a:schemeClr val="bg1"/>
+                </a:solidFill>
+              </a:rPr>
+              <a:t>cd into the Lesson 04 folder</a:t>
+            </a:r>
+          </a:p>
+          <a:p>
+            <a:pPr marL="114300" lvl="0">
+              <a:buSzPts val="1800"/>
+            </a:pPr>
+            <a:endParaRPr lang="en-US" sz="2400" dirty="0">
+              <a:solidFill>
+                <a:schemeClr val="bg1"/>
+              </a:solidFill>
+            </a:endParaRPr>
+          </a:p>
+          <a:p>
+            <a:pPr marL="114300" lvl="0">
+              <a:buSzPts val="1800"/>
+            </a:pPr>
+            <a:r>
+              <a:rPr lang="en-US" sz="2400" dirty="0">
+                <a:solidFill>
+                  <a:schemeClr val="bg1"/>
+                </a:solidFill>
+              </a:rPr>
+              <a:t>Create a virtual environment there.  Activate the virtual environment and install all of the dependencies listed in requirements.txt.  After you do this, add this folder to your .</a:t>
+            </a:r>
+            <a:r>
+              <a:rPr lang="en-US" sz="2400" dirty="0" err="1">
+                <a:solidFill>
+                  <a:schemeClr val="bg1"/>
+                </a:solidFill>
+              </a:rPr>
+              <a:t>gitignore</a:t>
+            </a:r>
+            <a:r>
+              <a:rPr lang="en-US" sz="2400" dirty="0">
+                <a:solidFill>
+                  <a:schemeClr val="bg1"/>
+                </a:solidFill>
+              </a:rPr>
+              <a:t> within your repo.</a:t>
+            </a:r>
+          </a:p>
+        </p:txBody>
+      </p:sp>
+    </p:spTree>
+    <p:extLst>
+      <p:ext uri="{BB962C8B-B14F-4D97-AF65-F5344CB8AC3E}">
+        <p14:creationId xmlns:p14="http://schemas.microsoft.com/office/powerpoint/2010/main" val="2152760586"/>
+      </p:ext>
+    </p:extLst>
+  </p:cSld>
+  <p:clrMapOvr>
+    <a:masterClrMapping/>
+  </p:clrMapOvr>
+</p:sld>
+</file>
+
+<file path=ppt/slides/slide7.xml><?xml version="1.0" encoding="utf-8"?>
+<p:sld xmlns:a="http://schemas.openxmlformats.org/drawingml/2006/main" xmlns:r="http://schemas.openxmlformats.org/officeDocument/2006/relationships" xmlns:p="http://schemas.openxmlformats.org/presentationml/2006/main">
+  <p:cSld>
+    <p:spTree>
+      <p:nvGrpSpPr>
+        <p:cNvPr id="1" name="Shape 470"/>
+        <p:cNvGrpSpPr/>
+        <p:nvPr/>
+      </p:nvGrpSpPr>
+      <p:grpSpPr>
+        <a:xfrm>
+          <a:off x="0" y="0"/>
+          <a:ext cx="0" cy="0"/>
+          <a:chOff x="0" y="0"/>
+          <a:chExt cx="0" cy="0"/>
+        </a:xfrm>
+      </p:grpSpPr>
+      <p:sp>
+        <p:nvSpPr>
+          <p:cNvPr id="471" name="Google Shape;471;p55"/>
+          <p:cNvSpPr txBox="1">
+            <a:spLocks noGrp="1"/>
+          </p:cNvSpPr>
+          <p:nvPr>
+            <p:ph type="title"/>
+          </p:nvPr>
+        </p:nvSpPr>
+        <p:spPr>
+          <a:xfrm>
+            <a:off x="411480" y="308611"/>
+            <a:ext cx="6173470" cy="891778"/>
+          </a:xfrm>
+          <a:noFill/>
+          <a:ln>
+            <a:noFill/>
+          </a:ln>
+        </p:spPr>
+        <p:txBody>
+          <a:bodyPr spcFirstLastPara="1" wrap="square" lIns="91425" tIns="91425" rIns="91425" bIns="91425" anchor="t" anchorCtr="0">
+            <a:normAutofit/>
+          </a:bodyPr>
+          <a:lstStyle/>
+          <a:p>
+            <a:pPr lvl="0"/>
+            <a:r>
+              <a:rPr lang="en-US"/>
+              <a:t>PYTHON ERRORS</a:t>
+            </a:r>
+          </a:p>
+        </p:txBody>
+      </p:sp>
+      <p:sp>
+        <p:nvSpPr>
+          <p:cNvPr id="472" name="Google Shape;472;p55"/>
+          <p:cNvSpPr txBox="1"/>
+          <p:nvPr/>
+        </p:nvSpPr>
+        <p:spPr>
+          <a:xfrm>
+            <a:off x="616150" y="1580550"/>
+            <a:ext cx="7647000" cy="3241500"/>
+          </a:xfrm>
+          <a:prstGeom prst="rect">
+            <a:avLst/>
+          </a:prstGeom>
+          <a:noFill/>
+          <a:ln>
+            <a:noFill/>
+          </a:ln>
+        </p:spPr>
+        <p:txBody>
+          <a:bodyPr spcFirstLastPara="1" wrap="square" lIns="91425" tIns="91425" rIns="91425" bIns="91425" anchor="t" anchorCtr="0">
+            <a:noAutofit/>
+          </a:bodyPr>
+          <a:lstStyle/>
+          <a:p>
+            <a:pPr marL="457200" marR="0" lvl="0" indent="-342900" algn="l" rtl="0">
+              <a:lnSpc>
+                <a:spcPct val="100000"/>
+              </a:lnSpc>
+              <a:spcBef>
+                <a:spcPts val="0"/>
+              </a:spcBef>
+              <a:spcAft>
+                <a:spcPts val="0"/>
+              </a:spcAft>
+              <a:buClr>
+                <a:schemeClr val="dk2"/>
+              </a:buClr>
+              <a:buSzPts val="1800"/>
+              <a:buFont typeface="Roboto"/>
+              <a:buChar char="●"/>
+            </a:pPr>
+            <a:r>
+              <a:rPr lang="en" sz="1800" b="0" i="0" u="none" strike="noStrike" cap="none" dirty="0">
+                <a:solidFill>
+                  <a:schemeClr val="lt1"/>
+                </a:solidFill>
+                <a:latin typeface="Roboto"/>
+                <a:ea typeface="Roboto"/>
+                <a:cs typeface="Roboto"/>
+                <a:sym typeface="Roboto"/>
+              </a:rPr>
+              <a:t>Errors are issues in a program that prevent it from running as expected</a:t>
+            </a:r>
+          </a:p>
+          <a:p>
+            <a:pPr marL="457200" marR="0" lvl="0" indent="-342900" algn="l" rtl="0">
+              <a:lnSpc>
+                <a:spcPct val="100000"/>
+              </a:lnSpc>
+              <a:spcBef>
+                <a:spcPts val="0"/>
+              </a:spcBef>
+              <a:spcAft>
+                <a:spcPts val="0"/>
+              </a:spcAft>
+              <a:buClr>
+                <a:schemeClr val="dk2"/>
+              </a:buClr>
+              <a:buSzPts val="1800"/>
+              <a:buFont typeface="Roboto"/>
+              <a:buChar char="●"/>
+            </a:pPr>
+            <a:endParaRPr sz="1800" b="0" i="0" u="none" strike="noStrike" cap="none" dirty="0">
+              <a:solidFill>
+                <a:schemeClr val="lt1"/>
+              </a:solidFill>
+              <a:latin typeface="Roboto"/>
+              <a:ea typeface="Roboto"/>
+              <a:cs typeface="Roboto"/>
+              <a:sym typeface="Roboto"/>
+            </a:endParaRPr>
+          </a:p>
+          <a:p>
+            <a:pPr marL="457200" marR="0" lvl="0" indent="-342900" algn="l" rtl="0">
+              <a:lnSpc>
+                <a:spcPct val="100000"/>
+              </a:lnSpc>
+              <a:spcBef>
+                <a:spcPts val="0"/>
+              </a:spcBef>
+              <a:spcAft>
+                <a:spcPts val="0"/>
+              </a:spcAft>
+              <a:buClr>
+                <a:schemeClr val="dk2"/>
+              </a:buClr>
+              <a:buSzPts val="1800"/>
+              <a:buFont typeface="Roboto"/>
+              <a:buChar char="●"/>
+            </a:pPr>
+            <a:r>
+              <a:rPr lang="en" sz="1800" b="0" i="0" u="none" strike="noStrike" cap="none" dirty="0">
+                <a:solidFill>
+                  <a:schemeClr val="lt1"/>
+                </a:solidFill>
+                <a:latin typeface="Roboto"/>
+                <a:ea typeface="Roboto"/>
+                <a:cs typeface="Roboto"/>
+                <a:sym typeface="Roboto"/>
+              </a:rPr>
+              <a:t>They help programmers find and fix mistakes</a:t>
+            </a:r>
+          </a:p>
+          <a:p>
+            <a:pPr marL="457200" marR="0" lvl="0" indent="-342900" algn="l" rtl="0">
+              <a:lnSpc>
+                <a:spcPct val="100000"/>
+              </a:lnSpc>
+              <a:spcBef>
+                <a:spcPts val="0"/>
+              </a:spcBef>
+              <a:spcAft>
+                <a:spcPts val="0"/>
+              </a:spcAft>
+              <a:buClr>
+                <a:schemeClr val="dk2"/>
+              </a:buClr>
+              <a:buSzPts val="1800"/>
+              <a:buFont typeface="Roboto"/>
+              <a:buChar char="●"/>
+            </a:pPr>
+            <a:endParaRPr sz="1800" b="0" i="0" u="none" strike="noStrike" cap="none" dirty="0">
+              <a:solidFill>
+                <a:schemeClr val="lt1"/>
+              </a:solidFill>
+              <a:latin typeface="Roboto"/>
+              <a:ea typeface="Roboto"/>
+              <a:cs typeface="Roboto"/>
+              <a:sym typeface="Roboto"/>
+            </a:endParaRPr>
+          </a:p>
+          <a:p>
+            <a:pPr marL="457200" marR="0" lvl="0" indent="-342900" algn="l" rtl="0">
+              <a:lnSpc>
+                <a:spcPct val="100000"/>
+              </a:lnSpc>
+              <a:spcBef>
+                <a:spcPts val="0"/>
+              </a:spcBef>
+              <a:spcAft>
+                <a:spcPts val="0"/>
+              </a:spcAft>
+              <a:buClr>
+                <a:schemeClr val="dk2"/>
+              </a:buClr>
+              <a:buSzPts val="1800"/>
+              <a:buFont typeface="Roboto"/>
+              <a:buChar char="●"/>
+            </a:pPr>
+            <a:r>
+              <a:rPr lang="en" sz="1800" b="0" i="0" u="none" strike="noStrike" cap="none" dirty="0">
+                <a:solidFill>
+                  <a:schemeClr val="lt1"/>
+                </a:solidFill>
+                <a:latin typeface="Roboto"/>
+                <a:ea typeface="Roboto"/>
+                <a:cs typeface="Roboto"/>
+                <a:sym typeface="Roboto"/>
+              </a:rPr>
+              <a:t>Why learn errors?</a:t>
+            </a:r>
+            <a:endParaRPr sz="1800" b="0" i="0" u="none" strike="noStrike" cap="none" dirty="0">
+              <a:solidFill>
+                <a:schemeClr val="lt1"/>
+              </a:solidFill>
+              <a:latin typeface="Roboto"/>
+              <a:ea typeface="Roboto"/>
+              <a:cs typeface="Roboto"/>
+              <a:sym typeface="Roboto"/>
+            </a:endParaRPr>
+          </a:p>
+          <a:p>
+            <a:pPr marL="914400" marR="0" lvl="1" indent="-342900" algn="l" rtl="0">
+              <a:lnSpc>
+                <a:spcPct val="100000"/>
+              </a:lnSpc>
+              <a:spcBef>
+                <a:spcPts val="0"/>
+              </a:spcBef>
+              <a:spcAft>
+                <a:spcPts val="0"/>
+              </a:spcAft>
+              <a:buClr>
+                <a:schemeClr val="dk2"/>
+              </a:buClr>
+              <a:buSzPts val="1800"/>
+              <a:buFont typeface="Roboto"/>
+              <a:buChar char="○"/>
+            </a:pPr>
+            <a:r>
+              <a:rPr lang="en" sz="1800" b="0" i="0" u="none" strike="noStrike" cap="none" dirty="0">
+                <a:solidFill>
+                  <a:schemeClr val="lt1"/>
+                </a:solidFill>
+                <a:latin typeface="Roboto"/>
+                <a:ea typeface="Roboto"/>
+                <a:cs typeface="Roboto"/>
+                <a:sym typeface="Roboto"/>
+              </a:rPr>
+              <a:t>Errors help you debug</a:t>
+            </a:r>
+            <a:endParaRPr sz="1800" b="0" i="0" u="none" strike="noStrike" cap="none" dirty="0">
+              <a:solidFill>
+                <a:schemeClr val="lt1"/>
+              </a:solidFill>
+              <a:latin typeface="Roboto"/>
+              <a:ea typeface="Roboto"/>
+              <a:cs typeface="Roboto"/>
+              <a:sym typeface="Roboto"/>
+            </a:endParaRPr>
+          </a:p>
+          <a:p>
+            <a:pPr marL="914400" marR="0" lvl="1" indent="-342900" algn="l" rtl="0">
+              <a:lnSpc>
+                <a:spcPct val="100000"/>
+              </a:lnSpc>
+              <a:spcBef>
+                <a:spcPts val="0"/>
+              </a:spcBef>
+              <a:spcAft>
+                <a:spcPts val="0"/>
+              </a:spcAft>
+              <a:buClr>
+                <a:schemeClr val="dk2"/>
+              </a:buClr>
+              <a:buSzPts val="1800"/>
+              <a:buFont typeface="Roboto"/>
+              <a:buChar char="○"/>
+            </a:pPr>
+            <a:r>
+              <a:rPr lang="en" sz="1800" b="0" i="0" u="none" strike="noStrike" cap="none" dirty="0">
+                <a:solidFill>
+                  <a:schemeClr val="lt1"/>
+                </a:solidFill>
+                <a:latin typeface="Roboto"/>
+                <a:ea typeface="Roboto"/>
+                <a:cs typeface="Roboto"/>
+                <a:sym typeface="Roboto"/>
+              </a:rPr>
+              <a:t>Knowing common errors makes writing and fixing code faster</a:t>
+            </a:r>
+            <a:endParaRPr sz="1800" b="0" i="0" u="none" strike="noStrike" cap="none" dirty="0">
+              <a:solidFill>
+                <a:schemeClr val="lt1"/>
+              </a:solidFill>
+              <a:latin typeface="Roboto"/>
+              <a:ea typeface="Roboto"/>
+              <a:cs typeface="Roboto"/>
+              <a:sym typeface="Roboto"/>
+            </a:endParaRPr>
+          </a:p>
+          <a:p>
+            <a:pPr marL="914400" marR="0" lvl="1" indent="-342900" algn="l" rtl="0">
+              <a:lnSpc>
+                <a:spcPct val="100000"/>
+              </a:lnSpc>
+              <a:spcBef>
+                <a:spcPts val="0"/>
+              </a:spcBef>
+              <a:spcAft>
+                <a:spcPts val="0"/>
+              </a:spcAft>
+              <a:buClr>
+                <a:schemeClr val="dk2"/>
+              </a:buClr>
+              <a:buSzPts val="1800"/>
+              <a:buFont typeface="Roboto"/>
+              <a:buChar char="○"/>
+            </a:pPr>
+            <a:r>
+              <a:rPr lang="en" sz="1800" b="0" i="0" u="none" strike="noStrike" cap="none" dirty="0">
+                <a:solidFill>
+                  <a:schemeClr val="lt1"/>
+                </a:solidFill>
+                <a:latin typeface="Roboto"/>
+                <a:ea typeface="Roboto"/>
+                <a:cs typeface="Roboto"/>
+                <a:sym typeface="Roboto"/>
+              </a:rPr>
+              <a:t>Good programs handle errors gracefully</a:t>
+            </a:r>
+            <a:endParaRPr sz="1800" b="0" i="0" u="none" strike="noStrike" cap="none" dirty="0">
+              <a:solidFill>
+                <a:schemeClr val="lt1"/>
+              </a:solidFill>
+              <a:latin typeface="Roboto"/>
+              <a:ea typeface="Roboto"/>
+              <a:cs typeface="Roboto"/>
+              <a:sym typeface="Roboto"/>
+            </a:endParaRPr>
+          </a:p>
+        </p:txBody>
+      </p:sp>
+    </p:spTree>
+  </p:cSld>
+  <p:clrMapOvr>
+    <a:masterClrMapping/>
+  </p:clrMapOvr>
+  <p:timing>
+    <p:tnLst>
+      <p:par>
+        <p:cTn id="1" dur="indefinite" restart="never" nodeType="tmRoot">
+          <p:childTnLst>
+            <p:seq concurrent="1" nextAc="seek">
+              <p:cTn id="2" dur="indefinite" nodeType="mainSeq">
+                <p:childTnLst>
+                  <p:par>
+                    <p:cTn id="3" fill="hold">
+                      <p:stCondLst>
+                        <p:cond delay="indefinite"/>
+                      </p:stCondLst>
+                      <p:childTnLst>
+                        <p:par>
+                          <p:cTn id="4" fill="hold">
+                            <p:stCondLst>
+                              <p:cond delay="0"/>
+                            </p:stCondLst>
+                            <p:childTnLst>
+                              <p:par>
+                                <p:cTn id="5" presetID="1" presetClass="entr" presetSubtype="0" fill="hold" nodeType="clickEffect">
+                                  <p:stCondLst>
+                                    <p:cond delay="0"/>
+                                  </p:stCondLst>
+                                  <p:childTnLst>
+                                    <p:set>
+                                      <p:cBhvr>
+                                        <p:cTn id="6" dur="1" fill="hold">
+                                          <p:stCondLst>
+                                            <p:cond delay="0"/>
+                                          </p:stCondLst>
+                                        </p:cTn>
+                                        <p:tgtEl>
+                                          <p:spTgt spid="472">
+                                            <p:txEl>
+                                              <p:pRg st="0" end="0"/>
+                                            </p:txEl>
+                                          </p:spTgt>
+                                        </p:tgtEl>
+                                        <p:attrNameLst>
+                                          <p:attrName>style.visibility</p:attrName>
+                                        </p:attrNameLst>
+                                      </p:cBhvr>
+                                      <p:to>
+                                        <p:strVal val="visible"/>
+                                      </p:to>
+                                    </p:set>
+                                  </p:childTnLst>
+                                </p:cTn>
+                              </p:par>
+                            </p:childTnLst>
+                          </p:cTn>
+                        </p:par>
+                      </p:childTnLst>
+                    </p:cTn>
+                  </p:par>
+                  <p:par>
+                    <p:cTn id="7" fill="hold">
+                      <p:stCondLst>
+                        <p:cond delay="indefinite"/>
+                      </p:stCondLst>
+                      <p:childTnLst>
+                        <p:par>
+                          <p:cTn id="8" fill="hold">
+                            <p:stCondLst>
+                              <p:cond delay="0"/>
+                            </p:stCondLst>
+                            <p:childTnLst>
+                              <p:par>
+                                <p:cTn id="9" presetID="1" presetClass="entr" presetSubtype="0" fill="hold" nodeType="clickEffect">
+                                  <p:stCondLst>
+                                    <p:cond delay="0"/>
+                                  </p:stCondLst>
+                                  <p:childTnLst>
+                                    <p:set>
+                                      <p:cBhvr>
+                                        <p:cTn id="10" dur="1" fill="hold">
+                                          <p:stCondLst>
+                                            <p:cond delay="0"/>
+                                          </p:stCondLst>
+                                        </p:cTn>
+                                        <p:tgtEl>
+                                          <p:spTgt spid="472">
+                                            <p:txEl>
+                                              <p:pRg st="2" end="2"/>
+                                            </p:txEl>
+                                          </p:spTgt>
+                                        </p:tgtEl>
+                                        <p:attrNameLst>
+                                          <p:attrName>style.visibility</p:attrName>
+                                        </p:attrNameLst>
+                                      </p:cBhvr>
+                                      <p:to>
+                                        <p:strVal val="visible"/>
+                                      </p:to>
+                                    </p:set>
+                                  </p:childTnLst>
+                                </p:cTn>
+                              </p:par>
+                            </p:childTnLst>
+                          </p:cTn>
+                        </p:par>
+                      </p:childTnLst>
+                    </p:cTn>
+                  </p:par>
+                  <p:par>
+                    <p:cTn id="11" fill="hold">
+                      <p:stCondLst>
+                        <p:cond delay="indefinite"/>
+                      </p:stCondLst>
+                      <p:childTnLst>
+                        <p:par>
+                          <p:cTn id="12" fill="hold">
+                            <p:stCondLst>
+                              <p:cond delay="0"/>
+                            </p:stCondLst>
+                            <p:childTnLst>
+                              <p:par>
+                                <p:cTn id="13" presetID="1" presetClass="entr" presetSubtype="0" fill="hold" nodeType="clickEffect">
+                                  <p:stCondLst>
+                                    <p:cond delay="0"/>
+                                  </p:stCondLst>
+                                  <p:childTnLst>
+                                    <p:set>
+                                      <p:cBhvr>
+                                        <p:cTn id="14" dur="1" fill="hold">
+                                          <p:stCondLst>
+                                            <p:cond delay="0"/>
+                                          </p:stCondLst>
+                                        </p:cTn>
+                                        <p:tgtEl>
+                                          <p:spTgt spid="472">
+                                            <p:txEl>
+                                              <p:pRg st="4" end="4"/>
+                                            </p:txEl>
+                                          </p:spTgt>
+                                        </p:tgtEl>
+                                        <p:attrNameLst>
+                                          <p:attrName>style.visibility</p:attrName>
+                                        </p:attrNameLst>
+                                      </p:cBhvr>
+                                      <p:to>
+                                        <p:strVal val="visible"/>
+                                      </p:to>
+                                    </p:set>
+                                  </p:childTnLst>
+                                </p:cTn>
+                              </p:par>
+                            </p:childTnLst>
+                          </p:cTn>
+                        </p:par>
+                      </p:childTnLst>
+                    </p:cTn>
+                  </p:par>
+                  <p:par>
+                    <p:cTn id="15" fill="hold">
+                      <p:stCondLst>
+                        <p:cond delay="indefinite"/>
+                      </p:stCondLst>
+                      <p:childTnLst>
+                        <p:par>
+                          <p:cTn id="16" fill="hold">
+                            <p:stCondLst>
+                              <p:cond delay="0"/>
+                            </p:stCondLst>
+                            <p:childTnLst>
+                              <p:par>
+                                <p:cTn id="17" presetID="1" presetClass="entr" presetSubtype="0" fill="hold" nodeType="clickEffect">
+                                  <p:stCondLst>
+                                    <p:cond delay="0"/>
+                                  </p:stCondLst>
+                                  <p:childTnLst>
+                                    <p:set>
+                                      <p:cBhvr>
+                                        <p:cTn id="18" dur="1" fill="hold">
+                                          <p:stCondLst>
+                                            <p:cond delay="0"/>
+                                          </p:stCondLst>
+                                        </p:cTn>
+                                        <p:tgtEl>
+                                          <p:spTgt spid="472">
+                                            <p:txEl>
+                                              <p:pRg st="5" end="5"/>
+                                            </p:txEl>
+                                          </p:spTgt>
+                                        </p:tgtEl>
+                                        <p:attrNameLst>
+                                          <p:attrName>style.visibility</p:attrName>
+                                        </p:attrNameLst>
+                                      </p:cBhvr>
+                                      <p:to>
+                                        <p:strVal val="visible"/>
+                                      </p:to>
+                                    </p:set>
+                                  </p:childTnLst>
+                                </p:cTn>
+                              </p:par>
+                            </p:childTnLst>
+                          </p:cTn>
+                        </p:par>
+                      </p:childTnLst>
+                    </p:cTn>
+                  </p:par>
+                  <p:par>
+                    <p:cTn id="19" fill="hold">
+                      <p:stCondLst>
+                        <p:cond delay="indefinite"/>
+                      </p:stCondLst>
+                      <p:childTnLst>
+                        <p:par>
+                          <p:cTn id="20" fill="hold">
+                            <p:stCondLst>
+                              <p:cond delay="0"/>
+                            </p:stCondLst>
+                            <p:childTnLst>
+                              <p:par>
+                                <p:cTn id="21" presetID="1" presetClass="entr" presetSubtype="0" fill="hold" nodeType="clickEffect">
+                                  <p:stCondLst>
+                                    <p:cond delay="0"/>
+                                  </p:stCondLst>
+                                  <p:childTnLst>
+                                    <p:set>
+                                      <p:cBhvr>
+                                        <p:cTn id="22" dur="1" fill="hold">
+                                          <p:stCondLst>
+                                            <p:cond delay="0"/>
+                                          </p:stCondLst>
+                                        </p:cTn>
+                                        <p:tgtEl>
+                                          <p:spTgt spid="472">
+                                            <p:txEl>
+                                              <p:pRg st="6" end="6"/>
+                                            </p:txEl>
+                                          </p:spTgt>
+                                        </p:tgtEl>
+                                        <p:attrNameLst>
+                                          <p:attrName>style.visibility</p:attrName>
+                                        </p:attrNameLst>
+                                      </p:cBhvr>
+                                      <p:to>
+                                        <p:strVal val="visible"/>
+                                      </p:to>
+                                    </p:set>
+                                  </p:childTnLst>
+                                </p:cTn>
+                              </p:par>
+                            </p:childTnLst>
+                          </p:cTn>
+                        </p:par>
+                      </p:childTnLst>
+                    </p:cTn>
+                  </p:par>
+                  <p:par>
+                    <p:cTn id="23" fill="hold">
+                      <p:stCondLst>
+                        <p:cond delay="indefinite"/>
+                      </p:stCondLst>
+                      <p:childTnLst>
+                        <p:par>
+                          <p:cTn id="24" fill="hold">
+                            <p:stCondLst>
+                              <p:cond delay="0"/>
+                            </p:stCondLst>
+                            <p:childTnLst>
+                              <p:par>
+                                <p:cTn id="25" presetID="1" presetClass="entr" presetSubtype="0" fill="hold" nodeType="clickEffect">
+                                  <p:stCondLst>
+                                    <p:cond delay="0"/>
+                                  </p:stCondLst>
+                                  <p:childTnLst>
+                                    <p:set>
+                                      <p:cBhvr>
+                                        <p:cTn id="26" dur="1" fill="hold">
+                                          <p:stCondLst>
+                                            <p:cond delay="0"/>
+                                          </p:stCondLst>
+                                        </p:cTn>
+                                        <p:tgtEl>
+                                          <p:spTgt spid="472">
+                                            <p:txEl>
+                                              <p:pRg st="7" end="7"/>
+                                            </p:txEl>
+                                          </p:spTgt>
+                                        </p:tgtEl>
+                                        <p:attrNameLst>
+                                          <p:attrName>style.visibility</p:attrName>
+                                        </p:attrNameLst>
+                                      </p:cBhvr>
+                                      <p:to>
+                                        <p:strVal val="visible"/>
+                                      </p:to>
+                                    </p:set>
+                                  </p:childTnLst>
+                                </p:cTn>
+                              </p:par>
+                            </p:childTnLst>
+                          </p:cTn>
+                        </p:par>
+                      </p:childTnLst>
+                    </p:cTn>
+                  </p:par>
+                </p:childTnLst>
+              </p:cTn>
+              <p:prevCondLst>
+                <p:cond evt="onPrev" delay="0">
+                  <p:tgtEl>
+                    <p:sldTgt/>
+                  </p:tgtEl>
+                </p:cond>
+              </p:prevCondLst>
+              <p:nextCondLst>
+                <p:cond evt="onNext" delay="0">
+                  <p:tgtEl>
+                    <p:sldTgt/>
+                  </p:tgtEl>
+                </p:cond>
+              </p:nextCondLst>
+            </p:seq>
+          </p:childTnLst>
+        </p:cTn>
+      </p:par>
+    </p:tnLst>
+  </p:timing>
+</p:sld>
+</file>
+
+<file path=ppt/slides/slide8.xml><?xml version="1.0" encoding="utf-8"?>
+<p:sld xmlns:a="http://schemas.openxmlformats.org/drawingml/2006/main" xmlns:r="http://schemas.openxmlformats.org/officeDocument/2006/relationships" xmlns:p="http://schemas.openxmlformats.org/presentationml/2006/main">
+  <p:cSld>
+    <p:spTree>
+      <p:nvGrpSpPr>
+        <p:cNvPr id="1" name="Shape 470">
+          <a:extLst>
+            <a:ext uri="{FF2B5EF4-FFF2-40B4-BE49-F238E27FC236}">
+              <a16:creationId xmlns:a16="http://schemas.microsoft.com/office/drawing/2014/main" id="{534B5E92-E257-7AC5-BBA4-4E361AD2A37F}"/>
+            </a:ext>
+          </a:extLst>
+        </p:cNvPr>
+        <p:cNvGrpSpPr/>
+        <p:nvPr/>
+      </p:nvGrpSpPr>
+      <p:grpSpPr>
+        <a:xfrm>
+          <a:off x="0" y="0"/>
+          <a:ext cx="0" cy="0"/>
+          <a:chOff x="0" y="0"/>
+          <a:chExt cx="0" cy="0"/>
+        </a:xfrm>
+      </p:grpSpPr>
+      <p:sp>
+        <p:nvSpPr>
+          <p:cNvPr id="3" name="Rectangle 2">
+            <a:extLst>
+              <a:ext uri="{FF2B5EF4-FFF2-40B4-BE49-F238E27FC236}">
+                <a16:creationId xmlns:a16="http://schemas.microsoft.com/office/drawing/2014/main" id="{9D653252-A59F-3C11-2036-F09C82DD1E18}"/>
+              </a:ext>
+            </a:extLst>
+          </p:cNvPr>
+          <p:cNvSpPr/>
+          <p:nvPr/>
+        </p:nvSpPr>
+        <p:spPr>
+          <a:xfrm>
+            <a:off x="750849" y="1063083"/>
+            <a:ext cx="7582829" cy="3873190"/>
+          </a:xfrm>
+          <a:prstGeom prst="rect">
+            <a:avLst/>
+          </a:prstGeom>
+          <a:solidFill>
+            <a:schemeClr val="bg1"/>
+          </a:solidFill>
+        </p:spPr>
+        <p:style>
+          <a:lnRef idx="2">
+            <a:schemeClr val="accent1">
+              <a:shade val="15000"/>
+            </a:schemeClr>
+          </a:lnRef>
+          <a:fillRef idx="1">
+            <a:schemeClr val="accent1"/>
+          </a:fillRef>
+          <a:effectRef idx="0">
+            <a:schemeClr val="accent1"/>
+          </a:effectRef>
+          <a:fontRef idx="minor">
+            <a:schemeClr val="lt1"/>
+          </a:fontRef>
+        </p:style>
+        <p:txBody>
+          <a:bodyPr rtlCol="0" anchor="ctr"/>
+          <a:lstStyle/>
+          <a:p>
+            <a:pPr algn="ctr"/>
+            <a:endParaRPr lang="en-US"/>
+          </a:p>
+        </p:txBody>
+      </p:sp>
+      <p:sp>
+        <p:nvSpPr>
+          <p:cNvPr id="471" name="Google Shape;471;p55">
+            <a:extLst>
+              <a:ext uri="{FF2B5EF4-FFF2-40B4-BE49-F238E27FC236}">
+                <a16:creationId xmlns:a16="http://schemas.microsoft.com/office/drawing/2014/main" id="{7C60BFF9-4AD2-941C-C5A4-9EFF523F72D0}"/>
+              </a:ext>
+            </a:extLst>
+          </p:cNvPr>
+          <p:cNvSpPr txBox="1">
+            <a:spLocks noGrp="1"/>
+          </p:cNvSpPr>
+          <p:nvPr>
+            <p:ph type="title"/>
+          </p:nvPr>
+        </p:nvSpPr>
+        <p:spPr>
+          <a:xfrm>
+            <a:off x="411480" y="308611"/>
+            <a:ext cx="6173470" cy="891778"/>
+          </a:xfrm>
+          <a:noFill/>
+          <a:ln>
+            <a:noFill/>
+          </a:ln>
+        </p:spPr>
+        <p:txBody>
+          <a:bodyPr spcFirstLastPara="1" wrap="square" lIns="91425" tIns="91425" rIns="91425" bIns="91425" anchor="t" anchorCtr="0">
+            <a:normAutofit/>
+          </a:bodyPr>
+          <a:lstStyle/>
+          <a:p>
+            <a:pPr lvl="0"/>
+            <a:r>
+              <a:rPr lang="en-US"/>
+              <a:t>PYTHON ERRORS</a:t>
+            </a:r>
+          </a:p>
+        </p:txBody>
+      </p:sp>
+      <p:pic>
+        <p:nvPicPr>
+          <p:cNvPr id="2" name="Picture 1" descr="junior python что надо знать">
+            <a:extLst>
+              <a:ext uri="{FF2B5EF4-FFF2-40B4-BE49-F238E27FC236}">
+                <a16:creationId xmlns:a16="http://schemas.microsoft.com/office/drawing/2014/main" id="{E5A6A1FC-791B-B0DB-C874-D01C938C2621}"/>
+              </a:ext>
+            </a:extLst>
+          </p:cNvPr>
+          <p:cNvPicPr>
+            <a:picLocks noChangeAspect="1"/>
+          </p:cNvPicPr>
+          <p:nvPr/>
+        </p:nvPicPr>
+        <p:blipFill>
+          <a:blip r:embed="rId3"/>
+          <a:stretch>
+            <a:fillRect/>
+          </a:stretch>
+        </p:blipFill>
+        <p:spPr>
+          <a:xfrm>
+            <a:off x="1238250" y="1180403"/>
+            <a:ext cx="6667500" cy="3638550"/>
+          </a:xfrm>
+          <a:prstGeom prst="rect">
+            <a:avLst/>
+          </a:prstGeom>
+        </p:spPr>
+      </p:pic>
+    </p:spTree>
+    <p:extLst>
+      <p:ext uri="{BB962C8B-B14F-4D97-AF65-F5344CB8AC3E}">
+        <p14:creationId xmlns:p14="http://schemas.microsoft.com/office/powerpoint/2010/main" val="841924725"/>
+      </p:ext>
+    </p:extLst>
+  </p:cSld>
+  <p:clrMapOvr>
+    <a:masterClrMapping/>
+  </p:clrMapOvr>
+</p:sld>
+</file>
+
+<file path=ppt/slides/slide9.xml><?xml version="1.0" encoding="utf-8"?>
+<p:sld xmlns:a="http://schemas.openxmlformats.org/drawingml/2006/main" xmlns:r="http://schemas.openxmlformats.org/officeDocument/2006/relationships" xmlns:p="http://schemas.openxmlformats.org/presentationml/2006/main" show="0">
+  <p:cSld>
+    <p:spTree>
+      <p:nvGrpSpPr>
+        <p:cNvPr id="1" name="Shape 476"/>
+        <p:cNvGrpSpPr/>
+        <p:nvPr/>
+      </p:nvGrpSpPr>
+      <p:grpSpPr>
+        <a:xfrm>
+          <a:off x="0" y="0"/>
+          <a:ext cx="0" cy="0"/>
+          <a:chOff x="0" y="0"/>
+          <a:chExt cx="0" cy="0"/>
+        </a:xfrm>
+      </p:grpSpPr>
+      <p:sp>
+        <p:nvSpPr>
+          <p:cNvPr id="477" name="Google Shape;477;p56"/>
+          <p:cNvSpPr txBox="1">
+            <a:spLocks noGrp="1"/>
+          </p:cNvSpPr>
+          <p:nvPr>
+            <p:ph type="title"/>
+          </p:nvPr>
+        </p:nvSpPr>
+        <p:spPr>
+          <a:xfrm>
+            <a:off x="411480" y="308611"/>
+            <a:ext cx="6173470" cy="891778"/>
+          </a:xfrm>
+          <a:noFill/>
+          <a:ln>
+            <a:noFill/>
+          </a:ln>
+        </p:spPr>
+        <p:txBody>
+          <a:bodyPr spcFirstLastPara="1" wrap="square" lIns="91425" tIns="91425" rIns="91425" bIns="91425" anchor="t" anchorCtr="0">
+            <a:normAutofit/>
+          </a:bodyPr>
+          <a:lstStyle/>
+          <a:p>
+            <a:pPr lvl="0"/>
+            <a:r>
+              <a:rPr lang="en-US"/>
+              <a:t>EXERCISE - PYTHON ERRORS</a:t>
+            </a:r>
+          </a:p>
+        </p:txBody>
+      </p:sp>
+      <p:sp>
+        <p:nvSpPr>
+          <p:cNvPr id="478" name="Google Shape;478;p56"/>
+          <p:cNvSpPr txBox="1">
+            <a:spLocks noGrp="1"/>
+          </p:cNvSpPr>
+          <p:nvPr>
+            <p:ph type="body" idx="1"/>
+          </p:nvPr>
+        </p:nvSpPr>
+        <p:spPr>
+          <a:xfrm>
+            <a:off x="411480" y="1611630"/>
+            <a:ext cx="5096351" cy="3017520"/>
+          </a:xfrm>
+          <a:noFill/>
+          <a:ln>
+            <a:noFill/>
+          </a:ln>
+        </p:spPr>
+        <p:txBody>
+          <a:bodyPr spcFirstLastPara="1" wrap="square" lIns="91425" tIns="91425" rIns="91425" bIns="91425" anchor="t" anchorCtr="0">
+            <a:normAutofit fontScale="77500" lnSpcReduction="20000"/>
+          </a:bodyPr>
+          <a:lstStyle/>
+          <a:p>
+            <a:pPr lvl="0"/>
+            <a:r>
+              <a:rPr lang="en-US"/>
+              <a:t>5 minutes</a:t>
+            </a:r>
+          </a:p>
+          <a:p>
+            <a:pPr lvl="0"/>
+            <a:endParaRPr lang="en-US"/>
+          </a:p>
+          <a:p>
+            <a:pPr lvl="0"/>
+            <a:r>
+              <a:rPr lang="en-US"/>
+              <a:t>Groups of 2-3</a:t>
+            </a:r>
+          </a:p>
+          <a:p>
+            <a:pPr lvl="0"/>
+            <a:r>
+              <a:rPr lang="en-US"/>
+              <a:t>Research each python error and demonstrate an example case of when this error will be raised</a:t>
+            </a:r>
+          </a:p>
+          <a:p>
+            <a:pPr lvl="0"/>
+            <a:r>
+              <a:rPr lang="en-US"/>
+              <a:t>SyntaxError</a:t>
+            </a:r>
+          </a:p>
+          <a:p>
+            <a:pPr lvl="0"/>
+            <a:r>
+              <a:rPr lang="en-US"/>
+              <a:t>IndentationError</a:t>
+            </a:r>
+          </a:p>
+          <a:p>
+            <a:pPr lvl="0"/>
+            <a:r>
+              <a:rPr lang="en-US"/>
+              <a:t>TypeError </a:t>
+            </a:r>
+          </a:p>
+          <a:p>
+            <a:pPr lvl="0"/>
+            <a:r>
+              <a:rPr lang="en-US"/>
+              <a:t>ValueError</a:t>
+            </a:r>
+          </a:p>
+          <a:p>
+            <a:pPr lvl="0"/>
+            <a:r>
+              <a:rPr lang="en-US"/>
+              <a:t>ZeroDivisionError</a:t>
+            </a:r>
+          </a:p>
+          <a:p>
+            <a:pPr lvl="0"/>
+            <a:r>
+              <a:rPr lang="en-US"/>
+              <a:t>IndexError</a:t>
+            </a:r>
+          </a:p>
+          <a:p>
+            <a:pPr lvl="0"/>
+            <a:r>
+              <a:rPr lang="en-US"/>
+              <a:t>KeyError</a:t>
+            </a:r>
+          </a:p>
+          <a:p>
+            <a:pPr lvl="0"/>
+            <a:r>
+              <a:rPr lang="en-US"/>
+              <a:t>AttributeError</a:t>
+            </a:r>
+          </a:p>
+          <a:p>
+            <a:pPr lvl="0"/>
+            <a:r>
+              <a:rPr lang="en-US"/>
+              <a:t>FileNotFoundError</a:t>
+            </a:r>
+          </a:p>
+          <a:p>
+            <a:pPr lvl="0"/>
+            <a:r>
+              <a:rPr lang="en-US"/>
+              <a:t>ImportError</a:t>
+            </a:r>
+          </a:p>
+        </p:txBody>
+      </p:sp>
+    </p:spTree>
+  </p:cSld>
+  <p:clrMapOvr>
+    <a:masterClrMapping/>
+  </p:clrMapOvr>
+</p:sld>
+</file>
+
 <file path=ppt/theme/theme1.xml><?xml version="1.0" encoding="utf-8"?>
 <a:theme xmlns:a="http://schemas.openxmlformats.org/drawingml/2006/main" name="US Army 2023 AFC DEVCOM Logo">
   <a:themeElements>
